--- a/results/slides.pptx
+++ b/results/slides.pptx
@@ -19,6 +19,7 @@
     <p:sldId id="267" r:id="rId19"/>
     <p:sldId id="268" r:id="rId20"/>
     <p:sldId id="269" r:id="rId21"/>
+    <p:sldId id="270" r:id="rId22"/>
   </p:sldIdLst>
   <p:sldSz cx="12191695" cy="6858000" type="screen4x3"/>
   <p:notesSz cx="6858000" cy="9144000"/>
@@ -190,13 +191,13 @@
                 <c:formatCode>General</c:formatCode>
                 <c:ptCount val="3"/>
                 <c:pt idx="0">
-                  <c:v>0.519</c:v>
+                  <c:v>0.537</c:v>
                 </c:pt>
                 <c:pt idx="1">
-                  <c:v>0.658</c:v>
+                  <c:v>0.722</c:v>
                 </c:pt>
                 <c:pt idx="2">
-                  <c:v>0.162</c:v>
+                  <c:v>0.524</c:v>
                 </c:pt>
               </c:numCache>
             </c:numRef>
@@ -451,13 +452,13 @@
                 <c:formatCode>General</c:formatCode>
                 <c:ptCount val="3"/>
                 <c:pt idx="0">
-                  <c:v>38.558</c:v>
+                  <c:v>41.27</c:v>
                 </c:pt>
                 <c:pt idx="1">
-                  <c:v>59.343</c:v>
+                  <c:v>65.53</c:v>
                 </c:pt>
                 <c:pt idx="2">
-                  <c:v>19.048</c:v>
+                  <c:v>52.679</c:v>
                 </c:pt>
               </c:numCache>
             </c:numRef>
@@ -712,13 +713,13 @@
                 <c:formatCode>General</c:formatCode>
                 <c:ptCount val="3"/>
                 <c:pt idx="0">
-                  <c:v>0.532</c:v>
+                  <c:v>0.542</c:v>
                 </c:pt>
                 <c:pt idx="1">
-                  <c:v>0.488</c:v>
+                  <c:v>0.529</c:v>
                 </c:pt>
                 <c:pt idx="2">
-                  <c:v>0.244</c:v>
+                  <c:v>0.407</c:v>
                 </c:pt>
               </c:numCache>
             </c:numRef>
@@ -1368,7 +1369,7 @@
           <a:lstStyle/>
           <a:p>
             <a:r>
-              <a:t>MODELLER's own scores flagged the model (GA341 ≈ 0.01, z-DOPE +1.9) and Claude labelled it low confidence. The score-only baseline produced no MODELLER model for this target.</a:t>
+              <a:t>Claude predicted this failure before evaluation: Agent 1 noted that residues ~60–104 are an insertion relative to every template and would probably be unreliable.</a:t>
             </a:r>
           </a:p>
         </p:txBody>
@@ -1438,7 +1439,7 @@
           <a:lstStyle/>
           <a:p>
             <a:r>
-              <a:t>Same tools, same leakage rules; only the decisions differ. On the two targets with real templates, Claude made the same final choice as the fixed rules. On T1151s2 it widened the search and produced a model, which was wrong; its value there was transparency about risk.</a:t>
+              <a:t>All 8 hits of the profile search are WhiB-family regulators; AlphaFold Server's own template search used the same family. With a third of the evaluation unit uncovered, TM ≈ 0.52 is close to the best this template can give.</a:t>
             </a:r>
           </a:p>
         </p:txBody>
@@ -1508,7 +1509,7 @@
           <a:lstStyle/>
           <a:p>
             <a:r>
-              <a:t>Three targets is a small sample: these are case studies, not trends.</a:t>
+              <a:t>Same tools, same leakage rules; only the decisions differ. Claude built alternatives on every target but ended up with the fixed rule's template each time. Its value was the explicit, checkable reasoning and correct risk predictions.</a:t>
             </a:r>
           </a:p>
         </p:txBody>
@@ -1578,6 +1579,76 @@
           <a:lstStyle/>
           <a:p>
             <a:r>
+              <a:t>Three targets is a small sample: these are case studies, not trends.</a:t>
+            </a:r>
+          </a:p>
+        </p:txBody>
+      </p:sp>
+      <p:sp>
+        <p:nvSpPr>
+          <p:cNvPr id="4" name="Slide Number Placeholder 3"/>
+          <p:cNvSpPr>
+            <a:spLocks noGrp="1"/>
+          </p:cNvSpPr>
+          <p:nvPr>
+            <p:ph type="sldNum" idx="5" sz="quarter"/>
+          </p:nvPr>
+        </p:nvSpPr>
+        <p:spPr/>
+      </p:sp>
+    </p:spTree>
+  </p:cSld>
+  <p:clrMapOvr>
+    <a:masterClrMapping/>
+  </p:clrMapOvr>
+</p:notes>
+</file>
+
+<file path=ppt/notesSlides/notesSlide14.xml><?xml version="1.0" encoding="utf-8"?>
+<p:notes xmlns:a="http://schemas.openxmlformats.org/drawingml/2006/main" xmlns:p="http://schemas.openxmlformats.org/presentationml/2006/main" xmlns:r="http://schemas.openxmlformats.org/officeDocument/2006/relationships">
+  <p:cSld>
+    <p:spTree>
+      <p:nvGrpSpPr>
+        <p:cNvPr id="1" name=""/>
+        <p:cNvGrpSpPr/>
+        <p:nvPr/>
+      </p:nvGrpSpPr>
+      <p:grpSpPr>
+        <a:xfrm>
+          <a:off x="0" y="0"/>
+          <a:ext cx="0" cy="0"/>
+          <a:chOff x="0" y="0"/>
+          <a:chExt cx="0" cy="0"/>
+        </a:xfrm>
+      </p:grpSpPr>
+      <p:sp>
+        <p:nvSpPr>
+          <p:cNvPr id="2" name="Slide Image Placeholder 1"/>
+          <p:cNvSpPr>
+            <a:spLocks noGrp="1"/>
+          </p:cNvSpPr>
+          <p:nvPr>
+            <p:ph type="sldImg" idx="2"/>
+          </p:nvPr>
+        </p:nvSpPr>
+        <p:spPr/>
+      </p:sp>
+      <p:sp>
+        <p:nvSpPr>
+          <p:cNvPr id="3" name="Notes Placeholder 2"/>
+          <p:cNvSpPr>
+            <a:spLocks noGrp="1"/>
+          </p:cNvSpPr>
+          <p:nvPr>
+            <p:ph type="body" idx="3" sz="quarter"/>
+          </p:nvPr>
+        </p:nvSpPr>
+        <p:spPr/>
+        <p:txBody>
+          <a:bodyPr/>
+          <a:lstStyle/>
+          <a:p>
+            <a:r>
               <a:t>Reproduce: conda env create -f environment.yml; tbm run-all; tbm report; python scripts/make_slides.py</a:t>
             </a:r>
           </a:p>
@@ -1648,7 +1719,7 @@
           <a:lstStyle/>
           <a:p>
             <a:r>
-              <a:t>CASP classes: TBM-easy has a clear template, TBM-hard a weak one, FM/TBM is borderline free modeling. Scores are computed over the CASP evaluation unit (EU) only. T1151s2 replaced T1123, which had no sequence-detectable template in the PDB.</a:t>
+              <a:t>CASP classes: TBM-easy has a clear template, TBM-hard a weak one, FM/TBM is borderline free modeling. Scores are computed over the CASP evaluation unit (EU) only. T1151s2 replaced T1123, for which the profile search finds no template.</a:t>
             </a:r>
           </a:p>
         </p:txBody>
@@ -1718,7 +1789,7 @@
           <a:lstStyle/>
           <a:p>
             <a:r>
-              <a:t>Agent 1 and Agent 2 are Claude tool-use loops. Claude picks search settings, which templates to build and which model to keep; the tools run RCSB / MMseqs2 search, MODELLER and the metrics. AlphaFold3 is run by hand on the AlphaFold Server with default settings.</a:t>
+              <a:t>Agent 1 and Agent 2 are Claude tool-use loops. Claude picks search settings, which templates to build and which model to keep; the tools run the HMMER profile search, MODELLER and the metrics. AlphaFold3 is run by hand on the AlphaFold Server with default settings.</a:t>
             </a:r>
           </a:p>
         </p:txBody>
@@ -1788,7 +1859,7 @@
           <a:lstStyle/>
           <a:p>
             <a:r>
-              <a:t>The hard rules are in code, so the agent cannot leak the answer: Agent 1 never sees the experimental structure and its task prompt contains no PDB ID. The baseline uses the same search and MODELLER but picks the top-ranked template and the lowest-DOPE model.</a:t>
+              <a:t>Round 1 compares the sequence itself. Each further round builds a profile HMM from the confident hits (E ≤ 1e-3) and searches again. The profile knows which positions are conserved in the family, so it finds remote homologues at 30–40% identity. The same profile aligns target and template for MODELLER.</a:t>
             </a:r>
           </a:p>
         </p:txBody>
@@ -1858,7 +1929,7 @@
           <a:lstStyle/>
           <a:p>
             <a:r>
-              <a:t>Identity and coverage are from MODELLER's align2d alignment over the full sequence. GA341 near 1 means a reliable fold; z-DOPE below 0 is native-like. For T1151s2 the default search found only the target's own structure; Claude widened the search to E ≤ 1000 and used a weak WhiB4 hit, flagging the model as low confidence.</a:t>
+              <a:t>The hard rules are in code, so the agent cannot leak the answer: Agent 1 never sees the experimental structure and its task prompt contains no PDB ID. The baseline uses the same search and MODELLER but picks the top-ranked template and the lowest-DOPE model.</a:t>
             </a:r>
           </a:p>
         </p:txBody>
@@ -1928,7 +1999,7 @@
           <a:lstStyle/>
           <a:p>
             <a:r>
-              <a:t>Scores over the CASP evaluation unit. TM-score and GDT-TS reward the fraction of the structure that is right; RMSD is dominated by the worst parts. Our TM-score matches the TMscore program on all six models.</a:t>
+              <a:t>Identity and coverage are from the profile alignment over the full sequence. GA341 near 1 means a reliable fold; z-DOPE below 0 is native-like. Claude built three templates per target and wrote down the expected failure region before any evaluation.</a:t>
             </a:r>
           </a:p>
         </p:txBody>
@@ -1998,7 +2069,7 @@
           <a:lstStyle/>
           <a:p>
             <a:r>
-              <a:t>Native PowerPoint charts: right-click → Edit Data to change values.</a:t>
+              <a:t>Scores over the CASP evaluation unit. TM-score and GDT-TS reward the fraction of the structure that is right; RMSD is dominated by the worst parts. Our TM-score matches the TMscore program on all six models.</a:t>
             </a:r>
           </a:p>
         </p:txBody>
@@ -2068,7 +2139,7 @@
           <a:lstStyle/>
           <a:p>
             <a:r>
-              <a:t>Grey = experimental (7UX8). After superposing on the C-terminal domain, MODELLER's N-terminal block (blue) and the native one (grey) sit in different places. Hypothesis from Agent 2: the template's dimer context, not tested. AlphaFold Server used other O-methyltransferase templates (4Z2Y, 4A6D, 3GWZ, 6C5B).</a:t>
+              <a:t>Native PowerPoint charts: right-click → Edit Data to change values.</a:t>
             </a:r>
           </a:p>
         </p:txBody>
@@ -2138,7 +2209,7 @@
           <a:lstStyle/>
           <a:p>
             <a:r>
-              <a:t>Claude predicted this failure before evaluation: Agent 1 noted that ~23% of the EU, mostly the insertion, had no template and would probably be inaccurate.</a:t>
+              <a:t>Grey = experimental (7UX8). After superposing on the C-terminal domain, MODELLER's N-terminal block (blue) and the native one (grey) sit in different places. Claude had flagged this domain-orientation risk in Agent 1. Likely cause (Agent 2, not tested): in this family the N-terminal helices form the dimer interface.</a:t>
             </a:r>
           </a:p>
         </p:txBody>
@@ -5435,7 +5506,7 @@
                 </a:solidFill>
                 <a:latin typeface="Calibri"/>
               </a:rPr>
-              <a:t>RESULTS · T1151S2</a:t>
+              <a:t>RESULTS · T1127</a:t>
             </a:r>
           </a:p>
         </p:txBody>
@@ -5474,7 +5545,7 @@
                 </a:solidFill>
                 <a:latin typeface="Calibri"/>
               </a:rPr>
-              <a:t>T1151s2 (FM/TBM): weak template, wrong fold</a:t>
+              <a:t>T1127 (TBM-hard): core right, insertion missing</a:t>
             </a:r>
           </a:p>
         </p:txBody>
@@ -5594,7 +5665,7 @@
       </p:sp>
       <p:pic>
         <p:nvPicPr>
-          <p:cNvPr id="7" name="Picture 6" descr="T1151s2_3d_MODELLER.png"/>
+          <p:cNvPr id="7" name="Picture 6" descr="T1127_3d_MODELLER.png"/>
           <p:cNvPicPr>
             <a:picLocks noChangeAspect="1"/>
           </p:cNvPicPr>
@@ -5608,8 +5679,8 @@
         </p:blipFill>
         <p:spPr>
           <a:xfrm>
-            <a:off x="548640" y="1906567"/>
-            <a:ext cx="2743200" cy="2084744"/>
+            <a:off x="548640" y="2397138"/>
+            <a:ext cx="2743200" cy="1103603"/>
           </a:xfrm>
           <a:prstGeom prst="rect">
             <a:avLst/>
@@ -5689,14 +5760,14 @@
                 </a:solidFill>
                 <a:latin typeface="Calibri"/>
               </a:rPr>
-              <a:t>TM 0.162 · GDT-TS 19.0 · RMSD 16.4 Å</a:t>
+              <a:t>TM 0.722 · GDT-TS 65.5 · RMSD 11.5 Å</a:t>
             </a:r>
           </a:p>
         </p:txBody>
       </p:sp>
       <p:pic>
         <p:nvPicPr>
-          <p:cNvPr id="10" name="Picture 9" descr="T1151s2_3d_AlphaFold3.png"/>
+          <p:cNvPr id="10" name="Picture 9" descr="T1127_3d_AlphaFold3.png"/>
           <p:cNvPicPr>
             <a:picLocks noChangeAspect="1"/>
           </p:cNvPicPr>
@@ -5710,8 +5781,8 @@
         </p:blipFill>
         <p:spPr>
           <a:xfrm>
-            <a:off x="3545932" y="1691640"/>
-            <a:ext cx="2509335" cy="2514600"/>
+            <a:off x="3429000" y="2124061"/>
+            <a:ext cx="2743200" cy="1649756"/>
           </a:xfrm>
           <a:prstGeom prst="rect">
             <a:avLst/>
@@ -5791,7 +5862,7 @@
                 </a:solidFill>
                 <a:latin typeface="Calibri"/>
               </a:rPr>
-              <a:t>TM 0.916 · GDT-TS 92.9 · RMSD 1.5 Å</a:t>
+              <a:t>TM 0.973 · GDT-TS 95.5 · RMSD 0.9 Å</a:t>
             </a:r>
           </a:p>
         </p:txBody>
@@ -6079,7 +6150,7 @@
                 </a:solidFill>
                 <a:latin typeface="Calibri"/>
               </a:rPr>
-              <a:t>•  Our MMseqs2 search found only a weak hit: 7F7N:A (WhiB4), E = 3.9, covering 42–79.</a:t>
+              <a:t>•  Template 2FE7:B (GNAT acetyltransferase), 36% identity, 75% coverage.</a:t>
             </a:r>
           </a:p>
           <a:p>
@@ -6095,14 +6166,14 @@
                 </a:solidFill>
                 <a:latin typeface="Calibri"/>
               </a:rPr>
-              <a:t>•  align2d stretched it to 96% of the EU, but covered residues are off by 27.6 Å on average; only ~13 residues (84–96) are within 4 Å.</a:t>
+              <a:t>•  Template-covered residues: mean Cα error 1.9 Å, 80% within 2 Å; the 41 uncovered residues (insertion 60–104, C-terminus): 22.3 Å.</a:t>
             </a:r>
           </a:p>
         </p:txBody>
       </p:sp>
       <p:pic>
         <p:nvPicPr>
-          <p:cNvPr id="20" name="Picture 19" descr="T1151s2_per_residue.png"/>
+          <p:cNvPr id="20" name="Picture 19" descr="T1127_per_residue.png"/>
           <p:cNvPicPr>
             <a:picLocks noChangeAspect="1"/>
           </p:cNvPicPr>
@@ -6197,7 +6268,7 @@
                 </a:solidFill>
                 <a:latin typeface="Calibri"/>
               </a:rPr>
-              <a:t>•  Coverage is only meaningful when the homology is real.</a:t>
+              <a:t>•  Missing template coverage explains nearly all of MODELLER's error (RMSD 11.5 Å).</a:t>
             </a:r>
           </a:p>
           <a:p>
@@ -6213,7 +6284,7 @@
                 </a:solidFill>
                 <a:latin typeface="Calibri"/>
               </a:rPr>
-              <a:t>•  AlphaFold3 (TM 0.92) used 4 WhiB templates (5OAY, 6ONO, 7KIF, 7KUG), all pre-2022 and allowed by our cutoff, which our sequence search missed.</a:t>
+              <a:t>•  AlphaFold3 models the insertion correctly too (0.9 Å on uncovered residues).</a:t>
             </a:r>
           </a:p>
         </p:txBody>
@@ -6270,7 +6341,7 @@
                 </a:solidFill>
                 <a:latin typeface="Calibri"/>
               </a:rPr>
-              <a:t>AGENT VS BASELINE</a:t>
+              <a:t>RESULTS · T1151S2</a:t>
             </a:r>
           </a:p>
         </p:txBody>
@@ -6309,7 +6380,7 @@
                 </a:solidFill>
                 <a:latin typeface="Calibri"/>
               </a:rPr>
-              <a:t>Did the Claude agent change the outcome?</a:t>
+              <a:t>T1151s2 (FM/TBM): core right, tail missing</a:t>
             </a:r>
           </a:p>
         </p:txBody>
@@ -6427,6 +6498,841 @@
           </a:p>
         </p:txBody>
       </p:sp>
+      <p:pic>
+        <p:nvPicPr>
+          <p:cNvPr id="7" name="Picture 6" descr="T1151s2_3d_MODELLER.png"/>
+          <p:cNvPicPr>
+            <a:picLocks noChangeAspect="1"/>
+          </p:cNvPicPr>
+          <p:nvPr/>
+        </p:nvPicPr>
+        <p:blipFill>
+          <a:blip r:embed="rId3"/>
+          <a:stretch>
+            <a:fillRect/>
+          </a:stretch>
+        </p:blipFill>
+        <p:spPr>
+          <a:xfrm>
+            <a:off x="1108671" y="1691639"/>
+            <a:ext cx="1623136" cy="2514600"/>
+          </a:xfrm>
+          <a:prstGeom prst="rect">
+            <a:avLst/>
+          </a:prstGeom>
+        </p:spPr>
+      </p:pic>
+      <p:sp>
+        <p:nvSpPr>
+          <p:cNvPr id="8" name="TextBox 7"/>
+          <p:cNvSpPr txBox="1"/>
+          <p:nvPr/>
+        </p:nvSpPr>
+        <p:spPr>
+          <a:xfrm>
+            <a:off x="548640" y="1325880"/>
+            <a:ext cx="2743200" cy="320040"/>
+          </a:xfrm>
+          <a:prstGeom prst="rect">
+            <a:avLst/>
+          </a:prstGeom>
+          <a:noFill/>
+        </p:spPr>
+        <p:txBody>
+          <a:bodyPr wrap="square" anchor="t" lIns="45720" rIns="45720" tIns="27432" bIns="27432">
+            <a:spAutoFit/>
+          </a:bodyPr>
+          <a:lstStyle/>
+          <a:p>
+            <a:pPr algn="ctr">
+              <a:spcAft>
+                <a:spcPts val="600"/>
+              </a:spcAft>
+            </a:pPr>
+            <a:r>
+              <a:rPr sz="1500" b="1">
+                <a:solidFill>
+                  <a:srgbClr val="2A78D6"/>
+                </a:solidFill>
+                <a:latin typeface="Calibri"/>
+              </a:rPr>
+              <a:t>MODELLER</a:t>
+            </a:r>
+          </a:p>
+        </p:txBody>
+      </p:sp>
+      <p:sp>
+        <p:nvSpPr>
+          <p:cNvPr id="9" name="TextBox 8"/>
+          <p:cNvSpPr txBox="1"/>
+          <p:nvPr/>
+        </p:nvSpPr>
+        <p:spPr>
+          <a:xfrm>
+            <a:off x="502919" y="4224528"/>
+            <a:ext cx="2834640" cy="292608"/>
+          </a:xfrm>
+          <a:prstGeom prst="rect">
+            <a:avLst/>
+          </a:prstGeom>
+          <a:noFill/>
+        </p:spPr>
+        <p:txBody>
+          <a:bodyPr wrap="square" anchor="t" lIns="45720" rIns="45720" tIns="27432" bIns="27432">
+            <a:spAutoFit/>
+          </a:bodyPr>
+          <a:lstStyle/>
+          <a:p>
+            <a:pPr algn="ctr">
+              <a:spcAft>
+                <a:spcPts val="600"/>
+              </a:spcAft>
+            </a:pPr>
+            <a:r>
+              <a:rPr sz="1050" b="0">
+                <a:solidFill>
+                  <a:srgbClr val="52514E"/>
+                </a:solidFill>
+                <a:latin typeface="Calibri"/>
+              </a:rPr>
+              <a:t>TM 0.524 · GDT-TS 52.7 · RMSD 17.3 Å</a:t>
+            </a:r>
+          </a:p>
+        </p:txBody>
+      </p:sp>
+      <p:pic>
+        <p:nvPicPr>
+          <p:cNvPr id="10" name="Picture 9" descr="T1151s2_3d_AlphaFold3.png"/>
+          <p:cNvPicPr>
+            <a:picLocks noChangeAspect="1"/>
+          </p:cNvPicPr>
+          <p:nvPr/>
+        </p:nvPicPr>
+        <p:blipFill>
+          <a:blip r:embed="rId4"/>
+          <a:stretch>
+            <a:fillRect/>
+          </a:stretch>
+        </p:blipFill>
+        <p:spPr>
+          <a:xfrm>
+            <a:off x="3545932" y="1691640"/>
+            <a:ext cx="2509335" cy="2514600"/>
+          </a:xfrm>
+          <a:prstGeom prst="rect">
+            <a:avLst/>
+          </a:prstGeom>
+        </p:spPr>
+      </p:pic>
+      <p:sp>
+        <p:nvSpPr>
+          <p:cNvPr id="11" name="TextBox 10"/>
+          <p:cNvSpPr txBox="1"/>
+          <p:nvPr/>
+        </p:nvSpPr>
+        <p:spPr>
+          <a:xfrm>
+            <a:off x="3429000" y="1325880"/>
+            <a:ext cx="2743200" cy="320040"/>
+          </a:xfrm>
+          <a:prstGeom prst="rect">
+            <a:avLst/>
+          </a:prstGeom>
+          <a:noFill/>
+        </p:spPr>
+        <p:txBody>
+          <a:bodyPr wrap="square" anchor="t" lIns="45720" rIns="45720" tIns="27432" bIns="27432">
+            <a:spAutoFit/>
+          </a:bodyPr>
+          <a:lstStyle/>
+          <a:p>
+            <a:pPr algn="ctr">
+              <a:spcAft>
+                <a:spcPts val="600"/>
+              </a:spcAft>
+            </a:pPr>
+            <a:r>
+              <a:rPr sz="1500" b="1">
+                <a:solidFill>
+                  <a:srgbClr val="EB6834"/>
+                </a:solidFill>
+                <a:latin typeface="Calibri"/>
+              </a:rPr>
+              <a:t>AlphaFold3</a:t>
+            </a:r>
+          </a:p>
+        </p:txBody>
+      </p:sp>
+      <p:sp>
+        <p:nvSpPr>
+          <p:cNvPr id="12" name="TextBox 11"/>
+          <p:cNvSpPr txBox="1"/>
+          <p:nvPr/>
+        </p:nvSpPr>
+        <p:spPr>
+          <a:xfrm>
+            <a:off x="3383280" y="4224528"/>
+            <a:ext cx="2834640" cy="292608"/>
+          </a:xfrm>
+          <a:prstGeom prst="rect">
+            <a:avLst/>
+          </a:prstGeom>
+          <a:noFill/>
+        </p:spPr>
+        <p:txBody>
+          <a:bodyPr wrap="square" anchor="t" lIns="45720" rIns="45720" tIns="27432" bIns="27432">
+            <a:spAutoFit/>
+          </a:bodyPr>
+          <a:lstStyle/>
+          <a:p>
+            <a:pPr algn="ctr">
+              <a:spcAft>
+                <a:spcPts val="600"/>
+              </a:spcAft>
+            </a:pPr>
+            <a:r>
+              <a:rPr sz="1050" b="0">
+                <a:solidFill>
+                  <a:srgbClr val="52514E"/>
+                </a:solidFill>
+                <a:latin typeface="Calibri"/>
+              </a:rPr>
+              <a:t>TM 0.916 · GDT-TS 92.9 · RMSD 1.5 Å</a:t>
+            </a:r>
+          </a:p>
+        </p:txBody>
+      </p:sp>
+      <p:sp>
+        <p:nvSpPr>
+          <p:cNvPr id="13" name="Rectangle 12"/>
+          <p:cNvSpPr/>
+          <p:nvPr/>
+        </p:nvSpPr>
+        <p:spPr>
+          <a:xfrm>
+            <a:off x="914400" y="4654296"/>
+            <a:ext cx="201168" cy="146304"/>
+          </a:xfrm>
+          <a:prstGeom prst="rect">
+            <a:avLst/>
+          </a:prstGeom>
+          <a:solidFill>
+            <a:srgbClr val="9A9A96"/>
+          </a:solidFill>
+          <a:ln>
+            <a:noFill/>
+          </a:ln>
+          <a:effectLst/>
+        </p:spPr>
+        <p:style>
+          <a:lnRef idx="1">
+            <a:schemeClr val="accent1"/>
+          </a:lnRef>
+          <a:fillRef idx="3">
+            <a:schemeClr val="accent1"/>
+          </a:fillRef>
+          <a:effectRef idx="2">
+            <a:schemeClr val="accent1"/>
+          </a:effectRef>
+          <a:fontRef idx="minor">
+            <a:schemeClr val="lt1"/>
+          </a:fontRef>
+        </p:style>
+        <p:txBody>
+          <a:bodyPr rtlCol="0" anchor="ctr"/>
+          <a:lstStyle/>
+          <a:p>
+            <a:pPr algn="ctr"/>
+          </a:p>
+        </p:txBody>
+      </p:sp>
+      <p:sp>
+        <p:nvSpPr>
+          <p:cNvPr id="14" name="TextBox 13"/>
+          <p:cNvSpPr txBox="1"/>
+          <p:nvPr/>
+        </p:nvSpPr>
+        <p:spPr>
+          <a:xfrm>
+            <a:off x="1170432" y="4572000"/>
+            <a:ext cx="1115568" cy="274320"/>
+          </a:xfrm>
+          <a:prstGeom prst="rect">
+            <a:avLst/>
+          </a:prstGeom>
+          <a:noFill/>
+        </p:spPr>
+        <p:txBody>
+          <a:bodyPr wrap="square" anchor="t" lIns="45720" rIns="45720" tIns="27432" bIns="27432">
+            <a:spAutoFit/>
+          </a:bodyPr>
+          <a:lstStyle/>
+          <a:p>
+            <a:pPr algn="l">
+              <a:spcAft>
+                <a:spcPts val="600"/>
+              </a:spcAft>
+            </a:pPr>
+            <a:r>
+              <a:rPr sz="1200" b="0">
+                <a:solidFill>
+                  <a:srgbClr val="52514E"/>
+                </a:solidFill>
+                <a:latin typeface="Calibri"/>
+              </a:rPr>
+              <a:t>experimental</a:t>
+            </a:r>
+          </a:p>
+        </p:txBody>
+      </p:sp>
+      <p:sp>
+        <p:nvSpPr>
+          <p:cNvPr id="15" name="Rectangle 14"/>
+          <p:cNvSpPr/>
+          <p:nvPr/>
+        </p:nvSpPr>
+        <p:spPr>
+          <a:xfrm>
+            <a:off x="2468880" y="4654296"/>
+            <a:ext cx="201168" cy="146304"/>
+          </a:xfrm>
+          <a:prstGeom prst="rect">
+            <a:avLst/>
+          </a:prstGeom>
+          <a:solidFill>
+            <a:srgbClr val="2A78D6"/>
+          </a:solidFill>
+          <a:ln>
+            <a:noFill/>
+          </a:ln>
+          <a:effectLst/>
+        </p:spPr>
+        <p:style>
+          <a:lnRef idx="1">
+            <a:schemeClr val="accent1"/>
+          </a:lnRef>
+          <a:fillRef idx="3">
+            <a:schemeClr val="accent1"/>
+          </a:fillRef>
+          <a:effectRef idx="2">
+            <a:schemeClr val="accent1"/>
+          </a:effectRef>
+          <a:fontRef idx="minor">
+            <a:schemeClr val="lt1"/>
+          </a:fontRef>
+        </p:style>
+        <p:txBody>
+          <a:bodyPr rtlCol="0" anchor="ctr"/>
+          <a:lstStyle/>
+          <a:p>
+            <a:pPr algn="ctr"/>
+          </a:p>
+        </p:txBody>
+      </p:sp>
+      <p:sp>
+        <p:nvSpPr>
+          <p:cNvPr id="16" name="TextBox 15"/>
+          <p:cNvSpPr txBox="1"/>
+          <p:nvPr/>
+        </p:nvSpPr>
+        <p:spPr>
+          <a:xfrm>
+            <a:off x="2724912" y="4572000"/>
+            <a:ext cx="780288" cy="274320"/>
+          </a:xfrm>
+          <a:prstGeom prst="rect">
+            <a:avLst/>
+          </a:prstGeom>
+          <a:noFill/>
+        </p:spPr>
+        <p:txBody>
+          <a:bodyPr wrap="square" anchor="t" lIns="45720" rIns="45720" tIns="27432" bIns="27432">
+            <a:spAutoFit/>
+          </a:bodyPr>
+          <a:lstStyle/>
+          <a:p>
+            <a:pPr algn="l">
+              <a:spcAft>
+                <a:spcPts val="600"/>
+              </a:spcAft>
+            </a:pPr>
+            <a:r>
+              <a:rPr sz="1200" b="0">
+                <a:solidFill>
+                  <a:srgbClr val="52514E"/>
+                </a:solidFill>
+                <a:latin typeface="Calibri"/>
+              </a:rPr>
+              <a:t>MODELLER</a:t>
+            </a:r>
+          </a:p>
+        </p:txBody>
+      </p:sp>
+      <p:sp>
+        <p:nvSpPr>
+          <p:cNvPr id="17" name="Rectangle 16"/>
+          <p:cNvSpPr/>
+          <p:nvPr/>
+        </p:nvSpPr>
+        <p:spPr>
+          <a:xfrm>
+            <a:off x="3688080" y="4654296"/>
+            <a:ext cx="201168" cy="146304"/>
+          </a:xfrm>
+          <a:prstGeom prst="rect">
+            <a:avLst/>
+          </a:prstGeom>
+          <a:solidFill>
+            <a:srgbClr val="EB6834"/>
+          </a:solidFill>
+          <a:ln>
+            <a:noFill/>
+          </a:ln>
+          <a:effectLst/>
+        </p:spPr>
+        <p:style>
+          <a:lnRef idx="1">
+            <a:schemeClr val="accent1"/>
+          </a:lnRef>
+          <a:fillRef idx="3">
+            <a:schemeClr val="accent1"/>
+          </a:fillRef>
+          <a:effectRef idx="2">
+            <a:schemeClr val="accent1"/>
+          </a:effectRef>
+          <a:fontRef idx="minor">
+            <a:schemeClr val="lt1"/>
+          </a:fontRef>
+        </p:style>
+        <p:txBody>
+          <a:bodyPr rtlCol="0" anchor="ctr"/>
+          <a:lstStyle/>
+          <a:p>
+            <a:pPr algn="ctr"/>
+          </a:p>
+        </p:txBody>
+      </p:sp>
+      <p:sp>
+        <p:nvSpPr>
+          <p:cNvPr id="18" name="TextBox 17"/>
+          <p:cNvSpPr txBox="1"/>
+          <p:nvPr/>
+        </p:nvSpPr>
+        <p:spPr>
+          <a:xfrm>
+            <a:off x="3944112" y="4572000"/>
+            <a:ext cx="947928" cy="274320"/>
+          </a:xfrm>
+          <a:prstGeom prst="rect">
+            <a:avLst/>
+          </a:prstGeom>
+          <a:noFill/>
+        </p:spPr>
+        <p:txBody>
+          <a:bodyPr wrap="square" anchor="t" lIns="45720" rIns="45720" tIns="27432" bIns="27432">
+            <a:spAutoFit/>
+          </a:bodyPr>
+          <a:lstStyle/>
+          <a:p>
+            <a:pPr algn="l">
+              <a:spcAft>
+                <a:spcPts val="600"/>
+              </a:spcAft>
+            </a:pPr>
+            <a:r>
+              <a:rPr sz="1200" b="0">
+                <a:solidFill>
+                  <a:srgbClr val="52514E"/>
+                </a:solidFill>
+                <a:latin typeface="Calibri"/>
+              </a:rPr>
+              <a:t>AlphaFold3</a:t>
+            </a:r>
+          </a:p>
+        </p:txBody>
+      </p:sp>
+      <p:sp>
+        <p:nvSpPr>
+          <p:cNvPr id="19" name="TextBox 18"/>
+          <p:cNvSpPr txBox="1"/>
+          <p:nvPr/>
+        </p:nvSpPr>
+        <p:spPr>
+          <a:xfrm>
+            <a:off x="548640" y="4983480"/>
+            <a:ext cx="5577840" cy="1371600"/>
+          </a:xfrm>
+          <a:prstGeom prst="rect">
+            <a:avLst/>
+          </a:prstGeom>
+          <a:noFill/>
+        </p:spPr>
+        <p:txBody>
+          <a:bodyPr wrap="square" anchor="t" lIns="45720" rIns="45720" tIns="27432" bIns="27432">
+            <a:spAutoFit/>
+          </a:bodyPr>
+          <a:lstStyle/>
+          <a:p>
+            <a:pPr algn="l">
+              <a:spcAft>
+                <a:spcPts val="600"/>
+              </a:spcAft>
+            </a:pPr>
+            <a:r>
+              <a:rPr sz="1300" b="0">
+                <a:solidFill>
+                  <a:srgbClr val="0B0B0B"/>
+                </a:solidFill>
+                <a:latin typeface="Calibri"/>
+              </a:rPr>
+              <a:t>•  Template 7KUG:A (WhiB7), found by the profile search: 38% identity over residues 30–84, two thirds of the evaluation unit.</a:t>
+            </a:r>
+          </a:p>
+          <a:p>
+            <a:pPr algn="l">
+              <a:spcAft>
+                <a:spcPts val="600"/>
+              </a:spcAft>
+            </a:pPr>
+            <a:r>
+              <a:rPr sz="1300" b="0">
+                <a:solidFill>
+                  <a:srgbClr val="0B0B0B"/>
+                </a:solidFill>
+                <a:latin typeface="Calibri"/>
+              </a:rPr>
+              <a:t>•  The WhiB core is accurate: mean Cα error 1.7 Å, 71% within 2 Å.</a:t>
+            </a:r>
+          </a:p>
+        </p:txBody>
+      </p:sp>
+      <p:pic>
+        <p:nvPicPr>
+          <p:cNvPr id="20" name="Picture 19" descr="T1151s2_per_residue.png"/>
+          <p:cNvPicPr>
+            <a:picLocks noChangeAspect="1"/>
+          </p:cNvPicPr>
+          <p:nvPr/>
+        </p:nvPicPr>
+        <p:blipFill>
+          <a:blip r:embed="rId5"/>
+          <a:stretch>
+            <a:fillRect/>
+          </a:stretch>
+        </p:blipFill>
+        <p:spPr>
+          <a:xfrm>
+            <a:off x="6355080" y="1338580"/>
+            <a:ext cx="5303520" cy="2946400"/>
+          </a:xfrm>
+          <a:prstGeom prst="rect">
+            <a:avLst/>
+          </a:prstGeom>
+        </p:spPr>
+      </p:pic>
+      <p:sp>
+        <p:nvSpPr>
+          <p:cNvPr id="21" name="TextBox 20"/>
+          <p:cNvSpPr txBox="1"/>
+          <p:nvPr/>
+        </p:nvSpPr>
+        <p:spPr>
+          <a:xfrm>
+            <a:off x="6355080" y="4343400"/>
+            <a:ext cx="5303520" cy="320040"/>
+          </a:xfrm>
+          <a:prstGeom prst="rect">
+            <a:avLst/>
+          </a:prstGeom>
+          <a:noFill/>
+        </p:spPr>
+        <p:txBody>
+          <a:bodyPr wrap="square" anchor="t" lIns="45720" rIns="45720" tIns="27432" bIns="27432">
+            <a:spAutoFit/>
+          </a:bodyPr>
+          <a:lstStyle/>
+          <a:p>
+            <a:pPr algn="ctr">
+              <a:spcAft>
+                <a:spcPts val="600"/>
+              </a:spcAft>
+            </a:pPr>
+            <a:r>
+              <a:rPr sz="1100" b="0">
+                <a:solidFill>
+                  <a:srgbClr val="52514E"/>
+                </a:solidFill>
+                <a:latin typeface="Calibri"/>
+              </a:rPr>
+              <a:t>Per-residue error · shaded = aligned to the template</a:t>
+            </a:r>
+          </a:p>
+        </p:txBody>
+      </p:sp>
+      <p:sp>
+        <p:nvSpPr>
+          <p:cNvPr id="22" name="TextBox 21"/>
+          <p:cNvSpPr txBox="1"/>
+          <p:nvPr/>
+        </p:nvSpPr>
+        <p:spPr>
+          <a:xfrm>
+            <a:off x="6355080" y="4754880"/>
+            <a:ext cx="5303520" cy="1645920"/>
+          </a:xfrm>
+          <a:prstGeom prst="rect">
+            <a:avLst/>
+          </a:prstGeom>
+          <a:noFill/>
+        </p:spPr>
+        <p:txBody>
+          <a:bodyPr wrap="square" anchor="t" lIns="45720" rIns="45720" tIns="27432" bIns="27432">
+            <a:spAutoFit/>
+          </a:bodyPr>
+          <a:lstStyle/>
+          <a:p>
+            <a:pPr algn="l">
+              <a:spcAft>
+                <a:spcPts val="600"/>
+              </a:spcAft>
+            </a:pPr>
+            <a:r>
+              <a:rPr sz="1300" b="0">
+                <a:solidFill>
+                  <a:srgbClr val="0B0B0B"/>
+                </a:solidFill>
+                <a:latin typeface="Calibri"/>
+              </a:rPr>
+              <a:t>•  The C-terminal tail 85–111 has no template and is placed ~35 Å away.</a:t>
+            </a:r>
+          </a:p>
+          <a:p>
+            <a:pPr algn="l">
+              <a:spcAft>
+                <a:spcPts val="600"/>
+              </a:spcAft>
+            </a:pPr>
+            <a:r>
+              <a:rPr sz="1300" b="0">
+                <a:solidFill>
+                  <a:srgbClr val="0B0B0B"/>
+                </a:solidFill>
+                <a:latin typeface="Calibri"/>
+              </a:rPr>
+              <a:t>•  AlphaFold3 gets the tail right too (1.5 Å) and the core slightly better (0.6 Å).</a:t>
+            </a:r>
+          </a:p>
+        </p:txBody>
+      </p:sp>
+    </p:spTree>
+  </p:cSld>
+  <p:clrMapOvr>
+    <a:masterClrMapping/>
+  </p:clrMapOvr>
+</p:sld>
+</file>
+
+<file path=ppt/slides/slide12.xml><?xml version="1.0" encoding="utf-8"?>
+<p:sld xmlns:a="http://schemas.openxmlformats.org/drawingml/2006/main" xmlns:p="http://schemas.openxmlformats.org/presentationml/2006/main" xmlns:r="http://schemas.openxmlformats.org/officeDocument/2006/relationships">
+  <p:cSld>
+    <p:spTree>
+      <p:nvGrpSpPr>
+        <p:cNvPr id="1" name=""/>
+        <p:cNvGrpSpPr/>
+        <p:nvPr/>
+      </p:nvGrpSpPr>
+      <p:grpSpPr/>
+      <p:sp>
+        <p:nvSpPr>
+          <p:cNvPr id="2" name="TextBox 1"/>
+          <p:cNvSpPr txBox="1"/>
+          <p:nvPr/>
+        </p:nvSpPr>
+        <p:spPr>
+          <a:xfrm>
+            <a:off x="548640" y="292608"/>
+            <a:ext cx="10972800" cy="274320"/>
+          </a:xfrm>
+          <a:prstGeom prst="rect">
+            <a:avLst/>
+          </a:prstGeom>
+          <a:noFill/>
+        </p:spPr>
+        <p:txBody>
+          <a:bodyPr wrap="square" anchor="t" lIns="45720" rIns="45720" tIns="27432" bIns="27432">
+            <a:spAutoFit/>
+          </a:bodyPr>
+          <a:lstStyle/>
+          <a:p>
+            <a:pPr algn="l">
+              <a:spcAft>
+                <a:spcPts val="600"/>
+              </a:spcAft>
+            </a:pPr>
+            <a:r>
+              <a:rPr sz="1100" b="1">
+                <a:solidFill>
+                  <a:srgbClr val="2A78D6"/>
+                </a:solidFill>
+                <a:latin typeface="Calibri"/>
+              </a:rPr>
+              <a:t>AGENT VS BASELINE</a:t>
+            </a:r>
+          </a:p>
+        </p:txBody>
+      </p:sp>
+      <p:sp>
+        <p:nvSpPr>
+          <p:cNvPr id="3" name="TextBox 2"/>
+          <p:cNvSpPr txBox="1"/>
+          <p:nvPr/>
+        </p:nvSpPr>
+        <p:spPr>
+          <a:xfrm>
+            <a:off x="548640" y="502920"/>
+            <a:ext cx="11064240" cy="640080"/>
+          </a:xfrm>
+          <a:prstGeom prst="rect">
+            <a:avLst/>
+          </a:prstGeom>
+          <a:noFill/>
+        </p:spPr>
+        <p:txBody>
+          <a:bodyPr wrap="square" anchor="t" lIns="45720" rIns="45720" tIns="27432" bIns="27432">
+            <a:spAutoFit/>
+          </a:bodyPr>
+          <a:lstStyle/>
+          <a:p>
+            <a:pPr algn="l">
+              <a:spcAft>
+                <a:spcPts val="600"/>
+              </a:spcAft>
+            </a:pPr>
+            <a:r>
+              <a:rPr sz="2800" b="1">
+                <a:solidFill>
+                  <a:srgbClr val="0B0B0B"/>
+                </a:solidFill>
+                <a:latin typeface="Calibri"/>
+              </a:rPr>
+              <a:t>Did the Claude agent change the outcome?</a:t>
+            </a:r>
+          </a:p>
+        </p:txBody>
+      </p:sp>
+      <p:cxnSp>
+        <p:nvCxnSpPr>
+          <p:cNvPr id="4" name="Connector 3"/>
+          <p:cNvCxnSpPr/>
+          <p:nvPr/>
+        </p:nvCxnSpPr>
+        <p:spPr>
+          <a:xfrm>
+            <a:off x="548640" y="1170432"/>
+            <a:ext cx="11094415" cy="0"/>
+          </a:xfrm>
+          <a:prstGeom prst="line">
+            <a:avLst/>
+          </a:prstGeom>
+          <a:ln w="12700">
+            <a:solidFill>
+              <a:srgbClr val="E4E3DF"/>
+            </a:solidFill>
+          </a:ln>
+        </p:spPr>
+        <p:style>
+          <a:lnRef idx="2">
+            <a:schemeClr val="accent1"/>
+          </a:lnRef>
+          <a:fillRef idx="0">
+            <a:schemeClr val="accent1"/>
+          </a:fillRef>
+          <a:effectRef idx="1">
+            <a:schemeClr val="accent1"/>
+          </a:effectRef>
+          <a:fontRef idx="minor">
+            <a:schemeClr val="tx1"/>
+          </a:fontRef>
+        </p:style>
+      </p:cxnSp>
+      <p:sp>
+        <p:nvSpPr>
+          <p:cNvPr id="5" name="TextBox 4"/>
+          <p:cNvSpPr txBox="1"/>
+          <p:nvPr/>
+        </p:nvSpPr>
+        <p:spPr>
+          <a:xfrm>
+            <a:off x="11185855" y="6473952"/>
+            <a:ext cx="548640" cy="274320"/>
+          </a:xfrm>
+          <a:prstGeom prst="rect">
+            <a:avLst/>
+          </a:prstGeom>
+          <a:noFill/>
+        </p:spPr>
+        <p:txBody>
+          <a:bodyPr wrap="square" anchor="t" lIns="45720" rIns="45720" tIns="27432" bIns="27432">
+            <a:spAutoFit/>
+          </a:bodyPr>
+          <a:lstStyle/>
+          <a:p>
+            <a:pPr algn="r">
+              <a:spcAft>
+                <a:spcPts val="600"/>
+              </a:spcAft>
+            </a:pPr>
+            <a:r>
+              <a:rPr sz="1000" b="0">
+                <a:solidFill>
+                  <a:srgbClr val="52514E"/>
+                </a:solidFill>
+                <a:latin typeface="Calibri"/>
+              </a:rPr>
+              <a:t>12</a:t>
+            </a:r>
+          </a:p>
+        </p:txBody>
+      </p:sp>
+      <p:sp>
+        <p:nvSpPr>
+          <p:cNvPr id="6" name="TextBox 5"/>
+          <p:cNvSpPr txBox="1"/>
+          <p:nvPr/>
+        </p:nvSpPr>
+        <p:spPr>
+          <a:xfrm>
+            <a:off x="548640" y="6473952"/>
+            <a:ext cx="7315200" cy="274320"/>
+          </a:xfrm>
+          <a:prstGeom prst="rect">
+            <a:avLst/>
+          </a:prstGeom>
+          <a:noFill/>
+        </p:spPr>
+        <p:txBody>
+          <a:bodyPr wrap="square" anchor="t" lIns="45720" rIns="45720" tIns="27432" bIns="27432">
+            <a:spAutoFit/>
+          </a:bodyPr>
+          <a:lstStyle/>
+          <a:p>
+            <a:pPr algn="l">
+              <a:spcAft>
+                <a:spcPts val="600"/>
+              </a:spcAft>
+            </a:pPr>
+            <a:r>
+              <a:rPr sz="1000" b="0">
+                <a:solidFill>
+                  <a:srgbClr val="52514E"/>
+                </a:solidFill>
+                <a:latin typeface="Calibri"/>
+              </a:rPr>
+              <a:t>CMP_SC 8170 · Project 2 · Template-based modeling vs AlphaFold3</a:t>
+            </a:r>
+          </a:p>
+        </p:txBody>
+      </p:sp>
       <p:graphicFrame>
         <p:nvGraphicFramePr>
           <p:cNvPr id="7" name="Table 6"/>
@@ -6447,8 +7353,8 @@
               </a:tblPr>
               <a:tblGrid>
                 <a:gridCol w="1280160"/>
-                <a:gridCol w="3291840"/>
-                <a:gridCol w="3657600"/>
+                <a:gridCol w="3108960"/>
+                <a:gridCol w="3840480"/>
                 <a:gridCol w="2834640"/>
               </a:tblGrid>
               <a:tr h="502920">
@@ -6534,7 +7440,7 @@
                           </a:solidFill>
                           <a:latin typeface="Calibri"/>
                         </a:rPr>
-                        <a:t>MODELLER TM (agent / baseline)</a:t>
+                        <a:t>TM (agent / baseline)</a:t>
                       </a:r>
                     </a:p>
                   </a:txBody>
@@ -6582,7 +7488,7 @@
                           </a:solidFill>
                           <a:latin typeface="Calibri"/>
                         </a:rPr>
-                        <a:t>5I2H:A</a:t>
+                        <a:t>top-ranked 5I2H:A</a:t>
                       </a:r>
                     </a:p>
                   </a:txBody>
@@ -6605,7 +7511,7 @@
                           </a:solidFill>
                           <a:latin typeface="Calibri"/>
                         </a:rPr>
-                        <a:t>built 3 → kept 5I2H:A</a:t>
+                        <a:t>1 search, 3 builds → kept 5I2H:A</a:t>
                       </a:r>
                     </a:p>
                   </a:txBody>
@@ -6628,7 +7534,7 @@
                           </a:solidFill>
                           <a:latin typeface="Calibri"/>
                         </a:rPr>
-                        <a:t>0.519 / 0.519</a:t>
+                        <a:t>0.537 / 0.537</a:t>
                       </a:r>
                     </a:p>
                   </a:txBody>
@@ -6676,7 +7582,7 @@
                           </a:solidFill>
                           <a:latin typeface="Calibri"/>
                         </a:rPr>
-                        <a:t>2FE7:B</a:t>
+                        <a:t>top-ranked 2FE7:B</a:t>
                       </a:r>
                     </a:p>
                   </a:txBody>
@@ -6699,7 +7605,7 @@
                           </a:solidFill>
                           <a:latin typeface="Calibri"/>
                         </a:rPr>
-                        <a:t>built 2 → kept 2FE7:B</a:t>
+                        <a:t>1 search, 3 builds → kept 2FE7:B</a:t>
                       </a:r>
                     </a:p>
                   </a:txBody>
@@ -6722,7 +7628,7 @@
                           </a:solidFill>
                           <a:latin typeface="Calibri"/>
                         </a:rPr>
-                        <a:t>0.658 / 0.658</a:t>
+                        <a:t>0.722 / 0.722</a:t>
                       </a:r>
                     </a:p>
                   </a:txBody>
@@ -6770,7 +7676,7 @@
                           </a:solidFill>
                           <a:latin typeface="Calibri"/>
                         </a:rPr>
-                        <a:t>no eligible template → no model</a:t>
+                        <a:t>top-ranked 7KUG:A</a:t>
                       </a:r>
                     </a:p>
                   </a:txBody>
@@ -6793,7 +7699,7 @@
                           </a:solidFill>
                           <a:latin typeface="Calibri"/>
                         </a:rPr>
-                        <a:t>widened search → kept 7F7N:A (low conf.)</a:t>
+                        <a:t>2 searches, 3 builds → kept 7KUG:A</a:t>
                       </a:r>
                     </a:p>
                   </a:txBody>
@@ -6816,7 +7722,7 @@
                           </a:solidFill>
                           <a:latin typeface="Calibri"/>
                         </a:rPr>
-                        <a:t>0.162 / –</a:t>
+                        <a:t>0.524 / 0.524</a:t>
                       </a:r>
                     </a:p>
                   </a:txBody>
@@ -6865,7 +7771,7 @@
                 </a:solidFill>
                 <a:latin typeface="Calibri"/>
               </a:rPr>
-              <a:t>•  Same final template on T1124 and T1127 → identical scores; Claude's extra builds did not beat the top-ranked template.</a:t>
+              <a:t>•  Same final template on all three targets → identical scores. Claude's 6 alternative builds confirmed the top-ranked choice rather than beating it.</a:t>
             </a:r>
           </a:p>
           <a:p>
@@ -6881,7 +7787,7 @@
                 </a:solidFill>
                 <a:latin typeface="Calibri"/>
               </a:rPr>
-              <a:t>•  T1151s2: Claude turned "no model" into a model, but with no structural value (GDT-TS 19.0).</a:t>
+              <a:t>•  With a good search and ranking, the fixed rule is already strong; the agent did not improve accuracy here.</a:t>
             </a:r>
           </a:p>
           <a:p>
@@ -6897,880 +7803,7 @@
                 </a:solidFill>
                 <a:latin typeface="Calibri"/>
               </a:rPr>
-              <a:t>•  Where the agent helped: explicit risk statements (insertion in T1127, low confidence in T1151s2) that Agent 2 later confirmed, and a full reasoning trace for every choice.</a:t>
-            </a:r>
-          </a:p>
-        </p:txBody>
-      </p:sp>
-    </p:spTree>
-  </p:cSld>
-  <p:clrMapOvr>
-    <a:masterClrMapping/>
-  </p:clrMapOvr>
-</p:sld>
-</file>
-
-<file path=ppt/slides/slide12.xml><?xml version="1.0" encoding="utf-8"?>
-<p:sld xmlns:a="http://schemas.openxmlformats.org/drawingml/2006/main" xmlns:p="http://schemas.openxmlformats.org/presentationml/2006/main" xmlns:r="http://schemas.openxmlformats.org/officeDocument/2006/relationships">
-  <p:cSld>
-    <p:spTree>
-      <p:nvGrpSpPr>
-        <p:cNvPr id="1" name=""/>
-        <p:cNvGrpSpPr/>
-        <p:nvPr/>
-      </p:nvGrpSpPr>
-      <p:grpSpPr/>
-      <p:sp>
-        <p:nvSpPr>
-          <p:cNvPr id="2" name="TextBox 1"/>
-          <p:cNvSpPr txBox="1"/>
-          <p:nvPr/>
-        </p:nvSpPr>
-        <p:spPr>
-          <a:xfrm>
-            <a:off x="548640" y="292608"/>
-            <a:ext cx="10972800" cy="274320"/>
-          </a:xfrm>
-          <a:prstGeom prst="rect">
-            <a:avLst/>
-          </a:prstGeom>
-          <a:noFill/>
-        </p:spPr>
-        <p:txBody>
-          <a:bodyPr wrap="square" anchor="t" lIns="45720" rIns="45720" tIns="27432" bIns="27432">
-            <a:spAutoFit/>
-          </a:bodyPr>
-          <a:lstStyle/>
-          <a:p>
-            <a:pPr algn="l">
-              <a:spcAft>
-                <a:spcPts val="600"/>
-              </a:spcAft>
-            </a:pPr>
-            <a:r>
-              <a:rPr sz="1100" b="1">
-                <a:solidFill>
-                  <a:srgbClr val="2A78D6"/>
-                </a:solidFill>
-                <a:latin typeface="Calibri"/>
-              </a:rPr>
-              <a:t>DISCUSSION</a:t>
-            </a:r>
-          </a:p>
-        </p:txBody>
-      </p:sp>
-      <p:sp>
-        <p:nvSpPr>
-          <p:cNvPr id="3" name="TextBox 2"/>
-          <p:cNvSpPr txBox="1"/>
-          <p:nvPr/>
-        </p:nvSpPr>
-        <p:spPr>
-          <a:xfrm>
-            <a:off x="548640" y="502920"/>
-            <a:ext cx="11064240" cy="640080"/>
-          </a:xfrm>
-          <a:prstGeom prst="rect">
-            <a:avLst/>
-          </a:prstGeom>
-          <a:noFill/>
-        </p:spPr>
-        <p:txBody>
-          <a:bodyPr wrap="square" anchor="t" lIns="45720" rIns="45720" tIns="27432" bIns="27432">
-            <a:spAutoFit/>
-          </a:bodyPr>
-          <a:lstStyle/>
-          <a:p>
-            <a:pPr algn="l">
-              <a:spcAft>
-                <a:spcPts val="600"/>
-              </a:spcAft>
-            </a:pPr>
-            <a:r>
-              <a:rPr sz="2800" b="1">
-                <a:solidFill>
-                  <a:srgbClr val="0B0B0B"/>
-                </a:solidFill>
-                <a:latin typeface="Calibri"/>
-              </a:rPr>
-              <a:t>Key findings</a:t>
-            </a:r>
-          </a:p>
-        </p:txBody>
-      </p:sp>
-      <p:cxnSp>
-        <p:nvCxnSpPr>
-          <p:cNvPr id="4" name="Connector 3"/>
-          <p:cNvCxnSpPr/>
-          <p:nvPr/>
-        </p:nvCxnSpPr>
-        <p:spPr>
-          <a:xfrm>
-            <a:off x="548640" y="1170432"/>
-            <a:ext cx="11094415" cy="0"/>
-          </a:xfrm>
-          <a:prstGeom prst="line">
-            <a:avLst/>
-          </a:prstGeom>
-          <a:ln w="12700">
-            <a:solidFill>
-              <a:srgbClr val="E4E3DF"/>
-            </a:solidFill>
-          </a:ln>
-        </p:spPr>
-        <p:style>
-          <a:lnRef idx="2">
-            <a:schemeClr val="accent1"/>
-          </a:lnRef>
-          <a:fillRef idx="0">
-            <a:schemeClr val="accent1"/>
-          </a:fillRef>
-          <a:effectRef idx="1">
-            <a:schemeClr val="accent1"/>
-          </a:effectRef>
-          <a:fontRef idx="minor">
-            <a:schemeClr val="tx1"/>
-          </a:fontRef>
-        </p:style>
-      </p:cxnSp>
-      <p:sp>
-        <p:nvSpPr>
-          <p:cNvPr id="5" name="TextBox 4"/>
-          <p:cNvSpPr txBox="1"/>
-          <p:nvPr/>
-        </p:nvSpPr>
-        <p:spPr>
-          <a:xfrm>
-            <a:off x="11185855" y="6473952"/>
-            <a:ext cx="548640" cy="274320"/>
-          </a:xfrm>
-          <a:prstGeom prst="rect">
-            <a:avLst/>
-          </a:prstGeom>
-          <a:noFill/>
-        </p:spPr>
-        <p:txBody>
-          <a:bodyPr wrap="square" anchor="t" lIns="45720" rIns="45720" tIns="27432" bIns="27432">
-            <a:spAutoFit/>
-          </a:bodyPr>
-          <a:lstStyle/>
-          <a:p>
-            <a:pPr algn="r">
-              <a:spcAft>
-                <a:spcPts val="600"/>
-              </a:spcAft>
-            </a:pPr>
-            <a:r>
-              <a:rPr sz="1000" b="0">
-                <a:solidFill>
-                  <a:srgbClr val="52514E"/>
-                </a:solidFill>
-                <a:latin typeface="Calibri"/>
-              </a:rPr>
-              <a:t>12</a:t>
-            </a:r>
-          </a:p>
-        </p:txBody>
-      </p:sp>
-      <p:sp>
-        <p:nvSpPr>
-          <p:cNvPr id="6" name="TextBox 5"/>
-          <p:cNvSpPr txBox="1"/>
-          <p:nvPr/>
-        </p:nvSpPr>
-        <p:spPr>
-          <a:xfrm>
-            <a:off x="548640" y="6473952"/>
-            <a:ext cx="7315200" cy="274320"/>
-          </a:xfrm>
-          <a:prstGeom prst="rect">
-            <a:avLst/>
-          </a:prstGeom>
-          <a:noFill/>
-        </p:spPr>
-        <p:txBody>
-          <a:bodyPr wrap="square" anchor="t" lIns="45720" rIns="45720" tIns="27432" bIns="27432">
-            <a:spAutoFit/>
-          </a:bodyPr>
-          <a:lstStyle/>
-          <a:p>
-            <a:pPr algn="l">
-              <a:spcAft>
-                <a:spcPts val="600"/>
-              </a:spcAft>
-            </a:pPr>
-            <a:r>
-              <a:rPr sz="1000" b="0">
-                <a:solidFill>
-                  <a:srgbClr val="52514E"/>
-                </a:solidFill>
-                <a:latin typeface="Calibri"/>
-              </a:rPr>
-              <a:t>CMP_SC 8170 · Project 2 · Template-based modeling vs AlphaFold3</a:t>
-            </a:r>
-          </a:p>
-        </p:txBody>
-      </p:sp>
-      <p:sp>
-        <p:nvSpPr>
-          <p:cNvPr id="7" name="Rectangle 6"/>
-          <p:cNvSpPr/>
-          <p:nvPr/>
-        </p:nvSpPr>
-        <p:spPr>
-          <a:xfrm>
-            <a:off x="548640" y="1463040"/>
-            <a:ext cx="5440680" cy="2103120"/>
-          </a:xfrm>
-          <a:prstGeom prst="rect">
-            <a:avLst/>
-          </a:prstGeom>
-          <a:solidFill>
-            <a:srgbClr val="F5F4F1"/>
-          </a:solidFill>
-          <a:ln>
-            <a:noFill/>
-          </a:ln>
-          <a:effectLst/>
-        </p:spPr>
-        <p:style>
-          <a:lnRef idx="1">
-            <a:schemeClr val="accent1"/>
-          </a:lnRef>
-          <a:fillRef idx="3">
-            <a:schemeClr val="accent1"/>
-          </a:fillRef>
-          <a:effectRef idx="2">
-            <a:schemeClr val="accent1"/>
-          </a:effectRef>
-          <a:fontRef idx="minor">
-            <a:schemeClr val="lt1"/>
-          </a:fontRef>
-        </p:style>
-        <p:txBody>
-          <a:bodyPr rtlCol="0" anchor="ctr"/>
-          <a:lstStyle/>
-          <a:p>
-            <a:pPr algn="ctr"/>
-          </a:p>
-        </p:txBody>
-      </p:sp>
-      <p:sp>
-        <p:nvSpPr>
-          <p:cNvPr id="8" name="Rectangle 7"/>
-          <p:cNvSpPr/>
-          <p:nvPr/>
-        </p:nvSpPr>
-        <p:spPr>
-          <a:xfrm>
-            <a:off x="548640" y="1463040"/>
-            <a:ext cx="82296" cy="2103120"/>
-          </a:xfrm>
-          <a:prstGeom prst="rect">
-            <a:avLst/>
-          </a:prstGeom>
-          <a:solidFill>
-            <a:srgbClr val="2A78D6"/>
-          </a:solidFill>
-          <a:ln>
-            <a:noFill/>
-          </a:ln>
-          <a:effectLst/>
-        </p:spPr>
-        <p:style>
-          <a:lnRef idx="1">
-            <a:schemeClr val="accent1"/>
-          </a:lnRef>
-          <a:fillRef idx="3">
-            <a:schemeClr val="accent1"/>
-          </a:fillRef>
-          <a:effectRef idx="2">
-            <a:schemeClr val="accent1"/>
-          </a:effectRef>
-          <a:fontRef idx="minor">
-            <a:schemeClr val="lt1"/>
-          </a:fontRef>
-        </p:style>
-        <p:txBody>
-          <a:bodyPr rtlCol="0" anchor="ctr"/>
-          <a:lstStyle/>
-          <a:p>
-            <a:pPr algn="ctr"/>
-          </a:p>
-        </p:txBody>
-      </p:sp>
-      <p:sp>
-        <p:nvSpPr>
-          <p:cNvPr id="9" name="TextBox 8"/>
-          <p:cNvSpPr txBox="1"/>
-          <p:nvPr/>
-        </p:nvSpPr>
-        <p:spPr>
-          <a:xfrm>
-            <a:off x="822959" y="1645920"/>
-            <a:ext cx="5029200" cy="457200"/>
-          </a:xfrm>
-          <a:prstGeom prst="rect">
-            <a:avLst/>
-          </a:prstGeom>
-          <a:noFill/>
-        </p:spPr>
-        <p:txBody>
-          <a:bodyPr wrap="square" anchor="t" lIns="45720" rIns="45720" tIns="27432" bIns="27432">
-            <a:spAutoFit/>
-          </a:bodyPr>
-          <a:lstStyle/>
-          <a:p>
-            <a:pPr algn="l">
-              <a:spcAft>
-                <a:spcPts val="600"/>
-              </a:spcAft>
-            </a:pPr>
-            <a:r>
-              <a:rPr sz="1900" b="1">
-                <a:solidFill>
-                  <a:srgbClr val="0B0B0B"/>
-                </a:solidFill>
-                <a:latin typeface="Calibri"/>
-              </a:rPr>
-              <a:t>Template coverage sets the ceiling</a:t>
-            </a:r>
-          </a:p>
-        </p:txBody>
-      </p:sp>
-      <p:sp>
-        <p:nvSpPr>
-          <p:cNvPr id="10" name="TextBox 9"/>
-          <p:cNvSpPr txBox="1"/>
-          <p:nvPr/>
-        </p:nvSpPr>
-        <p:spPr>
-          <a:xfrm>
-            <a:off x="822959" y="2194560"/>
-            <a:ext cx="5029200" cy="1280160"/>
-          </a:xfrm>
-          <a:prstGeom prst="rect">
-            <a:avLst/>
-          </a:prstGeom>
-          <a:noFill/>
-        </p:spPr>
-        <p:txBody>
-          <a:bodyPr wrap="square" anchor="t" lIns="45720" rIns="45720" tIns="27432" bIns="27432">
-            <a:spAutoFit/>
-          </a:bodyPr>
-          <a:lstStyle/>
-          <a:p>
-            <a:pPr algn="l">
-              <a:spcAft>
-                <a:spcPts val="600"/>
-              </a:spcAft>
-            </a:pPr>
-            <a:r>
-              <a:rPr sz="1400" b="0">
-                <a:solidFill>
-                  <a:srgbClr val="52514E"/>
-                </a:solidFill>
-                <a:latin typeface="Calibri"/>
-              </a:rPr>
-              <a:t>T1127: covered core 3.3 Å vs uncovered insertion 24.8 Å. Residues without a template are essentially guessed.</a:t>
-            </a:r>
-          </a:p>
-        </p:txBody>
-      </p:sp>
-      <p:sp>
-        <p:nvSpPr>
-          <p:cNvPr id="11" name="Rectangle 10"/>
-          <p:cNvSpPr/>
-          <p:nvPr/>
-        </p:nvSpPr>
-        <p:spPr>
-          <a:xfrm>
-            <a:off x="6172200" y="1463040"/>
-            <a:ext cx="5440680" cy="2103120"/>
-          </a:xfrm>
-          <a:prstGeom prst="rect">
-            <a:avLst/>
-          </a:prstGeom>
-          <a:solidFill>
-            <a:srgbClr val="F5F4F1"/>
-          </a:solidFill>
-          <a:ln>
-            <a:noFill/>
-          </a:ln>
-          <a:effectLst/>
-        </p:spPr>
-        <p:style>
-          <a:lnRef idx="1">
-            <a:schemeClr val="accent1"/>
-          </a:lnRef>
-          <a:fillRef idx="3">
-            <a:schemeClr val="accent1"/>
-          </a:fillRef>
-          <a:effectRef idx="2">
-            <a:schemeClr val="accent1"/>
-          </a:effectRef>
-          <a:fontRef idx="minor">
-            <a:schemeClr val="lt1"/>
-          </a:fontRef>
-        </p:style>
-        <p:txBody>
-          <a:bodyPr rtlCol="0" anchor="ctr"/>
-          <a:lstStyle/>
-          <a:p>
-            <a:pPr algn="ctr"/>
-          </a:p>
-        </p:txBody>
-      </p:sp>
-      <p:sp>
-        <p:nvSpPr>
-          <p:cNvPr id="12" name="Rectangle 11"/>
-          <p:cNvSpPr/>
-          <p:nvPr/>
-        </p:nvSpPr>
-        <p:spPr>
-          <a:xfrm>
-            <a:off x="6172200" y="1463040"/>
-            <a:ext cx="82296" cy="2103120"/>
-          </a:xfrm>
-          <a:prstGeom prst="rect">
-            <a:avLst/>
-          </a:prstGeom>
-          <a:solidFill>
-            <a:srgbClr val="2A78D6"/>
-          </a:solidFill>
-          <a:ln>
-            <a:noFill/>
-          </a:ln>
-          <a:effectLst/>
-        </p:spPr>
-        <p:style>
-          <a:lnRef idx="1">
-            <a:schemeClr val="accent1"/>
-          </a:lnRef>
-          <a:fillRef idx="3">
-            <a:schemeClr val="accent1"/>
-          </a:fillRef>
-          <a:effectRef idx="2">
-            <a:schemeClr val="accent1"/>
-          </a:effectRef>
-          <a:fontRef idx="minor">
-            <a:schemeClr val="lt1"/>
-          </a:fontRef>
-        </p:style>
-        <p:txBody>
-          <a:bodyPr rtlCol="0" anchor="ctr"/>
-          <a:lstStyle/>
-          <a:p>
-            <a:pPr algn="ctr"/>
-          </a:p>
-        </p:txBody>
-      </p:sp>
-      <p:sp>
-        <p:nvSpPr>
-          <p:cNvPr id="13" name="TextBox 12"/>
-          <p:cNvSpPr txBox="1"/>
-          <p:nvPr/>
-        </p:nvSpPr>
-        <p:spPr>
-          <a:xfrm>
-            <a:off x="6446520" y="1645920"/>
-            <a:ext cx="5029200" cy="457200"/>
-          </a:xfrm>
-          <a:prstGeom prst="rect">
-            <a:avLst/>
-          </a:prstGeom>
-          <a:noFill/>
-        </p:spPr>
-        <p:txBody>
-          <a:bodyPr wrap="square" anchor="t" lIns="45720" rIns="45720" tIns="27432" bIns="27432">
-            <a:spAutoFit/>
-          </a:bodyPr>
-          <a:lstStyle/>
-          <a:p>
-            <a:pPr algn="l">
-              <a:spcAft>
-                <a:spcPts val="600"/>
-              </a:spcAft>
-            </a:pPr>
-            <a:r>
-              <a:rPr sz="1900" b="1">
-                <a:solidFill>
-                  <a:srgbClr val="0B0B0B"/>
-                </a:solidFill>
-                <a:latin typeface="Calibri"/>
-              </a:rPr>
-              <a:t>Coverage is not enough</a:t>
-            </a:r>
-          </a:p>
-        </p:txBody>
-      </p:sp>
-      <p:sp>
-        <p:nvSpPr>
-          <p:cNvPr id="14" name="TextBox 13"/>
-          <p:cNvSpPr txBox="1"/>
-          <p:nvPr/>
-        </p:nvSpPr>
-        <p:spPr>
-          <a:xfrm>
-            <a:off x="6446520" y="2194560"/>
-            <a:ext cx="5029200" cy="1280160"/>
-          </a:xfrm>
-          <a:prstGeom prst="rect">
-            <a:avLst/>
-          </a:prstGeom>
-          <a:noFill/>
-        </p:spPr>
-        <p:txBody>
-          <a:bodyPr wrap="square" anchor="t" lIns="45720" rIns="45720" tIns="27432" bIns="27432">
-            <a:spAutoFit/>
-          </a:bodyPr>
-          <a:lstStyle/>
-          <a:p>
-            <a:pPr algn="l">
-              <a:spcAft>
-                <a:spcPts val="600"/>
-              </a:spcAft>
-            </a:pPr>
-            <a:r>
-              <a:rPr sz="1400" b="0">
-                <a:solidFill>
-                  <a:srgbClr val="52514E"/>
-                </a:solidFill>
-                <a:latin typeface="Calibri"/>
-              </a:rPr>
-              <a:t>T1124: 88% aligned, but a whole domain is misplaced. Weak identity (~29%) can copy the wrong domain arrangement.</a:t>
-            </a:r>
-          </a:p>
-        </p:txBody>
-      </p:sp>
-      <p:sp>
-        <p:nvSpPr>
-          <p:cNvPr id="15" name="Rectangle 14"/>
-          <p:cNvSpPr/>
-          <p:nvPr/>
-        </p:nvSpPr>
-        <p:spPr>
-          <a:xfrm>
-            <a:off x="548640" y="3794760"/>
-            <a:ext cx="5440680" cy="2103120"/>
-          </a:xfrm>
-          <a:prstGeom prst="rect">
-            <a:avLst/>
-          </a:prstGeom>
-          <a:solidFill>
-            <a:srgbClr val="F5F4F1"/>
-          </a:solidFill>
-          <a:ln>
-            <a:noFill/>
-          </a:ln>
-          <a:effectLst/>
-        </p:spPr>
-        <p:style>
-          <a:lnRef idx="1">
-            <a:schemeClr val="accent1"/>
-          </a:lnRef>
-          <a:fillRef idx="3">
-            <a:schemeClr val="accent1"/>
-          </a:fillRef>
-          <a:effectRef idx="2">
-            <a:schemeClr val="accent1"/>
-          </a:effectRef>
-          <a:fontRef idx="minor">
-            <a:schemeClr val="lt1"/>
-          </a:fontRef>
-        </p:style>
-        <p:txBody>
-          <a:bodyPr rtlCol="0" anchor="ctr"/>
-          <a:lstStyle/>
-          <a:p>
-            <a:pPr algn="ctr"/>
-          </a:p>
-        </p:txBody>
-      </p:sp>
-      <p:sp>
-        <p:nvSpPr>
-          <p:cNvPr id="16" name="Rectangle 15"/>
-          <p:cNvSpPr/>
-          <p:nvPr/>
-        </p:nvSpPr>
-        <p:spPr>
-          <a:xfrm>
-            <a:off x="548640" y="3794760"/>
-            <a:ext cx="82296" cy="2103120"/>
-          </a:xfrm>
-          <a:prstGeom prst="rect">
-            <a:avLst/>
-          </a:prstGeom>
-          <a:solidFill>
-            <a:srgbClr val="EB6834"/>
-          </a:solidFill>
-          <a:ln>
-            <a:noFill/>
-          </a:ln>
-          <a:effectLst/>
-        </p:spPr>
-        <p:style>
-          <a:lnRef idx="1">
-            <a:schemeClr val="accent1"/>
-          </a:lnRef>
-          <a:fillRef idx="3">
-            <a:schemeClr val="accent1"/>
-          </a:fillRef>
-          <a:effectRef idx="2">
-            <a:schemeClr val="accent1"/>
-          </a:effectRef>
-          <a:fontRef idx="minor">
-            <a:schemeClr val="lt1"/>
-          </a:fontRef>
-        </p:style>
-        <p:txBody>
-          <a:bodyPr rtlCol="0" anchor="ctr"/>
-          <a:lstStyle/>
-          <a:p>
-            <a:pPr algn="ctr"/>
-          </a:p>
-        </p:txBody>
-      </p:sp>
-      <p:sp>
-        <p:nvSpPr>
-          <p:cNvPr id="17" name="TextBox 16"/>
-          <p:cNvSpPr txBox="1"/>
-          <p:nvPr/>
-        </p:nvSpPr>
-        <p:spPr>
-          <a:xfrm>
-            <a:off x="822959" y="3977640"/>
-            <a:ext cx="5029200" cy="457200"/>
-          </a:xfrm>
-          <a:prstGeom prst="rect">
-            <a:avLst/>
-          </a:prstGeom>
-          <a:noFill/>
-        </p:spPr>
-        <p:txBody>
-          <a:bodyPr wrap="square" anchor="t" lIns="45720" rIns="45720" tIns="27432" bIns="27432">
-            <a:spAutoFit/>
-          </a:bodyPr>
-          <a:lstStyle/>
-          <a:p>
-            <a:pPr algn="l">
-              <a:spcAft>
-                <a:spcPts val="600"/>
-              </a:spcAft>
-            </a:pPr>
-            <a:r>
-              <a:rPr sz="1900" b="1">
-                <a:solidFill>
-                  <a:srgbClr val="0B0B0B"/>
-                </a:solidFill>
-                <a:latin typeface="Calibri"/>
-              </a:rPr>
-              <a:t>Weak hits can mislead</a:t>
-            </a:r>
-          </a:p>
-        </p:txBody>
-      </p:sp>
-      <p:sp>
-        <p:nvSpPr>
-          <p:cNvPr id="18" name="TextBox 17"/>
-          <p:cNvSpPr txBox="1"/>
-          <p:nvPr/>
-        </p:nvSpPr>
-        <p:spPr>
-          <a:xfrm>
-            <a:off x="822959" y="4526280"/>
-            <a:ext cx="5029200" cy="1280160"/>
-          </a:xfrm>
-          <a:prstGeom prst="rect">
-            <a:avLst/>
-          </a:prstGeom>
-          <a:noFill/>
-        </p:spPr>
-        <p:txBody>
-          <a:bodyPr wrap="square" anchor="t" lIns="45720" rIns="45720" tIns="27432" bIns="27432">
-            <a:spAutoFit/>
-          </a:bodyPr>
-          <a:lstStyle/>
-          <a:p>
-            <a:pPr algn="l">
-              <a:spcAft>
-                <a:spcPts val="600"/>
-              </a:spcAft>
-            </a:pPr>
-            <a:r>
-              <a:rPr sz="1400" b="0">
-                <a:solidFill>
-                  <a:srgbClr val="52514E"/>
-                </a:solidFill>
-                <a:latin typeface="Calibri"/>
-              </a:rPr>
-              <a:t>T1151s2: an E = 3.9 hit stretched to 96% coverage gives a wrong fold. GA341 and z-DOPE flagged it; TBM needs real homology.</a:t>
-            </a:r>
-          </a:p>
-        </p:txBody>
-      </p:sp>
-      <p:sp>
-        <p:nvSpPr>
-          <p:cNvPr id="19" name="Rectangle 18"/>
-          <p:cNvSpPr/>
-          <p:nvPr/>
-        </p:nvSpPr>
-        <p:spPr>
-          <a:xfrm>
-            <a:off x="6172200" y="3794760"/>
-            <a:ext cx="5440680" cy="2103120"/>
-          </a:xfrm>
-          <a:prstGeom prst="rect">
-            <a:avLst/>
-          </a:prstGeom>
-          <a:solidFill>
-            <a:srgbClr val="F5F4F1"/>
-          </a:solidFill>
-          <a:ln>
-            <a:noFill/>
-          </a:ln>
-          <a:effectLst/>
-        </p:spPr>
-        <p:style>
-          <a:lnRef idx="1">
-            <a:schemeClr val="accent1"/>
-          </a:lnRef>
-          <a:fillRef idx="3">
-            <a:schemeClr val="accent1"/>
-          </a:fillRef>
-          <a:effectRef idx="2">
-            <a:schemeClr val="accent1"/>
-          </a:effectRef>
-          <a:fontRef idx="minor">
-            <a:schemeClr val="lt1"/>
-          </a:fontRef>
-        </p:style>
-        <p:txBody>
-          <a:bodyPr rtlCol="0" anchor="ctr"/>
-          <a:lstStyle/>
-          <a:p>
-            <a:pPr algn="ctr"/>
-          </a:p>
-        </p:txBody>
-      </p:sp>
-      <p:sp>
-        <p:nvSpPr>
-          <p:cNvPr id="20" name="Rectangle 19"/>
-          <p:cNvSpPr/>
-          <p:nvPr/>
-        </p:nvSpPr>
-        <p:spPr>
-          <a:xfrm>
-            <a:off x="6172200" y="3794760"/>
-            <a:ext cx="82296" cy="2103120"/>
-          </a:xfrm>
-          <a:prstGeom prst="rect">
-            <a:avLst/>
-          </a:prstGeom>
-          <a:solidFill>
-            <a:srgbClr val="EB6834"/>
-          </a:solidFill>
-          <a:ln>
-            <a:noFill/>
-          </a:ln>
-          <a:effectLst/>
-        </p:spPr>
-        <p:style>
-          <a:lnRef idx="1">
-            <a:schemeClr val="accent1"/>
-          </a:lnRef>
-          <a:fillRef idx="3">
-            <a:schemeClr val="accent1"/>
-          </a:fillRef>
-          <a:effectRef idx="2">
-            <a:schemeClr val="accent1"/>
-          </a:effectRef>
-          <a:fontRef idx="minor">
-            <a:schemeClr val="lt1"/>
-          </a:fontRef>
-        </p:style>
-        <p:txBody>
-          <a:bodyPr rtlCol="0" anchor="ctr"/>
-          <a:lstStyle/>
-          <a:p>
-            <a:pPr algn="ctr"/>
-          </a:p>
-        </p:txBody>
-      </p:sp>
-      <p:sp>
-        <p:nvSpPr>
-          <p:cNvPr id="21" name="TextBox 20"/>
-          <p:cNvSpPr txBox="1"/>
-          <p:nvPr/>
-        </p:nvSpPr>
-        <p:spPr>
-          <a:xfrm>
-            <a:off x="6446520" y="3977640"/>
-            <a:ext cx="5029200" cy="457200"/>
-          </a:xfrm>
-          <a:prstGeom prst="rect">
-            <a:avLst/>
-          </a:prstGeom>
-          <a:noFill/>
-        </p:spPr>
-        <p:txBody>
-          <a:bodyPr wrap="square" anchor="t" lIns="45720" rIns="45720" tIns="27432" bIns="27432">
-            <a:spAutoFit/>
-          </a:bodyPr>
-          <a:lstStyle/>
-          <a:p>
-            <a:pPr algn="l">
-              <a:spcAft>
-                <a:spcPts val="600"/>
-              </a:spcAft>
-            </a:pPr>
-            <a:r>
-              <a:rPr sz="1900" b="1">
-                <a:solidFill>
-                  <a:srgbClr val="0B0B0B"/>
-                </a:solidFill>
-                <a:latin typeface="Calibri"/>
-              </a:rPr>
-              <a:t>Template search is the bottleneck</a:t>
-            </a:r>
-          </a:p>
-        </p:txBody>
-      </p:sp>
-      <p:sp>
-        <p:nvSpPr>
-          <p:cNvPr id="22" name="TextBox 21"/>
-          <p:cNvSpPr txBox="1"/>
-          <p:nvPr/>
-        </p:nvSpPr>
-        <p:spPr>
-          <a:xfrm>
-            <a:off x="6446520" y="4526280"/>
-            <a:ext cx="5029200" cy="1280160"/>
-          </a:xfrm>
-          <a:prstGeom prst="rect">
-            <a:avLst/>
-          </a:prstGeom>
-          <a:noFill/>
-        </p:spPr>
-        <p:txBody>
-          <a:bodyPr wrap="square" anchor="t" lIns="45720" rIns="45720" tIns="27432" bIns="27432">
-            <a:spAutoFit/>
-          </a:bodyPr>
-          <a:lstStyle/>
-          <a:p>
-            <a:pPr algn="l">
-              <a:spcAft>
-                <a:spcPts val="600"/>
-              </a:spcAft>
-            </a:pPr>
-            <a:r>
-              <a:rPr sz="1400" b="0">
-                <a:solidFill>
-                  <a:srgbClr val="52514E"/>
-                </a:solidFill>
-                <a:latin typeface="Calibri"/>
-              </a:rPr>
-              <a:t>AlphaFold3 (TM 0.92–0.97) also used templates: for T1151s2 four WhiB structures our MMseqs2 search missed. Profile search plus learned structure wins.</a:t>
+              <a:t>•  Where the agent helped: a written, checkable rationale for every choice, and risk predictions (domain orientation, insertion, uncovered tail) that Agent 2 confirmed.</a:t>
             </a:r>
           </a:p>
         </p:txBody>
@@ -7866,7 +7899,7 @@
                 </a:solidFill>
                 <a:latin typeface="Calibri"/>
               </a:rPr>
-              <a:t>Limitations</a:t>
+              <a:t>Key findings</a:t>
             </a:r>
           </a:p>
         </p:txBody>
@@ -7986,14 +8019,102 @@
       </p:sp>
       <p:sp>
         <p:nvSpPr>
-          <p:cNvPr id="7" name="TextBox 6"/>
+          <p:cNvPr id="7" name="Rectangle 6"/>
+          <p:cNvSpPr/>
+          <p:nvPr/>
+        </p:nvSpPr>
+        <p:spPr>
+          <a:xfrm>
+            <a:off x="548640" y="1463040"/>
+            <a:ext cx="5440680" cy="2103120"/>
+          </a:xfrm>
+          <a:prstGeom prst="rect">
+            <a:avLst/>
+          </a:prstGeom>
+          <a:solidFill>
+            <a:srgbClr val="F5F4F1"/>
+          </a:solidFill>
+          <a:ln>
+            <a:noFill/>
+          </a:ln>
+          <a:effectLst/>
+        </p:spPr>
+        <p:style>
+          <a:lnRef idx="1">
+            <a:schemeClr val="accent1"/>
+          </a:lnRef>
+          <a:fillRef idx="3">
+            <a:schemeClr val="accent1"/>
+          </a:fillRef>
+          <a:effectRef idx="2">
+            <a:schemeClr val="accent1"/>
+          </a:effectRef>
+          <a:fontRef idx="minor">
+            <a:schemeClr val="lt1"/>
+          </a:fontRef>
+        </p:style>
+        <p:txBody>
+          <a:bodyPr rtlCol="0" anchor="ctr"/>
+          <a:lstStyle/>
+          <a:p>
+            <a:pPr algn="ctr"/>
+          </a:p>
+        </p:txBody>
+      </p:sp>
+      <p:sp>
+        <p:nvSpPr>
+          <p:cNvPr id="8" name="Rectangle 7"/>
+          <p:cNvSpPr/>
+          <p:nvPr/>
+        </p:nvSpPr>
+        <p:spPr>
+          <a:xfrm>
+            <a:off x="548640" y="1463040"/>
+            <a:ext cx="82296" cy="2103120"/>
+          </a:xfrm>
+          <a:prstGeom prst="rect">
+            <a:avLst/>
+          </a:prstGeom>
+          <a:solidFill>
+            <a:srgbClr val="2A78D6"/>
+          </a:solidFill>
+          <a:ln>
+            <a:noFill/>
+          </a:ln>
+          <a:effectLst/>
+        </p:spPr>
+        <p:style>
+          <a:lnRef idx="1">
+            <a:schemeClr val="accent1"/>
+          </a:lnRef>
+          <a:fillRef idx="3">
+            <a:schemeClr val="accent1"/>
+          </a:fillRef>
+          <a:effectRef idx="2">
+            <a:schemeClr val="accent1"/>
+          </a:effectRef>
+          <a:fontRef idx="minor">
+            <a:schemeClr val="lt1"/>
+          </a:fontRef>
+        </p:style>
+        <p:txBody>
+          <a:bodyPr rtlCol="0" anchor="ctr"/>
+          <a:lstStyle/>
+          <a:p>
+            <a:pPr algn="ctr"/>
+          </a:p>
+        </p:txBody>
+      </p:sp>
+      <p:sp>
+        <p:nvSpPr>
+          <p:cNvPr id="9" name="TextBox 8"/>
           <p:cNvSpPr txBox="1"/>
           <p:nvPr/>
         </p:nvSpPr>
         <p:spPr>
           <a:xfrm>
-            <a:off x="548640" y="1463040"/>
-            <a:ext cx="11064240" cy="4572000"/>
+            <a:off x="822959" y="1645920"/>
+            <a:ext cx="5029200" cy="457200"/>
           </a:xfrm>
           <a:prstGeom prst="rect">
             <a:avLst/>
@@ -8008,97 +8129,554 @@
           <a:p>
             <a:pPr algn="l">
               <a:spcAft>
-                <a:spcPts val="1200"/>
+                <a:spcPts val="600"/>
               </a:spcAft>
             </a:pPr>
             <a:r>
-              <a:rPr sz="1600" b="0">
+              <a:rPr sz="1900" b="1">
                 <a:solidFill>
                   <a:srgbClr val="0B0B0B"/>
                 </a:solidFill>
                 <a:latin typeface="Calibri"/>
               </a:rPr>
-              <a:t>•  Three targets, one MODELLER and one AlphaFold3 model each: case studies, not trends.</a:t>
-            </a:r>
-          </a:p>
+              <a:t>Template coverage sets the ceiling</a:t>
+            </a:r>
+          </a:p>
+        </p:txBody>
+      </p:sp>
+      <p:sp>
+        <p:nvSpPr>
+          <p:cNvPr id="10" name="TextBox 9"/>
+          <p:cNvSpPr txBox="1"/>
+          <p:nvPr/>
+        </p:nvSpPr>
+        <p:spPr>
+          <a:xfrm>
+            <a:off x="822959" y="2194560"/>
+            <a:ext cx="5029200" cy="1280160"/>
+          </a:xfrm>
+          <a:prstGeom prst="rect">
+            <a:avLst/>
+          </a:prstGeom>
+          <a:noFill/>
+        </p:spPr>
+        <p:txBody>
+          <a:bodyPr wrap="square" anchor="t" lIns="45720" rIns="45720" tIns="27432" bIns="27432">
+            <a:spAutoFit/>
+          </a:bodyPr>
+          <a:lstStyle/>
           <a:p>
             <a:pPr algn="l">
               <a:spcAft>
-                <a:spcPts val="1200"/>
+                <a:spcPts val="600"/>
               </a:spcAft>
             </a:pPr>
             <a:r>
-              <a:rPr sz="1600" b="0">
-                <a:solidFill>
-                  <a:srgbClr val="0B0B0B"/>
-                </a:solidFill>
-                <a:latin typeface="Calibri"/>
-              </a:rPr>
-              <a:t>•  Our template search is sequence-based (RCSB / MMseqs2); a profile method such as HHpred would likely have found the WhiB templates for T1151s2.</a:t>
-            </a:r>
-          </a:p>
+              <a:rPr sz="1400" b="0">
+                <a:solidFill>
+                  <a:srgbClr val="52514E"/>
+                </a:solidFill>
+                <a:latin typeface="Calibri"/>
+              </a:rPr>
+              <a:t>Covered residues: 1.9 Å (T1127), 1.7 Å (T1151s2) mean Cα error. Uncovered: 22–35 Å. Residues without a template are essentially guessed.</a:t>
+            </a:r>
+          </a:p>
+        </p:txBody>
+      </p:sp>
+      <p:sp>
+        <p:nvSpPr>
+          <p:cNvPr id="11" name="Rectangle 10"/>
+          <p:cNvSpPr/>
+          <p:nvPr/>
+        </p:nvSpPr>
+        <p:spPr>
+          <a:xfrm>
+            <a:off x="6172200" y="1463040"/>
+            <a:ext cx="5440680" cy="2103120"/>
+          </a:xfrm>
+          <a:prstGeom prst="rect">
+            <a:avLst/>
+          </a:prstGeom>
+          <a:solidFill>
+            <a:srgbClr val="F5F4F1"/>
+          </a:solidFill>
+          <a:ln>
+            <a:noFill/>
+          </a:ln>
+          <a:effectLst/>
+        </p:spPr>
+        <p:style>
+          <a:lnRef idx="1">
+            <a:schemeClr val="accent1"/>
+          </a:lnRef>
+          <a:fillRef idx="3">
+            <a:schemeClr val="accent1"/>
+          </a:fillRef>
+          <a:effectRef idx="2">
+            <a:schemeClr val="accent1"/>
+          </a:effectRef>
+          <a:fontRef idx="minor">
+            <a:schemeClr val="lt1"/>
+          </a:fontRef>
+        </p:style>
+        <p:txBody>
+          <a:bodyPr rtlCol="0" anchor="ctr"/>
+          <a:lstStyle/>
+          <a:p>
+            <a:pPr algn="ctr"/>
+          </a:p>
+        </p:txBody>
+      </p:sp>
+      <p:sp>
+        <p:nvSpPr>
+          <p:cNvPr id="12" name="Rectangle 11"/>
+          <p:cNvSpPr/>
+          <p:nvPr/>
+        </p:nvSpPr>
+        <p:spPr>
+          <a:xfrm>
+            <a:off x="6172200" y="1463040"/>
+            <a:ext cx="82296" cy="2103120"/>
+          </a:xfrm>
+          <a:prstGeom prst="rect">
+            <a:avLst/>
+          </a:prstGeom>
+          <a:solidFill>
+            <a:srgbClr val="2A78D6"/>
+          </a:solidFill>
+          <a:ln>
+            <a:noFill/>
+          </a:ln>
+          <a:effectLst/>
+        </p:spPr>
+        <p:style>
+          <a:lnRef idx="1">
+            <a:schemeClr val="accent1"/>
+          </a:lnRef>
+          <a:fillRef idx="3">
+            <a:schemeClr val="accent1"/>
+          </a:fillRef>
+          <a:effectRef idx="2">
+            <a:schemeClr val="accent1"/>
+          </a:effectRef>
+          <a:fontRef idx="minor">
+            <a:schemeClr val="lt1"/>
+          </a:fontRef>
+        </p:style>
+        <p:txBody>
+          <a:bodyPr rtlCol="0" anchor="ctr"/>
+          <a:lstStyle/>
+          <a:p>
+            <a:pPr algn="ctr"/>
+          </a:p>
+        </p:txBody>
+      </p:sp>
+      <p:sp>
+        <p:nvSpPr>
+          <p:cNvPr id="13" name="TextBox 12"/>
+          <p:cNvSpPr txBox="1"/>
+          <p:nvPr/>
+        </p:nvSpPr>
+        <p:spPr>
+          <a:xfrm>
+            <a:off x="6446520" y="1645920"/>
+            <a:ext cx="5029200" cy="457200"/>
+          </a:xfrm>
+          <a:prstGeom prst="rect">
+            <a:avLst/>
+          </a:prstGeom>
+          <a:noFill/>
+        </p:spPr>
+        <p:txBody>
+          <a:bodyPr wrap="square" anchor="t" lIns="45720" rIns="45720" tIns="27432" bIns="27432">
+            <a:spAutoFit/>
+          </a:bodyPr>
+          <a:lstStyle/>
           <a:p>
             <a:pPr algn="l">
               <a:spcAft>
-                <a:spcPts val="1200"/>
+                <a:spcPts val="600"/>
               </a:spcAft>
             </a:pPr>
             <a:r>
-              <a:rPr sz="1600" b="0">
+              <a:rPr sz="1900" b="1">
                 <a:solidFill>
                   <a:srgbClr val="0B0B0B"/>
                 </a:solidFill>
                 <a:latin typeface="Calibri"/>
               </a:rPr>
-              <a:t>•  Only single-template models; multi-template MODELLER runs were not tried.</a:t>
-            </a:r>
-          </a:p>
+              <a:t>Coverage is not enough</a:t>
+            </a:r>
+          </a:p>
+        </p:txBody>
+      </p:sp>
+      <p:sp>
+        <p:nvSpPr>
+          <p:cNvPr id="14" name="TextBox 13"/>
+          <p:cNvSpPr txBox="1"/>
+          <p:nvPr/>
+        </p:nvSpPr>
+        <p:spPr>
+          <a:xfrm>
+            <a:off x="6446520" y="2194560"/>
+            <a:ext cx="5029200" cy="1280160"/>
+          </a:xfrm>
+          <a:prstGeom prst="rect">
+            <a:avLst/>
+          </a:prstGeom>
+          <a:noFill/>
+        </p:spPr>
+        <p:txBody>
+          <a:bodyPr wrap="square" anchor="t" lIns="45720" rIns="45720" tIns="27432" bIns="27432">
+            <a:spAutoFit/>
+          </a:bodyPr>
+          <a:lstStyle/>
           <a:p>
             <a:pPr algn="l">
               <a:spcAft>
-                <a:spcPts val="1200"/>
+                <a:spcPts val="600"/>
               </a:spcAft>
             </a:pPr>
             <a:r>
-              <a:rPr sz="1600" b="0">
-                <a:solidFill>
-                  <a:srgbClr val="0B0B0B"/>
-                </a:solidFill>
-                <a:latin typeface="Calibri"/>
-              </a:rPr>
-              <a:t>•  Alternative builds Claude rejected were not scored against the experimental structure, so we cannot say whether they would have been better.</a:t>
-            </a:r>
-          </a:p>
+              <a:rPr sz="1400" b="0">
+                <a:solidFill>
+                  <a:srgbClr val="52514E"/>
+                </a:solidFill>
+                <a:latin typeface="Calibri"/>
+              </a:rPr>
+              <a:t>T1124: 81% aligned, but a whole domain is misplaced. At ~27% identity a single template can carry the wrong domain arrangement.</a:t>
+            </a:r>
+          </a:p>
+        </p:txBody>
+      </p:sp>
+      <p:sp>
+        <p:nvSpPr>
+          <p:cNvPr id="15" name="Rectangle 14"/>
+          <p:cNvSpPr/>
+          <p:nvPr/>
+        </p:nvSpPr>
+        <p:spPr>
+          <a:xfrm>
+            <a:off x="548640" y="3794760"/>
+            <a:ext cx="5440680" cy="2103120"/>
+          </a:xfrm>
+          <a:prstGeom prst="rect">
+            <a:avLst/>
+          </a:prstGeom>
+          <a:solidFill>
+            <a:srgbClr val="F5F4F1"/>
+          </a:solidFill>
+          <a:ln>
+            <a:noFill/>
+          </a:ln>
+          <a:effectLst/>
+        </p:spPr>
+        <p:style>
+          <a:lnRef idx="1">
+            <a:schemeClr val="accent1"/>
+          </a:lnRef>
+          <a:fillRef idx="3">
+            <a:schemeClr val="accent1"/>
+          </a:fillRef>
+          <a:effectRef idx="2">
+            <a:schemeClr val="accent1"/>
+          </a:effectRef>
+          <a:fontRef idx="minor">
+            <a:schemeClr val="lt1"/>
+          </a:fontRef>
+        </p:style>
+        <p:txBody>
+          <a:bodyPr rtlCol="0" anchor="ctr"/>
+          <a:lstStyle/>
+          <a:p>
+            <a:pPr algn="ctr"/>
+          </a:p>
+        </p:txBody>
+      </p:sp>
+      <p:sp>
+        <p:nvSpPr>
+          <p:cNvPr id="16" name="Rectangle 15"/>
+          <p:cNvSpPr/>
+          <p:nvPr/>
+        </p:nvSpPr>
+        <p:spPr>
+          <a:xfrm>
+            <a:off x="548640" y="3794760"/>
+            <a:ext cx="82296" cy="2103120"/>
+          </a:xfrm>
+          <a:prstGeom prst="rect">
+            <a:avLst/>
+          </a:prstGeom>
+          <a:solidFill>
+            <a:srgbClr val="EB6834"/>
+          </a:solidFill>
+          <a:ln>
+            <a:noFill/>
+          </a:ln>
+          <a:effectLst/>
+        </p:spPr>
+        <p:style>
+          <a:lnRef idx="1">
+            <a:schemeClr val="accent1"/>
+          </a:lnRef>
+          <a:fillRef idx="3">
+            <a:schemeClr val="accent1"/>
+          </a:fillRef>
+          <a:effectRef idx="2">
+            <a:schemeClr val="accent1"/>
+          </a:effectRef>
+          <a:fontRef idx="minor">
+            <a:schemeClr val="lt1"/>
+          </a:fontRef>
+        </p:style>
+        <p:txBody>
+          <a:bodyPr rtlCol="0" anchor="ctr"/>
+          <a:lstStyle/>
+          <a:p>
+            <a:pPr algn="ctr"/>
+          </a:p>
+        </p:txBody>
+      </p:sp>
+      <p:sp>
+        <p:nvSpPr>
+          <p:cNvPr id="17" name="TextBox 16"/>
+          <p:cNvSpPr txBox="1"/>
+          <p:nvPr/>
+        </p:nvSpPr>
+        <p:spPr>
+          <a:xfrm>
+            <a:off x="822959" y="3977640"/>
+            <a:ext cx="5029200" cy="457200"/>
+          </a:xfrm>
+          <a:prstGeom prst="rect">
+            <a:avLst/>
+          </a:prstGeom>
+          <a:noFill/>
+        </p:spPr>
+        <p:txBody>
+          <a:bodyPr wrap="square" anchor="t" lIns="45720" rIns="45720" tIns="27432" bIns="27432">
+            <a:spAutoFit/>
+          </a:bodyPr>
+          <a:lstStyle/>
           <a:p>
             <a:pPr algn="l">
               <a:spcAft>
-                <a:spcPts val="1200"/>
+                <a:spcPts val="600"/>
               </a:spcAft>
             </a:pPr>
             <a:r>
-              <a:rPr sz="1600" b="0">
+              <a:rPr sz="1900" b="1">
                 <a:solidFill>
                   <a:srgbClr val="0B0B0B"/>
                 </a:solidFill>
                 <a:latin typeface="Calibri"/>
               </a:rPr>
-              <a:t>•  Evaluation is limited to the CASP evaluation units; T1127 has 7 unobserved EU residues, and T1151s2 is one chain of a complex (scored as a monomer).</a:t>
-            </a:r>
-          </a:p>
+              <a:t>Profile search finds remote templates</a:t>
+            </a:r>
+          </a:p>
+        </p:txBody>
+      </p:sp>
+      <p:sp>
+        <p:nvSpPr>
+          <p:cNvPr id="18" name="TextBox 17"/>
+          <p:cNvSpPr txBox="1"/>
+          <p:nvPr/>
+        </p:nvSpPr>
+        <p:spPr>
+          <a:xfrm>
+            <a:off x="822959" y="4526280"/>
+            <a:ext cx="5029200" cy="1280160"/>
+          </a:xfrm>
+          <a:prstGeom prst="rect">
+            <a:avLst/>
+          </a:prstGeom>
+          <a:noFill/>
+        </p:spPr>
+        <p:txBody>
+          <a:bodyPr wrap="square" anchor="t" lIns="45720" rIns="45720" tIns="27432" bIns="27432">
+            <a:spAutoFit/>
+          </a:bodyPr>
+          <a:lstStyle/>
           <a:p>
             <a:pPr algn="l">
               <a:spcAft>
-                <a:spcPts val="1200"/>
+                <a:spcPts val="600"/>
               </a:spcAft>
             </a:pPr>
             <a:r>
-              <a:rPr sz="1600" b="0">
+              <a:rPr sz="1400" b="0">
+                <a:solidFill>
+                  <a:srgbClr val="52514E"/>
+                </a:solidFill>
+                <a:latin typeface="Calibri"/>
+              </a:rPr>
+              <a:t>T1151s2 (FM/TBM): WhiB-family templates at 38% identity over 55 residues (E ≈ 1e-22) give an accurate core, TM 0.52.</a:t>
+            </a:r>
+          </a:p>
+        </p:txBody>
+      </p:sp>
+      <p:sp>
+        <p:nvSpPr>
+          <p:cNvPr id="19" name="Rectangle 18"/>
+          <p:cNvSpPr/>
+          <p:nvPr/>
+        </p:nvSpPr>
+        <p:spPr>
+          <a:xfrm>
+            <a:off x="6172200" y="3794760"/>
+            <a:ext cx="5440680" cy="2103120"/>
+          </a:xfrm>
+          <a:prstGeom prst="rect">
+            <a:avLst/>
+          </a:prstGeom>
+          <a:solidFill>
+            <a:srgbClr val="F5F4F1"/>
+          </a:solidFill>
+          <a:ln>
+            <a:noFill/>
+          </a:ln>
+          <a:effectLst/>
+        </p:spPr>
+        <p:style>
+          <a:lnRef idx="1">
+            <a:schemeClr val="accent1"/>
+          </a:lnRef>
+          <a:fillRef idx="3">
+            <a:schemeClr val="accent1"/>
+          </a:fillRef>
+          <a:effectRef idx="2">
+            <a:schemeClr val="accent1"/>
+          </a:effectRef>
+          <a:fontRef idx="minor">
+            <a:schemeClr val="lt1"/>
+          </a:fontRef>
+        </p:style>
+        <p:txBody>
+          <a:bodyPr rtlCol="0" anchor="ctr"/>
+          <a:lstStyle/>
+          <a:p>
+            <a:pPr algn="ctr"/>
+          </a:p>
+        </p:txBody>
+      </p:sp>
+      <p:sp>
+        <p:nvSpPr>
+          <p:cNvPr id="20" name="Rectangle 19"/>
+          <p:cNvSpPr/>
+          <p:nvPr/>
+        </p:nvSpPr>
+        <p:spPr>
+          <a:xfrm>
+            <a:off x="6172200" y="3794760"/>
+            <a:ext cx="82296" cy="2103120"/>
+          </a:xfrm>
+          <a:prstGeom prst="rect">
+            <a:avLst/>
+          </a:prstGeom>
+          <a:solidFill>
+            <a:srgbClr val="EB6834"/>
+          </a:solidFill>
+          <a:ln>
+            <a:noFill/>
+          </a:ln>
+          <a:effectLst/>
+        </p:spPr>
+        <p:style>
+          <a:lnRef idx="1">
+            <a:schemeClr val="accent1"/>
+          </a:lnRef>
+          <a:fillRef idx="3">
+            <a:schemeClr val="accent1"/>
+          </a:fillRef>
+          <a:effectRef idx="2">
+            <a:schemeClr val="accent1"/>
+          </a:effectRef>
+          <a:fontRef idx="minor">
+            <a:schemeClr val="lt1"/>
+          </a:fontRef>
+        </p:style>
+        <p:txBody>
+          <a:bodyPr rtlCol="0" anchor="ctr"/>
+          <a:lstStyle/>
+          <a:p>
+            <a:pPr algn="ctr"/>
+          </a:p>
+        </p:txBody>
+      </p:sp>
+      <p:sp>
+        <p:nvSpPr>
+          <p:cNvPr id="21" name="TextBox 20"/>
+          <p:cNvSpPr txBox="1"/>
+          <p:nvPr/>
+        </p:nvSpPr>
+        <p:spPr>
+          <a:xfrm>
+            <a:off x="6446520" y="3977640"/>
+            <a:ext cx="5029200" cy="457200"/>
+          </a:xfrm>
+          <a:prstGeom prst="rect">
+            <a:avLst/>
+          </a:prstGeom>
+          <a:noFill/>
+        </p:spPr>
+        <p:txBody>
+          <a:bodyPr wrap="square" anchor="t" lIns="45720" rIns="45720" tIns="27432" bIns="27432">
+            <a:spAutoFit/>
+          </a:bodyPr>
+          <a:lstStyle/>
+          <a:p>
+            <a:pPr algn="l">
+              <a:spcAft>
+                <a:spcPts val="600"/>
+              </a:spcAft>
+            </a:pPr>
+            <a:r>
+              <a:rPr sz="1900" b="1">
                 <a:solidFill>
                   <a:srgbClr val="0B0B0B"/>
                 </a:solidFill>
                 <a:latin typeface="Calibri"/>
               </a:rPr>
-              <a:t>•  AlphaFold Server runs its own profile-based template search: it found eligible templates (all released before 2022-05) that our MMseqs2 search missed, e.g. four WhiB structures for T1151s2. The comparison is not template-free vs template-based.</a:t>
+              <a:t>AlphaFold3 fills the gaps</a:t>
+            </a:r>
+          </a:p>
+        </p:txBody>
+      </p:sp>
+      <p:sp>
+        <p:nvSpPr>
+          <p:cNvPr id="22" name="TextBox 21"/>
+          <p:cNvSpPr txBox="1"/>
+          <p:nvPr/>
+        </p:nvSpPr>
+        <p:spPr>
+          <a:xfrm>
+            <a:off x="6446520" y="4526280"/>
+            <a:ext cx="5029200" cy="1280160"/>
+          </a:xfrm>
+          <a:prstGeom prst="rect">
+            <a:avLst/>
+          </a:prstGeom>
+          <a:noFill/>
+        </p:spPr>
+        <p:txBody>
+          <a:bodyPr wrap="square" anchor="t" lIns="45720" rIns="45720" tIns="27432" bIns="27432">
+            <a:spAutoFit/>
+          </a:bodyPr>
+          <a:lstStyle/>
+          <a:p>
+            <a:pPr algn="l">
+              <a:spcAft>
+                <a:spcPts val="600"/>
+              </a:spcAft>
+            </a:pPr>
+            <a:r>
+              <a:rPr sz="1400" b="0">
+                <a:solidFill>
+                  <a:srgbClr val="52514E"/>
+                </a:solidFill>
+                <a:latin typeface="Calibri"/>
+              </a:rPr>
+              <a:t>TM 0.92–0.97 on all three, including the T1127 insertion and the T1151s2 tail. Remaining errors are at disordered termini.</a:t>
             </a:r>
           </a:p>
         </p:txBody>
@@ -8155,7 +8733,7 @@
                 </a:solidFill>
                 <a:latin typeface="Calibri"/>
               </a:rPr>
-              <a:t>SUMMARY</a:t>
+              <a:t>DISCUSSION</a:t>
             </a:r>
           </a:p>
         </p:txBody>
@@ -8194,7 +8772,7 @@
                 </a:solidFill>
                 <a:latin typeface="Calibri"/>
               </a:rPr>
-              <a:t>Conclusion</a:t>
+              <a:t>Limitations</a:t>
             </a:r>
           </a:p>
         </p:txBody>
@@ -8321,7 +8899,7 @@
         <p:spPr>
           <a:xfrm>
             <a:off x="548640" y="1463040"/>
-            <a:ext cx="6949440" cy="4114800"/>
+            <a:ext cx="11064240" cy="4572000"/>
           </a:xfrm>
           <a:prstGeom prst="rect">
             <a:avLst/>
@@ -8336,49 +8914,377 @@
           <a:p>
             <a:pPr algn="l">
               <a:spcAft>
-                <a:spcPts val="1400"/>
+                <a:spcPts val="1200"/>
               </a:spcAft>
             </a:pPr>
             <a:r>
-              <a:rPr sz="1800" b="0">
+              <a:rPr sz="1600" b="0">
                 <a:solidFill>
                   <a:srgbClr val="0B0B0B"/>
                 </a:solidFill>
                 <a:latin typeface="Calibri"/>
               </a:rPr>
-              <a:t>•  MODELLER is only as good as its template: accurate where coverage and homology are real, wrong elsewhere.</a:t>
+              <a:t>•  Three targets, one MODELLER and one AlphaFold3 model each: case studies, not trends.</a:t>
             </a:r>
           </a:p>
           <a:p>
             <a:pPr algn="l">
               <a:spcAft>
-                <a:spcPts val="1400"/>
+                <a:spcPts val="1200"/>
               </a:spcAft>
             </a:pPr>
             <a:r>
-              <a:rPr sz="1800" b="0">
+              <a:rPr sz="1600" b="0">
                 <a:solidFill>
                   <a:srgbClr val="0B0B0B"/>
                 </a:solidFill>
                 <a:latin typeface="Calibri"/>
               </a:rPr>
-              <a:t>•  AlphaFold3 outperforms MODELLER on all three targets (TM +0.31 to +0.75).</a:t>
+              <a:t>•  Only single-template models; combining templates or modelling the T1124 dimer might fix part of the uncovered or misplaced regions.</a:t>
             </a:r>
           </a:p>
           <a:p>
             <a:pPr algn="l">
               <a:spcAft>
-                <a:spcPts val="1400"/>
+                <a:spcPts val="1200"/>
               </a:spcAft>
             </a:pPr>
             <a:r>
-              <a:rPr sz="1800" b="0">
+              <a:rPr sz="1600" b="0">
                 <a:solidFill>
                   <a:srgbClr val="0B0B0B"/>
                 </a:solidFill>
                 <a:latin typeface="Calibri"/>
               </a:rPr>
-              <a:t>•  An AI coordinator adds transparency and sensible risk flags, but cannot make up for a template search that misses remote homologues.</a:t>
+              <a:t>•  Alternative builds Claude rejected were not scored against the experimental structure, so we cannot say whether they would have been better.</a:t>
+            </a:r>
+          </a:p>
+          <a:p>
+            <a:pPr algn="l">
+              <a:spcAft>
+                <a:spcPts val="1200"/>
+              </a:spcAft>
+            </a:pPr>
+            <a:r>
+              <a:rPr sz="1600" b="0">
+                <a:solidFill>
+                  <a:srgbClr val="0B0B0B"/>
+                </a:solidFill>
+                <a:latin typeface="Calibri"/>
+              </a:rPr>
+              <a:t>•  Evaluation is limited to the CASP evaluation units; T1127 has 7 unobserved EU residues, and T1151s2 is one chain of a complex (scored as a monomer).</a:t>
+            </a:r>
+          </a:p>
+          <a:p>
+            <a:pPr algn="l">
+              <a:spcAft>
+                <a:spcPts val="1200"/>
+              </a:spcAft>
+            </a:pPr>
+            <a:r>
+              <a:rPr sz="1600" b="0">
+                <a:solidFill>
+                  <a:srgbClr val="0B0B0B"/>
+                </a:solidFill>
+                <a:latin typeface="Calibri"/>
+              </a:rPr>
+              <a:t>•  AlphaFold Server also uses PDB templates (for T1151s2 the same WhiB family) plus large sequence alignments: the comparison is method vs method, not template vs no template.</a:t>
+            </a:r>
+          </a:p>
+        </p:txBody>
+      </p:sp>
+    </p:spTree>
+  </p:cSld>
+  <p:clrMapOvr>
+    <a:masterClrMapping/>
+  </p:clrMapOvr>
+</p:sld>
+</file>
+
+<file path=ppt/slides/slide15.xml><?xml version="1.0" encoding="utf-8"?>
+<p:sld xmlns:a="http://schemas.openxmlformats.org/drawingml/2006/main" xmlns:p="http://schemas.openxmlformats.org/presentationml/2006/main" xmlns:r="http://schemas.openxmlformats.org/officeDocument/2006/relationships">
+  <p:cSld>
+    <p:spTree>
+      <p:nvGrpSpPr>
+        <p:cNvPr id="1" name=""/>
+        <p:cNvGrpSpPr/>
+        <p:nvPr/>
+      </p:nvGrpSpPr>
+      <p:grpSpPr/>
+      <p:sp>
+        <p:nvSpPr>
+          <p:cNvPr id="2" name="TextBox 1"/>
+          <p:cNvSpPr txBox="1"/>
+          <p:nvPr/>
+        </p:nvSpPr>
+        <p:spPr>
+          <a:xfrm>
+            <a:off x="548640" y="292608"/>
+            <a:ext cx="10972800" cy="274320"/>
+          </a:xfrm>
+          <a:prstGeom prst="rect">
+            <a:avLst/>
+          </a:prstGeom>
+          <a:noFill/>
+        </p:spPr>
+        <p:txBody>
+          <a:bodyPr wrap="square" anchor="t" lIns="45720" rIns="45720" tIns="27432" bIns="27432">
+            <a:spAutoFit/>
+          </a:bodyPr>
+          <a:lstStyle/>
+          <a:p>
+            <a:pPr algn="l">
+              <a:spcAft>
+                <a:spcPts val="600"/>
+              </a:spcAft>
+            </a:pPr>
+            <a:r>
+              <a:rPr sz="1100" b="1">
+                <a:solidFill>
+                  <a:srgbClr val="2A78D6"/>
+                </a:solidFill>
+                <a:latin typeface="Calibri"/>
+              </a:rPr>
+              <a:t>SUMMARY</a:t>
+            </a:r>
+          </a:p>
+        </p:txBody>
+      </p:sp>
+      <p:sp>
+        <p:nvSpPr>
+          <p:cNvPr id="3" name="TextBox 2"/>
+          <p:cNvSpPr txBox="1"/>
+          <p:nvPr/>
+        </p:nvSpPr>
+        <p:spPr>
+          <a:xfrm>
+            <a:off x="548640" y="502920"/>
+            <a:ext cx="11064240" cy="640080"/>
+          </a:xfrm>
+          <a:prstGeom prst="rect">
+            <a:avLst/>
+          </a:prstGeom>
+          <a:noFill/>
+        </p:spPr>
+        <p:txBody>
+          <a:bodyPr wrap="square" anchor="t" lIns="45720" rIns="45720" tIns="27432" bIns="27432">
+            <a:spAutoFit/>
+          </a:bodyPr>
+          <a:lstStyle/>
+          <a:p>
+            <a:pPr algn="l">
+              <a:spcAft>
+                <a:spcPts val="600"/>
+              </a:spcAft>
+            </a:pPr>
+            <a:r>
+              <a:rPr sz="2800" b="1">
+                <a:solidFill>
+                  <a:srgbClr val="0B0B0B"/>
+                </a:solidFill>
+                <a:latin typeface="Calibri"/>
+              </a:rPr>
+              <a:t>Conclusion</a:t>
+            </a:r>
+          </a:p>
+        </p:txBody>
+      </p:sp>
+      <p:cxnSp>
+        <p:nvCxnSpPr>
+          <p:cNvPr id="4" name="Connector 3"/>
+          <p:cNvCxnSpPr/>
+          <p:nvPr/>
+        </p:nvCxnSpPr>
+        <p:spPr>
+          <a:xfrm>
+            <a:off x="548640" y="1170432"/>
+            <a:ext cx="11094415" cy="0"/>
+          </a:xfrm>
+          <a:prstGeom prst="line">
+            <a:avLst/>
+          </a:prstGeom>
+          <a:ln w="12700">
+            <a:solidFill>
+              <a:srgbClr val="E4E3DF"/>
+            </a:solidFill>
+          </a:ln>
+        </p:spPr>
+        <p:style>
+          <a:lnRef idx="2">
+            <a:schemeClr val="accent1"/>
+          </a:lnRef>
+          <a:fillRef idx="0">
+            <a:schemeClr val="accent1"/>
+          </a:fillRef>
+          <a:effectRef idx="1">
+            <a:schemeClr val="accent1"/>
+          </a:effectRef>
+          <a:fontRef idx="minor">
+            <a:schemeClr val="tx1"/>
+          </a:fontRef>
+        </p:style>
+      </p:cxnSp>
+      <p:sp>
+        <p:nvSpPr>
+          <p:cNvPr id="5" name="TextBox 4"/>
+          <p:cNvSpPr txBox="1"/>
+          <p:nvPr/>
+        </p:nvSpPr>
+        <p:spPr>
+          <a:xfrm>
+            <a:off x="11185855" y="6473952"/>
+            <a:ext cx="548640" cy="274320"/>
+          </a:xfrm>
+          <a:prstGeom prst="rect">
+            <a:avLst/>
+          </a:prstGeom>
+          <a:noFill/>
+        </p:spPr>
+        <p:txBody>
+          <a:bodyPr wrap="square" anchor="t" lIns="45720" rIns="45720" tIns="27432" bIns="27432">
+            <a:spAutoFit/>
+          </a:bodyPr>
+          <a:lstStyle/>
+          <a:p>
+            <a:pPr algn="r">
+              <a:spcAft>
+                <a:spcPts val="600"/>
+              </a:spcAft>
+            </a:pPr>
+            <a:r>
+              <a:rPr sz="1000" b="0">
+                <a:solidFill>
+                  <a:srgbClr val="52514E"/>
+                </a:solidFill>
+                <a:latin typeface="Calibri"/>
+              </a:rPr>
+              <a:t>15</a:t>
+            </a:r>
+          </a:p>
+        </p:txBody>
+      </p:sp>
+      <p:sp>
+        <p:nvSpPr>
+          <p:cNvPr id="6" name="TextBox 5"/>
+          <p:cNvSpPr txBox="1"/>
+          <p:nvPr/>
+        </p:nvSpPr>
+        <p:spPr>
+          <a:xfrm>
+            <a:off x="548640" y="6473952"/>
+            <a:ext cx="7315200" cy="274320"/>
+          </a:xfrm>
+          <a:prstGeom prst="rect">
+            <a:avLst/>
+          </a:prstGeom>
+          <a:noFill/>
+        </p:spPr>
+        <p:txBody>
+          <a:bodyPr wrap="square" anchor="t" lIns="45720" rIns="45720" tIns="27432" bIns="27432">
+            <a:spAutoFit/>
+          </a:bodyPr>
+          <a:lstStyle/>
+          <a:p>
+            <a:pPr algn="l">
+              <a:spcAft>
+                <a:spcPts val="600"/>
+              </a:spcAft>
+            </a:pPr>
+            <a:r>
+              <a:rPr sz="1000" b="0">
+                <a:solidFill>
+                  <a:srgbClr val="52514E"/>
+                </a:solidFill>
+                <a:latin typeface="Calibri"/>
+              </a:rPr>
+              <a:t>CMP_SC 8170 · Project 2 · Template-based modeling vs AlphaFold3</a:t>
+            </a:r>
+          </a:p>
+        </p:txBody>
+      </p:sp>
+      <p:sp>
+        <p:nvSpPr>
+          <p:cNvPr id="7" name="TextBox 6"/>
+          <p:cNvSpPr txBox="1"/>
+          <p:nvPr/>
+        </p:nvSpPr>
+        <p:spPr>
+          <a:xfrm>
+            <a:off x="548640" y="1463040"/>
+            <a:ext cx="6949440" cy="4114800"/>
+          </a:xfrm>
+          <a:prstGeom prst="rect">
+            <a:avLst/>
+          </a:prstGeom>
+          <a:noFill/>
+        </p:spPr>
+        <p:txBody>
+          <a:bodyPr wrap="square" anchor="t" lIns="45720" rIns="45720" tIns="27432" bIns="27432">
+            <a:spAutoFit/>
+          </a:bodyPr>
+          <a:lstStyle/>
+          <a:p>
+            <a:pPr algn="l">
+              <a:spcAft>
+                <a:spcPts val="1200"/>
+              </a:spcAft>
+            </a:pPr>
+            <a:r>
+              <a:rPr sz="1700" b="0">
+                <a:solidFill>
+                  <a:srgbClr val="0B0B0B"/>
+                </a:solidFill>
+                <a:latin typeface="Calibri"/>
+              </a:rPr>
+              <a:t>•  MODELLER is only as good as its template: accurate where the template covers (core within ~2 Å), wrong where it does not.</a:t>
+            </a:r>
+          </a:p>
+          <a:p>
+            <a:pPr algn="l">
+              <a:spcAft>
+                <a:spcPts val="1200"/>
+              </a:spcAft>
+            </a:pPr>
+            <a:r>
+              <a:rPr sz="1700" b="0">
+                <a:solidFill>
+                  <a:srgbClr val="0B0B0B"/>
+                </a:solidFill>
+                <a:latin typeface="Calibri"/>
+              </a:rPr>
+              <a:t>•  A profile search makes template-based modeling possible even for the FM/TBM target (T1151s2, TM 0.52).</a:t>
+            </a:r>
+          </a:p>
+          <a:p>
+            <a:pPr algn="l">
+              <a:spcAft>
+                <a:spcPts val="1200"/>
+              </a:spcAft>
+            </a:pPr>
+            <a:r>
+              <a:rPr sz="1700" b="0">
+                <a:solidFill>
+                  <a:srgbClr val="0B0B0B"/>
+                </a:solidFill>
+                <a:latin typeface="Calibri"/>
+              </a:rPr>
+              <a:t>•  AlphaFold3 outperforms MODELLER on all three targets (TM +0.25 to +0.40).</a:t>
+            </a:r>
+          </a:p>
+          <a:p>
+            <a:pPr algn="l">
+              <a:spcAft>
+                <a:spcPts val="1200"/>
+              </a:spcAft>
+            </a:pPr>
+            <a:r>
+              <a:rPr sz="1700" b="0">
+                <a:solidFill>
+                  <a:srgbClr val="0B0B0B"/>
+                </a:solidFill>
+                <a:latin typeface="Calibri"/>
+              </a:rPr>
+              <a:t>•  The Claude agent matched the fixed rule's choices and correctly predicted each failure mode, adding transparency rather than accuracy.</a:t>
             </a:r>
           </a:p>
         </p:txBody>
@@ -9389,7 +10295,7 @@
                 </a:solidFill>
                 <a:latin typeface="Calibri"/>
               </a:rPr>
-              <a:t>T1151s2 replaces the original FM/TBM target T1123, for which neither RCSB nor a whole-PDB MMseqs2 search found any homologue other than its own structure.</a:t>
+              <a:t>T1151s2 replaces the original FM/TBM target T1123, for which the profile search finds no template in the pre-2022 PDB (best E = 0.5).</a:t>
             </a:r>
           </a:p>
         </p:txBody>
@@ -9736,7 +10642,7 @@
                 </a:solidFill>
                 <a:latin typeface="Calibri"/>
               </a:rPr>
-              <a:t>template search → leakage filter → align2d / automodel → pick model</a:t>
+              <a:t>profile HMM search → leakage filter → profile alignment → automodel → pick model</a:t>
             </a:r>
           </a:p>
         </p:txBody>
@@ -10363,7 +11269,7 @@
                 </a:solidFill>
                 <a:latin typeface="Calibri"/>
               </a:rPr>
-              <a:t>What Claude decides, and what the code enforces</a:t>
+              <a:t>Template search: iterative profile HMM (jackhmmer)</a:t>
             </a:r>
           </a:p>
         </p:txBody>
@@ -10483,23 +11389,27 @@
       </p:sp>
       <p:sp>
         <p:nvSpPr>
-          <p:cNvPr id="7" name="Rectangle 6"/>
+          <p:cNvPr id="7" name="Rounded Rectangle 6"/>
           <p:cNvSpPr/>
           <p:nvPr/>
         </p:nvSpPr>
         <p:spPr>
           <a:xfrm>
             <a:off x="548640" y="1463040"/>
-            <a:ext cx="3566160" cy="73152"/>
-          </a:xfrm>
-          <a:prstGeom prst="rect">
-            <a:avLst/>
+            <a:ext cx="3840480" cy="713232"/>
+          </a:xfrm>
+          <a:prstGeom prst="roundRect">
+            <a:avLst>
+              <a:gd name="adj" fmla="val 8000"/>
+            </a:avLst>
           </a:prstGeom>
           <a:solidFill>
-            <a:srgbClr val="2A78D6"/>
+            <a:srgbClr val="FFFFFF"/>
           </a:solidFill>
-          <a:ln>
-            <a:noFill/>
+          <a:ln w="12700">
+            <a:solidFill>
+              <a:srgbClr val="E4E3DF"/>
+            </a:solidFill>
           </a:ln>
           <a:effectLst/>
         </p:spPr>
@@ -10518,174 +11428,93 @@
           </a:fontRef>
         </p:style>
         <p:txBody>
-          <a:bodyPr rtlCol="0" anchor="ctr"/>
+          <a:bodyPr rtlCol="0" anchor="ctr" wrap="square" lIns="109728" rIns="109728"/>
           <a:lstStyle/>
           <a:p>
             <a:pPr algn="ctr"/>
-          </a:p>
-        </p:txBody>
-      </p:sp>
-      <p:sp>
-        <p:nvSpPr>
-          <p:cNvPr id="8" name="TextBox 7"/>
-          <p:cNvSpPr txBox="1"/>
-          <p:nvPr/>
-        </p:nvSpPr>
-        <p:spPr>
-          <a:xfrm>
-            <a:off x="548640" y="1645920"/>
-            <a:ext cx="3566160" cy="457200"/>
-          </a:xfrm>
-          <a:prstGeom prst="rect">
-            <a:avLst/>
-          </a:prstGeom>
-          <a:noFill/>
-        </p:spPr>
-        <p:txBody>
-          <a:bodyPr wrap="square" anchor="t" lIns="45720" rIns="45720" tIns="27432" bIns="27432">
-            <a:spAutoFit/>
-          </a:bodyPr>
-          <a:lstStyle/>
-          <a:p>
-            <a:pPr algn="l">
-              <a:spcAft>
-                <a:spcPts val="600"/>
-              </a:spcAft>
-            </a:pPr>
-            <a:r>
-              <a:rPr sz="1800" b="1">
-                <a:solidFill>
-                  <a:srgbClr val="2A78D6"/>
-                </a:solidFill>
-                <a:latin typeface="Calibri"/>
-              </a:rPr>
-              <a:t>Claude decides</a:t>
-            </a:r>
-          </a:p>
-        </p:txBody>
-      </p:sp>
-      <p:sp>
-        <p:nvSpPr>
-          <p:cNvPr id="9" name="TextBox 8"/>
-          <p:cNvSpPr txBox="1"/>
-          <p:nvPr/>
-        </p:nvSpPr>
-        <p:spPr>
-          <a:xfrm>
-            <a:off x="548640" y="2148840"/>
-            <a:ext cx="3566160" cy="3840480"/>
-          </a:xfrm>
-          <a:prstGeom prst="rect">
-            <a:avLst/>
-          </a:prstGeom>
-          <a:noFill/>
-        </p:spPr>
-        <p:txBody>
-          <a:bodyPr wrap="square" anchor="t" lIns="45720" rIns="45720" tIns="27432" bIns="27432">
-            <a:spAutoFit/>
-          </a:bodyPr>
-          <a:lstStyle/>
-          <a:p>
-            <a:pPr algn="l">
-              <a:spcAft>
-                <a:spcPts val="1000"/>
-              </a:spcAft>
-            </a:pPr>
-            <a:r>
-              <a:rPr sz="1400" b="0">
+            <a:r>
+              <a:rPr sz="1500" b="1">
                 <a:solidFill>
                   <a:srgbClr val="0B0B0B"/>
                 </a:solidFill>
                 <a:latin typeface="Calibri"/>
               </a:rPr>
-              <a:t>•  search backend and E-value cutoff (RCSB or local MMseqs2)</a:t>
-            </a:r>
-          </a:p>
-          <a:p>
-            <a:pPr algn="l">
-              <a:spcAft>
-                <a:spcPts val="1000"/>
-              </a:spcAft>
-            </a:pPr>
-            <a:r>
-              <a:rPr sz="1400" b="0">
-                <a:solidFill>
-                  <a:srgbClr val="0B0B0B"/>
-                </a:solidFill>
-                <a:latin typeface="Calibri"/>
-              </a:rPr>
-              <a:t>•  which candidate templates to build (up to 4)</a:t>
-            </a:r>
-          </a:p>
-          <a:p>
-            <a:pPr algn="l">
-              <a:spcAft>
-                <a:spcPts val="1000"/>
-              </a:spcAft>
-            </a:pPr>
-            <a:r>
-              <a:rPr sz="1400" b="0">
-                <a:solidFill>
-                  <a:srgbClr val="0B0B0B"/>
-                </a:solidFill>
-                <a:latin typeface="Calibri"/>
-              </a:rPr>
-              <a:t>•  which build and model to keep, or no template at all</a:t>
-            </a:r>
-          </a:p>
-          <a:p>
-            <a:pPr algn="l">
-              <a:spcAft>
-                <a:spcPts val="1000"/>
-              </a:spcAft>
-            </a:pPr>
-            <a:r>
-              <a:rPr sz="1400" b="0">
-                <a:solidFill>
-                  <a:srgbClr val="0B0B0B"/>
-                </a:solidFill>
-                <a:latin typeface="Calibri"/>
-              </a:rPr>
-              <a:t>•  Agent 2: which errors to inspect and how to explain them</a:t>
-            </a:r>
-          </a:p>
-          <a:p>
-            <a:pPr algn="l">
-              <a:spcAft>
-                <a:spcPts val="1000"/>
-              </a:spcAft>
-            </a:pPr>
-            <a:r>
-              <a:rPr sz="1400" b="0">
-                <a:solidFill>
-                  <a:srgbClr val="0B0B0B"/>
-                </a:solidFill>
-                <a:latin typeface="Calibri"/>
-              </a:rPr>
-              <a:t>•  the draft interpretation of the whole comparison</a:t>
-            </a:r>
-          </a:p>
-        </p:txBody>
-      </p:sp>
-      <p:sp>
-        <p:nvSpPr>
-          <p:cNvPr id="10" name="Rectangle 9"/>
+              <a:t>Target sequence</a:t>
+            </a:r>
+          </a:p>
+          <a:p>
+            <a:pPr algn="ctr"/>
+            <a:r>
+              <a:rPr sz="1150">
+                <a:solidFill>
+                  <a:srgbClr val="52514E"/>
+                </a:solidFill>
+                <a:latin typeface="Calibri"/>
+              </a:rPr>
+              <a:t>tags masked (His, TEV…)</a:t>
+            </a:r>
+          </a:p>
+        </p:txBody>
+      </p:sp>
+      <p:cxnSp>
+        <p:nvCxnSpPr>
+          <p:cNvPr id="8" name="Connector 7"/>
+          <p:cNvCxnSpPr/>
+          <p:nvPr/>
+        </p:nvCxnSpPr>
+        <p:spPr>
+          <a:xfrm>
+            <a:off x="2468880" y="2176272"/>
+            <a:ext cx="0" cy="182880"/>
+          </a:xfrm>
+          <a:prstGeom prst="line">
+            <a:avLst/>
+          </a:prstGeom>
+          <a:ln w="22225">
+            <a:solidFill>
+              <a:srgbClr val="52514E"/>
+            </a:solidFill>
+            <a:tailEnd type="triangle" w="med" len="med"/>
+          </a:ln>
+        </p:spPr>
+        <p:style>
+          <a:lnRef idx="2">
+            <a:schemeClr val="accent1"/>
+          </a:lnRef>
+          <a:fillRef idx="0">
+            <a:schemeClr val="accent1"/>
+          </a:fillRef>
+          <a:effectRef idx="1">
+            <a:schemeClr val="accent1"/>
+          </a:effectRef>
+          <a:fontRef idx="minor">
+            <a:schemeClr val="tx1"/>
+          </a:fontRef>
+        </p:style>
+      </p:cxnSp>
+      <p:sp>
+        <p:nvSpPr>
+          <p:cNvPr id="9" name="Rounded Rectangle 8"/>
           <p:cNvSpPr/>
           <p:nvPr/>
         </p:nvSpPr>
         <p:spPr>
           <a:xfrm>
-            <a:off x="4297679" y="1463040"/>
-            <a:ext cx="3566160" cy="73152"/>
-          </a:xfrm>
-          <a:prstGeom prst="rect">
-            <a:avLst/>
+            <a:off x="548640" y="2359152"/>
+            <a:ext cx="3840480" cy="713232"/>
+          </a:xfrm>
+          <a:prstGeom prst="roundRect">
+            <a:avLst>
+              <a:gd name="adj" fmla="val 8000"/>
+            </a:avLst>
           </a:prstGeom>
           <a:solidFill>
-            <a:srgbClr val="0B0B0B"/>
+            <a:srgbClr val="FFFFFF"/>
           </a:solidFill>
-          <a:ln>
-            <a:noFill/>
+          <a:ln w="12700">
+            <a:solidFill>
+              <a:srgbClr val="E4E3DF"/>
+            </a:solidFill>
           </a:ln>
           <a:effectLst/>
         </p:spPr>
@@ -10704,158 +11533,93 @@
           </a:fontRef>
         </p:style>
         <p:txBody>
-          <a:bodyPr rtlCol="0" anchor="ctr"/>
+          <a:bodyPr rtlCol="0" anchor="ctr" wrap="square" lIns="109728" rIns="109728"/>
           <a:lstStyle/>
           <a:p>
             <a:pPr algn="ctr"/>
-          </a:p>
-        </p:txBody>
-      </p:sp>
-      <p:sp>
-        <p:nvSpPr>
-          <p:cNvPr id="11" name="TextBox 10"/>
-          <p:cNvSpPr txBox="1"/>
-          <p:nvPr/>
-        </p:nvSpPr>
-        <p:spPr>
-          <a:xfrm>
-            <a:off x="4297679" y="1645920"/>
-            <a:ext cx="3566160" cy="457200"/>
-          </a:xfrm>
-          <a:prstGeom prst="rect">
-            <a:avLst/>
-          </a:prstGeom>
-          <a:noFill/>
-        </p:spPr>
-        <p:txBody>
-          <a:bodyPr wrap="square" anchor="t" lIns="45720" rIns="45720" tIns="27432" bIns="27432">
-            <a:spAutoFit/>
-          </a:bodyPr>
-          <a:lstStyle/>
-          <a:p>
-            <a:pPr algn="l">
-              <a:spcAft>
-                <a:spcPts val="600"/>
-              </a:spcAft>
-            </a:pPr>
-            <a:r>
-              <a:rPr sz="1800" b="1">
-                <a:solidFill>
-                  <a:srgbClr val="0B0B0B"/>
-                </a:solidFill>
-                <a:latin typeface="Calibri"/>
-              </a:rPr>
-              <a:t>Code enforces</a:t>
-            </a:r>
-          </a:p>
-        </p:txBody>
-      </p:sp>
-      <p:sp>
-        <p:nvSpPr>
-          <p:cNvPr id="12" name="TextBox 11"/>
-          <p:cNvSpPr txBox="1"/>
-          <p:nvPr/>
-        </p:nvSpPr>
-        <p:spPr>
-          <a:xfrm>
-            <a:off x="4297679" y="2148840"/>
-            <a:ext cx="3566160" cy="3840480"/>
-          </a:xfrm>
-          <a:prstGeom prst="rect">
-            <a:avLst/>
-          </a:prstGeom>
-          <a:noFill/>
-        </p:spPr>
-        <p:txBody>
-          <a:bodyPr wrap="square" anchor="t" lIns="45720" rIns="45720" tIns="27432" bIns="27432">
-            <a:spAutoFit/>
-          </a:bodyPr>
-          <a:lstStyle/>
-          <a:p>
-            <a:pPr algn="l">
-              <a:spcAft>
-                <a:spcPts val="1000"/>
-              </a:spcAft>
-            </a:pPr>
-            <a:r>
-              <a:rPr sz="1400" b="0">
-                <a:solidFill>
-                  <a:srgbClr val="0B0B0B"/>
-                </a:solidFill>
-                <a:latin typeface="Calibri"/>
-              </a:rPr>
-              <a:t>•  leakage control: target's own PDB entry and templates released after 2022-05-01 are excluded</a:t>
-            </a:r>
-          </a:p>
-          <a:p>
-            <a:pPr algn="l">
-              <a:spcAft>
-                <a:spcPts val="1000"/>
-              </a:spcAft>
-            </a:pPr>
-            <a:r>
-              <a:rPr sz="1400" b="0">
-                <a:solidFill>
-                  <a:srgbClr val="0B0B0B"/>
-                </a:solidFill>
-                <a:latin typeface="Calibri"/>
-              </a:rPr>
-              <a:t>•  Agent 1 never reads the experimental structure</a:t>
-            </a:r>
-          </a:p>
-          <a:p>
-            <a:pPr algn="l">
-              <a:spcAft>
-                <a:spcPts val="1000"/>
-              </a:spcAft>
-            </a:pPr>
-            <a:r>
-              <a:rPr sz="1400" b="0">
-                <a:solidFill>
-                  <a:srgbClr val="0B0B0B"/>
-                </a:solidFill>
-                <a:latin typeface="Calibri"/>
-              </a:rPr>
-              <a:t>•  metrics are computed by code and cross-checked with TMscore</a:t>
-            </a:r>
-          </a:p>
-          <a:p>
-            <a:pPr algn="l">
-              <a:spcAft>
-                <a:spcPts val="1000"/>
-              </a:spcAft>
-            </a:pPr>
-            <a:r>
-              <a:rPr sz="1400" b="0">
-                <a:solidFill>
-                  <a:srgbClr val="0B0B0B"/>
-                </a:solidFill>
-                <a:latin typeface="Calibri"/>
-              </a:rPr>
-              <a:t>•  Claude may only use the numbers the tools return</a:t>
-            </a:r>
-          </a:p>
-        </p:txBody>
-      </p:sp>
-      <p:sp>
-        <p:nvSpPr>
-          <p:cNvPr id="13" name="Rectangle 12"/>
+            <a:r>
+              <a:rPr sz="1500" b="1">
+                <a:solidFill>
+                  <a:srgbClr val="2A78D6"/>
+                </a:solidFill>
+                <a:latin typeface="Calibri"/>
+              </a:rPr>
+              <a:t>Round 1</a:t>
+            </a:r>
+          </a:p>
+          <a:p>
+            <a:pPr algn="ctr"/>
+            <a:r>
+              <a:rPr sz="1150">
+                <a:solidFill>
+                  <a:srgbClr val="52514E"/>
+                </a:solidFill>
+                <a:latin typeface="Calibri"/>
+              </a:rPr>
+              <a:t>sequence vs PDB chains</a:t>
+            </a:r>
+          </a:p>
+        </p:txBody>
+      </p:sp>
+      <p:cxnSp>
+        <p:nvCxnSpPr>
+          <p:cNvPr id="10" name="Connector 9"/>
+          <p:cNvCxnSpPr/>
+          <p:nvPr/>
+        </p:nvCxnSpPr>
+        <p:spPr>
+          <a:xfrm>
+            <a:off x="2468880" y="3072384"/>
+            <a:ext cx="0" cy="182880"/>
+          </a:xfrm>
+          <a:prstGeom prst="line">
+            <a:avLst/>
+          </a:prstGeom>
+          <a:ln w="22225">
+            <a:solidFill>
+              <a:srgbClr val="52514E"/>
+            </a:solidFill>
+            <a:tailEnd type="triangle" w="med" len="med"/>
+          </a:ln>
+        </p:spPr>
+        <p:style>
+          <a:lnRef idx="2">
+            <a:schemeClr val="accent1"/>
+          </a:lnRef>
+          <a:fillRef idx="0">
+            <a:schemeClr val="accent1"/>
+          </a:fillRef>
+          <a:effectRef idx="1">
+            <a:schemeClr val="accent1"/>
+          </a:effectRef>
+          <a:fontRef idx="minor">
+            <a:schemeClr val="tx1"/>
+          </a:fontRef>
+        </p:style>
+      </p:cxnSp>
+      <p:sp>
+        <p:nvSpPr>
+          <p:cNvPr id="11" name="Rounded Rectangle 10"/>
           <p:cNvSpPr/>
           <p:nvPr/>
         </p:nvSpPr>
         <p:spPr>
           <a:xfrm>
-            <a:off x="8046719" y="1463040"/>
-            <a:ext cx="3566160" cy="73152"/>
-          </a:xfrm>
-          <a:prstGeom prst="rect">
-            <a:avLst/>
+            <a:off x="548640" y="3255264"/>
+            <a:ext cx="3840480" cy="713232"/>
+          </a:xfrm>
+          <a:prstGeom prst="roundRect">
+            <a:avLst>
+              <a:gd name="adj" fmla="val 8000"/>
+            </a:avLst>
           </a:prstGeom>
           <a:solidFill>
-            <a:srgbClr val="9A9A96"/>
+            <a:srgbClr val="FFFFFF"/>
           </a:solidFill>
-          <a:ln>
-            <a:noFill/>
+          <a:ln w="12700">
+            <a:solidFill>
+              <a:srgbClr val="E4E3DF"/>
+            </a:solidFill>
           </a:ln>
           <a:effectLst/>
         </p:spPr>
@@ -10874,23 +11638,915 @@
           </a:fontRef>
         </p:style>
         <p:txBody>
-          <a:bodyPr rtlCol="0" anchor="ctr"/>
+          <a:bodyPr rtlCol="0" anchor="ctr" wrap="square" lIns="109728" rIns="109728"/>
           <a:lstStyle/>
           <a:p>
             <a:pPr algn="ctr"/>
-          </a:p>
-        </p:txBody>
-      </p:sp>
-      <p:sp>
-        <p:nvSpPr>
-          <p:cNvPr id="14" name="TextBox 13"/>
+            <a:r>
+              <a:rPr sz="1500" b="1">
+                <a:solidFill>
+                  <a:srgbClr val="2A78D6"/>
+                </a:solidFill>
+                <a:latin typeface="Calibri"/>
+              </a:rPr>
+              <a:t>Profile HMM</a:t>
+            </a:r>
+          </a:p>
+          <a:p>
+            <a:pPr algn="ctr"/>
+            <a:r>
+              <a:rPr sz="1150">
+                <a:solidFill>
+                  <a:srgbClr val="52514E"/>
+                </a:solidFill>
+                <a:latin typeface="Calibri"/>
+              </a:rPr>
+              <a:t>from hits with E ≤ 1e-3</a:t>
+            </a:r>
+          </a:p>
+        </p:txBody>
+      </p:sp>
+      <p:cxnSp>
+        <p:nvCxnSpPr>
+          <p:cNvPr id="12" name="Connector 11"/>
+          <p:cNvCxnSpPr/>
+          <p:nvPr/>
+        </p:nvCxnSpPr>
+        <p:spPr>
+          <a:xfrm>
+            <a:off x="2468880" y="3968496"/>
+            <a:ext cx="0" cy="182880"/>
+          </a:xfrm>
+          <a:prstGeom prst="line">
+            <a:avLst/>
+          </a:prstGeom>
+          <a:ln w="22225">
+            <a:solidFill>
+              <a:srgbClr val="52514E"/>
+            </a:solidFill>
+            <a:tailEnd type="triangle" w="med" len="med"/>
+          </a:ln>
+        </p:spPr>
+        <p:style>
+          <a:lnRef idx="2">
+            <a:schemeClr val="accent1"/>
+          </a:lnRef>
+          <a:fillRef idx="0">
+            <a:schemeClr val="accent1"/>
+          </a:fillRef>
+          <a:effectRef idx="1">
+            <a:schemeClr val="accent1"/>
+          </a:effectRef>
+          <a:fontRef idx="minor">
+            <a:schemeClr val="tx1"/>
+          </a:fontRef>
+        </p:style>
+      </p:cxnSp>
+      <p:sp>
+        <p:nvSpPr>
+          <p:cNvPr id="13" name="Rounded Rectangle 12"/>
+          <p:cNvSpPr/>
+          <p:nvPr/>
+        </p:nvSpPr>
+        <p:spPr>
+          <a:xfrm>
+            <a:off x="548640" y="4151376"/>
+            <a:ext cx="3840480" cy="713232"/>
+          </a:xfrm>
+          <a:prstGeom prst="roundRect">
+            <a:avLst>
+              <a:gd name="adj" fmla="val 8000"/>
+            </a:avLst>
+          </a:prstGeom>
+          <a:solidFill>
+            <a:srgbClr val="FFFFFF"/>
+          </a:solidFill>
+          <a:ln w="12700">
+            <a:solidFill>
+              <a:srgbClr val="E4E3DF"/>
+            </a:solidFill>
+          </a:ln>
+          <a:effectLst/>
+        </p:spPr>
+        <p:style>
+          <a:lnRef idx="1">
+            <a:schemeClr val="accent1"/>
+          </a:lnRef>
+          <a:fillRef idx="3">
+            <a:schemeClr val="accent1"/>
+          </a:fillRef>
+          <a:effectRef idx="2">
+            <a:schemeClr val="accent1"/>
+          </a:effectRef>
+          <a:fontRef idx="minor">
+            <a:schemeClr val="lt1"/>
+          </a:fontRef>
+        </p:style>
+        <p:txBody>
+          <a:bodyPr rtlCol="0" anchor="ctr" wrap="square" lIns="109728" rIns="109728"/>
+          <a:lstStyle/>
+          <a:p>
+            <a:pPr algn="ctr"/>
+            <a:r>
+              <a:rPr sz="1500" b="1">
+                <a:solidFill>
+                  <a:srgbClr val="2A78D6"/>
+                </a:solidFill>
+                <a:latin typeface="Calibri"/>
+              </a:rPr>
+              <a:t>Rounds 2–3</a:t>
+            </a:r>
+          </a:p>
+          <a:p>
+            <a:pPr algn="ctr"/>
+            <a:r>
+              <a:rPr sz="1150">
+                <a:solidFill>
+                  <a:srgbClr val="52514E"/>
+                </a:solidFill>
+                <a:latin typeface="Calibri"/>
+              </a:rPr>
+              <a:t>profile vs PDB chains</a:t>
+            </a:r>
+          </a:p>
+        </p:txBody>
+      </p:sp>
+      <p:cxnSp>
+        <p:nvCxnSpPr>
+          <p:cNvPr id="14" name="Connector 13"/>
+          <p:cNvCxnSpPr/>
+          <p:nvPr/>
+        </p:nvCxnSpPr>
+        <p:spPr>
+          <a:xfrm>
+            <a:off x="2468880" y="4864608"/>
+            <a:ext cx="0" cy="182880"/>
+          </a:xfrm>
+          <a:prstGeom prst="line">
+            <a:avLst/>
+          </a:prstGeom>
+          <a:ln w="22225">
+            <a:solidFill>
+              <a:srgbClr val="52514E"/>
+            </a:solidFill>
+            <a:tailEnd type="triangle" w="med" len="med"/>
+          </a:ln>
+        </p:spPr>
+        <p:style>
+          <a:lnRef idx="2">
+            <a:schemeClr val="accent1"/>
+          </a:lnRef>
+          <a:fillRef idx="0">
+            <a:schemeClr val="accent1"/>
+          </a:fillRef>
+          <a:effectRef idx="1">
+            <a:schemeClr val="accent1"/>
+          </a:effectRef>
+          <a:fontRef idx="minor">
+            <a:schemeClr val="tx1"/>
+          </a:fontRef>
+        </p:style>
+      </p:cxnSp>
+      <p:sp>
+        <p:nvSpPr>
+          <p:cNvPr id="15" name="Rounded Rectangle 14"/>
+          <p:cNvSpPr/>
+          <p:nvPr/>
+        </p:nvSpPr>
+        <p:spPr>
+          <a:xfrm>
+            <a:off x="548640" y="5047488"/>
+            <a:ext cx="3840480" cy="713232"/>
+          </a:xfrm>
+          <a:prstGeom prst="roundRect">
+            <a:avLst>
+              <a:gd name="adj" fmla="val 8000"/>
+            </a:avLst>
+          </a:prstGeom>
+          <a:solidFill>
+            <a:srgbClr val="FFFFFF"/>
+          </a:solidFill>
+          <a:ln w="12700">
+            <a:solidFill>
+              <a:srgbClr val="E4E3DF"/>
+            </a:solidFill>
+          </a:ln>
+          <a:effectLst/>
+        </p:spPr>
+        <p:style>
+          <a:lnRef idx="1">
+            <a:schemeClr val="accent1"/>
+          </a:lnRef>
+          <a:fillRef idx="3">
+            <a:schemeClr val="accent1"/>
+          </a:fillRef>
+          <a:effectRef idx="2">
+            <a:schemeClr val="accent1"/>
+          </a:effectRef>
+          <a:fontRef idx="minor">
+            <a:schemeClr val="lt1"/>
+          </a:fontRef>
+        </p:style>
+        <p:txBody>
+          <a:bodyPr rtlCol="0" anchor="ctr" wrap="square" lIns="109728" rIns="109728"/>
+          <a:lstStyle/>
+          <a:p>
+            <a:pPr algn="ctr"/>
+            <a:r>
+              <a:rPr sz="1500" b="1">
+                <a:solidFill>
+                  <a:srgbClr val="2A78D6"/>
+                </a:solidFill>
+                <a:latin typeface="Calibri"/>
+              </a:rPr>
+              <a:t>Templates</a:t>
+            </a:r>
+          </a:p>
+          <a:p>
+            <a:pPr algn="ctr"/>
+            <a:r>
+              <a:rPr sz="1150">
+                <a:solidFill>
+                  <a:srgbClr val="52514E"/>
+                </a:solidFill>
+                <a:latin typeface="Calibri"/>
+              </a:rPr>
+              <a:t>ranked, leakage-filtered</a:t>
+            </a:r>
+          </a:p>
+        </p:txBody>
+      </p:sp>
+      <p:sp>
+        <p:nvSpPr>
+          <p:cNvPr id="16" name="TextBox 15"/>
           <p:cNvSpPr txBox="1"/>
           <p:nvPr/>
         </p:nvSpPr>
         <p:spPr>
           <a:xfrm>
-            <a:off x="8046719" y="1645920"/>
-            <a:ext cx="3566160" cy="457200"/>
+            <a:off x="4846320" y="1463040"/>
+            <a:ext cx="6766560" cy="2194560"/>
+          </a:xfrm>
+          <a:prstGeom prst="rect">
+            <a:avLst/>
+          </a:prstGeom>
+          <a:noFill/>
+        </p:spPr>
+        <p:txBody>
+          <a:bodyPr wrap="square" anchor="t" lIns="45720" rIns="45720" tIns="27432" bIns="27432">
+            <a:spAutoFit/>
+          </a:bodyPr>
+          <a:lstStyle/>
+          <a:p>
+            <a:pPr algn="l">
+              <a:spcAft>
+                <a:spcPts val="800"/>
+              </a:spcAft>
+            </a:pPr>
+            <a:r>
+              <a:rPr sz="1400" b="0">
+                <a:solidFill>
+                  <a:srgbClr val="0B0B0B"/>
+                </a:solidFill>
+                <a:latin typeface="Calibri"/>
+              </a:rPr>
+              <a:t>•  Database: all PDB chains released before 2022-05-01 (CASP15 season start); later entries cannot enter the profile or the template list.</a:t>
+            </a:r>
+          </a:p>
+          <a:p>
+            <a:pPr algn="l">
+              <a:spcAft>
+                <a:spcPts val="800"/>
+              </a:spcAft>
+            </a:pPr>
+            <a:r>
+              <a:rPr sz="1400" b="0">
+                <a:solidFill>
+                  <a:srgbClr val="0B0B0B"/>
+                </a:solidFill>
+                <a:latin typeface="Calibri"/>
+              </a:rPr>
+              <a:t>•  Alignment for MODELLER: target and template are both aligned to the final profile (hmmalign); residues in the same profile column are paired.</a:t>
+            </a:r>
+          </a:p>
+          <a:p>
+            <a:pPr algn="l">
+              <a:spcAft>
+                <a:spcPts val="800"/>
+              </a:spcAft>
+            </a:pPr>
+            <a:r>
+              <a:rPr sz="1400" b="0">
+                <a:solidFill>
+                  <a:srgbClr val="0B0B0B"/>
+                </a:solidFill>
+                <a:latin typeface="Calibri"/>
+              </a:rPr>
+              <a:t>•  Leakage filter, ranking and MODELLER settings are the same for Claude and the baseline.</a:t>
+            </a:r>
+          </a:p>
+        </p:txBody>
+      </p:sp>
+      <p:graphicFrame>
+        <p:nvGraphicFramePr>
+          <p:cNvPr id="17" name="Table 16"/>
+          <p:cNvGraphicFramePr>
+            <a:graphicFrameLocks noGrp="1"/>
+          </p:cNvGraphicFramePr>
+          <p:nvPr/>
+        </p:nvGraphicFramePr>
+        <p:xfrm>
+          <a:off x="4846320" y="3886200"/>
+          <a:ext cx="6766560" cy="1755648"/>
+        </p:xfrm>
+        <a:graphic>
+          <a:graphicData uri="http://schemas.openxmlformats.org/drawingml/2006/table">
+            <a:tbl>
+              <a:tblPr firstRow="1" bandRow="1">
+                <a:tableStyleId>{5C22544A-7EE6-4342-B048-85BDC9FD1C3A}</a:tableStyleId>
+              </a:tblPr>
+              <a:tblGrid>
+                <a:gridCol w="1097280"/>
+                <a:gridCol w="1143000"/>
+                <a:gridCol w="822960"/>
+                <a:gridCol w="1508760"/>
+                <a:gridCol w="1097280"/>
+                <a:gridCol w="1097280"/>
+              </a:tblGrid>
+              <a:tr h="438912">
+                <a:tc>
+                  <a:txBody>
+                    <a:bodyPr wrap="square"/>
+                    <a:lstStyle/>
+                    <a:p>
+                      <a:pPr algn="l"/>
+                      <a:r>
+                        <a:rPr sz="1300" b="1">
+                          <a:solidFill>
+                            <a:srgbClr val="FFFFFF"/>
+                          </a:solidFill>
+                          <a:latin typeface="Calibri"/>
+                        </a:rPr>
+                        <a:t>Target</a:t>
+                      </a:r>
+                    </a:p>
+                  </a:txBody>
+                  <a:tcPr marL="73152" marR="73152" marT="27432" marB="27432" anchor="ctr">
+                    <a:solidFill>
+                      <a:srgbClr val="0B0B0B"/>
+                    </a:solidFill>
+                  </a:tcPr>
+                </a:tc>
+                <a:tc>
+                  <a:txBody>
+                    <a:bodyPr wrap="square"/>
+                    <a:lstStyle/>
+                    <a:p>
+                      <a:pPr algn="ctr"/>
+                      <a:r>
+                        <a:rPr sz="1300" b="1">
+                          <a:solidFill>
+                            <a:srgbClr val="FFFFFF"/>
+                          </a:solidFill>
+                          <a:latin typeface="Calibri"/>
+                        </a:rPr>
+                        <a:t>Rounds</a:t>
+                      </a:r>
+                    </a:p>
+                  </a:txBody>
+                  <a:tcPr marL="73152" marR="73152" marT="27432" marB="27432" anchor="ctr">
+                    <a:solidFill>
+                      <a:srgbClr val="0B0B0B"/>
+                    </a:solidFill>
+                  </a:tcPr>
+                </a:tc>
+                <a:tc>
+                  <a:txBody>
+                    <a:bodyPr wrap="square"/>
+                    <a:lstStyle/>
+                    <a:p>
+                      <a:pPr algn="ctr"/>
+                      <a:r>
+                        <a:rPr sz="1300" b="1">
+                          <a:solidFill>
+                            <a:srgbClr val="FFFFFF"/>
+                          </a:solidFill>
+                          <a:latin typeface="Calibri"/>
+                        </a:rPr>
+                        <a:t>Hits</a:t>
+                      </a:r>
+                    </a:p>
+                  </a:txBody>
+                  <a:tcPr marL="73152" marR="73152" marT="27432" marB="27432" anchor="ctr">
+                    <a:solidFill>
+                      <a:srgbClr val="0B0B0B"/>
+                    </a:solidFill>
+                  </a:tcPr>
+                </a:tc>
+                <a:tc>
+                  <a:txBody>
+                    <a:bodyPr wrap="square"/>
+                    <a:lstStyle/>
+                    <a:p>
+                      <a:pPr algn="ctr"/>
+                      <a:r>
+                        <a:rPr sz="1300" b="1">
+                          <a:solidFill>
+                            <a:srgbClr val="FFFFFF"/>
+                          </a:solidFill>
+                          <a:latin typeface="Calibri"/>
+                        </a:rPr>
+                        <a:t>Kept template</a:t>
+                      </a:r>
+                    </a:p>
+                  </a:txBody>
+                  <a:tcPr marL="73152" marR="73152" marT="27432" marB="27432" anchor="ctr">
+                    <a:solidFill>
+                      <a:srgbClr val="0B0B0B"/>
+                    </a:solidFill>
+                  </a:tcPr>
+                </a:tc>
+                <a:tc>
+                  <a:txBody>
+                    <a:bodyPr wrap="square"/>
+                    <a:lstStyle/>
+                    <a:p>
+                      <a:pPr algn="ctr"/>
+                      <a:r>
+                        <a:rPr sz="1300" b="1">
+                          <a:solidFill>
+                            <a:srgbClr val="FFFFFF"/>
+                          </a:solidFill>
+                          <a:latin typeface="Calibri"/>
+                        </a:rPr>
+                        <a:t>E-value</a:t>
+                      </a:r>
+                    </a:p>
+                  </a:txBody>
+                  <a:tcPr marL="73152" marR="73152" marT="27432" marB="27432" anchor="ctr">
+                    <a:solidFill>
+                      <a:srgbClr val="0B0B0B"/>
+                    </a:solidFill>
+                  </a:tcPr>
+                </a:tc>
+                <a:tc>
+                  <a:txBody>
+                    <a:bodyPr wrap="square"/>
+                    <a:lstStyle/>
+                    <a:p>
+                      <a:pPr algn="ctr"/>
+                      <a:r>
+                        <a:rPr sz="1300" b="1">
+                          <a:solidFill>
+                            <a:srgbClr val="FFFFFF"/>
+                          </a:solidFill>
+                          <a:latin typeface="Calibri"/>
+                        </a:rPr>
+                        <a:t>Identity</a:t>
+                      </a:r>
+                    </a:p>
+                  </a:txBody>
+                  <a:tcPr marL="73152" marR="73152" marT="27432" marB="27432" anchor="ctr">
+                    <a:solidFill>
+                      <a:srgbClr val="0B0B0B"/>
+                    </a:solidFill>
+                  </a:tcPr>
+                </a:tc>
+              </a:tr>
+              <a:tr h="438912">
+                <a:tc>
+                  <a:txBody>
+                    <a:bodyPr wrap="square"/>
+                    <a:lstStyle/>
+                    <a:p>
+                      <a:pPr algn="l"/>
+                      <a:r>
+                        <a:rPr sz="1300" b="0">
+                          <a:solidFill>
+                            <a:srgbClr val="0B0B0B"/>
+                          </a:solidFill>
+                          <a:latin typeface="Calibri"/>
+                        </a:rPr>
+                        <a:t>T1124</a:t>
+                      </a:r>
+                    </a:p>
+                  </a:txBody>
+                  <a:tcPr marL="73152" marR="73152" marT="27432" marB="27432" anchor="ctr">
+                    <a:solidFill>
+                      <a:srgbClr val="FFFFFF"/>
+                    </a:solidFill>
+                  </a:tcPr>
+                </a:tc>
+                <a:tc>
+                  <a:txBody>
+                    <a:bodyPr wrap="square"/>
+                    <a:lstStyle/>
+                    <a:p>
+                      <a:pPr algn="ctr"/>
+                      <a:r>
+                        <a:rPr sz="1300" b="0">
+                          <a:solidFill>
+                            <a:srgbClr val="0B0B0B"/>
+                          </a:solidFill>
+                          <a:latin typeface="Calibri"/>
+                        </a:rPr>
+                        <a:t>3</a:t>
+                      </a:r>
+                    </a:p>
+                  </a:txBody>
+                  <a:tcPr marL="73152" marR="73152" marT="27432" marB="27432" anchor="ctr">
+                    <a:solidFill>
+                      <a:srgbClr val="FFFFFF"/>
+                    </a:solidFill>
+                  </a:tcPr>
+                </a:tc>
+                <a:tc>
+                  <a:txBody>
+                    <a:bodyPr wrap="square"/>
+                    <a:lstStyle/>
+                    <a:p>
+                      <a:pPr algn="ctr"/>
+                      <a:r>
+                        <a:rPr sz="1300" b="0">
+                          <a:solidFill>
+                            <a:srgbClr val="0B0B0B"/>
+                          </a:solidFill>
+                          <a:latin typeface="Calibri"/>
+                        </a:rPr>
+                        <a:t>250</a:t>
+                      </a:r>
+                    </a:p>
+                  </a:txBody>
+                  <a:tcPr marL="73152" marR="73152" marT="27432" marB="27432" anchor="ctr">
+                    <a:solidFill>
+                      <a:srgbClr val="FFFFFF"/>
+                    </a:solidFill>
+                  </a:tcPr>
+                </a:tc>
+                <a:tc>
+                  <a:txBody>
+                    <a:bodyPr wrap="square"/>
+                    <a:lstStyle/>
+                    <a:p>
+                      <a:pPr algn="ctr"/>
+                      <a:r>
+                        <a:rPr sz="1300" b="0">
+                          <a:solidFill>
+                            <a:srgbClr val="0B0B0B"/>
+                          </a:solidFill>
+                          <a:latin typeface="Calibri"/>
+                        </a:rPr>
+                        <a:t>5I2H:A</a:t>
+                      </a:r>
+                    </a:p>
+                  </a:txBody>
+                  <a:tcPr marL="73152" marR="73152" marT="27432" marB="27432" anchor="ctr">
+                    <a:solidFill>
+                      <a:srgbClr val="FFFFFF"/>
+                    </a:solidFill>
+                  </a:tcPr>
+                </a:tc>
+                <a:tc>
+                  <a:txBody>
+                    <a:bodyPr wrap="square"/>
+                    <a:lstStyle/>
+                    <a:p>
+                      <a:pPr algn="ctr"/>
+                      <a:r>
+                        <a:rPr sz="1300" b="0">
+                          <a:solidFill>
+                            <a:srgbClr val="0B0B0B"/>
+                          </a:solidFill>
+                          <a:latin typeface="Calibri"/>
+                        </a:rPr>
+                        <a:t>1e-68</a:t>
+                      </a:r>
+                    </a:p>
+                  </a:txBody>
+                  <a:tcPr marL="73152" marR="73152" marT="27432" marB="27432" anchor="ctr">
+                    <a:solidFill>
+                      <a:srgbClr val="FFFFFF"/>
+                    </a:solidFill>
+                  </a:tcPr>
+                </a:tc>
+                <a:tc>
+                  <a:txBody>
+                    <a:bodyPr wrap="square"/>
+                    <a:lstStyle/>
+                    <a:p>
+                      <a:pPr algn="ctr"/>
+                      <a:r>
+                        <a:rPr sz="1300" b="0">
+                          <a:solidFill>
+                            <a:srgbClr val="0B0B0B"/>
+                          </a:solidFill>
+                          <a:latin typeface="Calibri"/>
+                        </a:rPr>
+                        <a:t>28%</a:t>
+                      </a:r>
+                    </a:p>
+                  </a:txBody>
+                  <a:tcPr marL="73152" marR="73152" marT="27432" marB="27432" anchor="ctr">
+                    <a:solidFill>
+                      <a:srgbClr val="FFFFFF"/>
+                    </a:solidFill>
+                  </a:tcPr>
+                </a:tc>
+              </a:tr>
+              <a:tr h="438912">
+                <a:tc>
+                  <a:txBody>
+                    <a:bodyPr wrap="square"/>
+                    <a:lstStyle/>
+                    <a:p>
+                      <a:pPr algn="l"/>
+                      <a:r>
+                        <a:rPr sz="1300" b="0">
+                          <a:solidFill>
+                            <a:srgbClr val="0B0B0B"/>
+                          </a:solidFill>
+                          <a:latin typeface="Calibri"/>
+                        </a:rPr>
+                        <a:t>T1127</a:t>
+                      </a:r>
+                    </a:p>
+                  </a:txBody>
+                  <a:tcPr marL="73152" marR="73152" marT="27432" marB="27432" anchor="ctr">
+                    <a:solidFill>
+                      <a:srgbClr val="F5F4F1"/>
+                    </a:solidFill>
+                  </a:tcPr>
+                </a:tc>
+                <a:tc>
+                  <a:txBody>
+                    <a:bodyPr wrap="square"/>
+                    <a:lstStyle/>
+                    <a:p>
+                      <a:pPr algn="ctr"/>
+                      <a:r>
+                        <a:rPr sz="1300" b="0">
+                          <a:solidFill>
+                            <a:srgbClr val="0B0B0B"/>
+                          </a:solidFill>
+                          <a:latin typeface="Calibri"/>
+                        </a:rPr>
+                        <a:t>3</a:t>
+                      </a:r>
+                    </a:p>
+                  </a:txBody>
+                  <a:tcPr marL="73152" marR="73152" marT="27432" marB="27432" anchor="ctr">
+                    <a:solidFill>
+                      <a:srgbClr val="F5F4F1"/>
+                    </a:solidFill>
+                  </a:tcPr>
+                </a:tc>
+                <a:tc>
+                  <a:txBody>
+                    <a:bodyPr wrap="square"/>
+                    <a:lstStyle/>
+                    <a:p>
+                      <a:pPr algn="ctr"/>
+                      <a:r>
+                        <a:rPr sz="1300" b="0">
+                          <a:solidFill>
+                            <a:srgbClr val="0B0B0B"/>
+                          </a:solidFill>
+                          <a:latin typeface="Calibri"/>
+                        </a:rPr>
+                        <a:t>250</a:t>
+                      </a:r>
+                    </a:p>
+                  </a:txBody>
+                  <a:tcPr marL="73152" marR="73152" marT="27432" marB="27432" anchor="ctr">
+                    <a:solidFill>
+                      <a:srgbClr val="F5F4F1"/>
+                    </a:solidFill>
+                  </a:tcPr>
+                </a:tc>
+                <a:tc>
+                  <a:txBody>
+                    <a:bodyPr wrap="square"/>
+                    <a:lstStyle/>
+                    <a:p>
+                      <a:pPr algn="ctr"/>
+                      <a:r>
+                        <a:rPr sz="1300" b="0">
+                          <a:solidFill>
+                            <a:srgbClr val="0B0B0B"/>
+                          </a:solidFill>
+                          <a:latin typeface="Calibri"/>
+                        </a:rPr>
+                        <a:t>2FE7:B</a:t>
+                      </a:r>
+                    </a:p>
+                  </a:txBody>
+                  <a:tcPr marL="73152" marR="73152" marT="27432" marB="27432" anchor="ctr">
+                    <a:solidFill>
+                      <a:srgbClr val="F5F4F1"/>
+                    </a:solidFill>
+                  </a:tcPr>
+                </a:tc>
+                <a:tc>
+                  <a:txBody>
+                    <a:bodyPr wrap="square"/>
+                    <a:lstStyle/>
+                    <a:p>
+                      <a:pPr algn="ctr"/>
+                      <a:r>
+                        <a:rPr sz="1300" b="0">
+                          <a:solidFill>
+                            <a:srgbClr val="0B0B0B"/>
+                          </a:solidFill>
+                          <a:latin typeface="Calibri"/>
+                        </a:rPr>
+                        <a:t>3e-47</a:t>
+                      </a:r>
+                    </a:p>
+                  </a:txBody>
+                  <a:tcPr marL="73152" marR="73152" marT="27432" marB="27432" anchor="ctr">
+                    <a:solidFill>
+                      <a:srgbClr val="F5F4F1"/>
+                    </a:solidFill>
+                  </a:tcPr>
+                </a:tc>
+                <a:tc>
+                  <a:txBody>
+                    <a:bodyPr wrap="square"/>
+                    <a:lstStyle/>
+                    <a:p>
+                      <a:pPr algn="ctr"/>
+                      <a:r>
+                        <a:rPr sz="1300" b="0">
+                          <a:solidFill>
+                            <a:srgbClr val="0B0B0B"/>
+                          </a:solidFill>
+                          <a:latin typeface="Calibri"/>
+                        </a:rPr>
+                        <a:t>40%</a:t>
+                      </a:r>
+                    </a:p>
+                  </a:txBody>
+                  <a:tcPr marL="73152" marR="73152" marT="27432" marB="27432" anchor="ctr">
+                    <a:solidFill>
+                      <a:srgbClr val="F5F4F1"/>
+                    </a:solidFill>
+                  </a:tcPr>
+                </a:tc>
+              </a:tr>
+              <a:tr h="438912">
+                <a:tc>
+                  <a:txBody>
+                    <a:bodyPr wrap="square"/>
+                    <a:lstStyle/>
+                    <a:p>
+                      <a:pPr algn="l"/>
+                      <a:r>
+                        <a:rPr sz="1300" b="0">
+                          <a:solidFill>
+                            <a:srgbClr val="0B0B0B"/>
+                          </a:solidFill>
+                          <a:latin typeface="Calibri"/>
+                        </a:rPr>
+                        <a:t>T1151s2</a:t>
+                      </a:r>
+                    </a:p>
+                  </a:txBody>
+                  <a:tcPr marL="73152" marR="73152" marT="27432" marB="27432" anchor="ctr">
+                    <a:solidFill>
+                      <a:srgbClr val="FFFFFF"/>
+                    </a:solidFill>
+                  </a:tcPr>
+                </a:tc>
+                <a:tc>
+                  <a:txBody>
+                    <a:bodyPr wrap="square"/>
+                    <a:lstStyle/>
+                    <a:p>
+                      <a:pPr algn="ctr"/>
+                      <a:r>
+                        <a:rPr sz="1300" b="0">
+                          <a:solidFill>
+                            <a:srgbClr val="0B0B0B"/>
+                          </a:solidFill>
+                          <a:latin typeface="Calibri"/>
+                        </a:rPr>
+                        <a:t>3 (conv.)</a:t>
+                      </a:r>
+                    </a:p>
+                  </a:txBody>
+                  <a:tcPr marL="73152" marR="73152" marT="27432" marB="27432" anchor="ctr">
+                    <a:solidFill>
+                      <a:srgbClr val="FFFFFF"/>
+                    </a:solidFill>
+                  </a:tcPr>
+                </a:tc>
+                <a:tc>
+                  <a:txBody>
+                    <a:bodyPr wrap="square"/>
+                    <a:lstStyle/>
+                    <a:p>
+                      <a:pPr algn="ctr"/>
+                      <a:r>
+                        <a:rPr sz="1300" b="0">
+                          <a:solidFill>
+                            <a:srgbClr val="0B0B0B"/>
+                          </a:solidFill>
+                          <a:latin typeface="Calibri"/>
+                        </a:rPr>
+                        <a:t>8</a:t>
+                      </a:r>
+                    </a:p>
+                  </a:txBody>
+                  <a:tcPr marL="73152" marR="73152" marT="27432" marB="27432" anchor="ctr">
+                    <a:solidFill>
+                      <a:srgbClr val="FFFFFF"/>
+                    </a:solidFill>
+                  </a:tcPr>
+                </a:tc>
+                <a:tc>
+                  <a:txBody>
+                    <a:bodyPr wrap="square"/>
+                    <a:lstStyle/>
+                    <a:p>
+                      <a:pPr algn="ctr"/>
+                      <a:r>
+                        <a:rPr sz="1300" b="0">
+                          <a:solidFill>
+                            <a:srgbClr val="0B0B0B"/>
+                          </a:solidFill>
+                          <a:latin typeface="Calibri"/>
+                        </a:rPr>
+                        <a:t>7KUG:A</a:t>
+                      </a:r>
+                    </a:p>
+                  </a:txBody>
+                  <a:tcPr marL="73152" marR="73152" marT="27432" marB="27432" anchor="ctr">
+                    <a:solidFill>
+                      <a:srgbClr val="FFFFFF"/>
+                    </a:solidFill>
+                  </a:tcPr>
+                </a:tc>
+                <a:tc>
+                  <a:txBody>
+                    <a:bodyPr wrap="square"/>
+                    <a:lstStyle/>
+                    <a:p>
+                      <a:pPr algn="ctr"/>
+                      <a:r>
+                        <a:rPr sz="1300" b="0">
+                          <a:solidFill>
+                            <a:srgbClr val="0B0B0B"/>
+                          </a:solidFill>
+                          <a:latin typeface="Calibri"/>
+                        </a:rPr>
+                        <a:t>1e-22</a:t>
+                      </a:r>
+                    </a:p>
+                  </a:txBody>
+                  <a:tcPr marL="73152" marR="73152" marT="27432" marB="27432" anchor="ctr">
+                    <a:solidFill>
+                      <a:srgbClr val="FFFFFF"/>
+                    </a:solidFill>
+                  </a:tcPr>
+                </a:tc>
+                <a:tc>
+                  <a:txBody>
+                    <a:bodyPr wrap="square"/>
+                    <a:lstStyle/>
+                    <a:p>
+                      <a:pPr algn="ctr"/>
+                      <a:r>
+                        <a:rPr sz="1300" b="0">
+                          <a:solidFill>
+                            <a:srgbClr val="0B0B0B"/>
+                          </a:solidFill>
+                          <a:latin typeface="Calibri"/>
+                        </a:rPr>
+                        <a:t>36%</a:t>
+                      </a:r>
+                    </a:p>
+                  </a:txBody>
+                  <a:tcPr marL="73152" marR="73152" marT="27432" marB="27432" anchor="ctr">
+                    <a:solidFill>
+                      <a:srgbClr val="FFFFFF"/>
+                    </a:solidFill>
+                  </a:tcPr>
+                </a:tc>
+              </a:tr>
+            </a:tbl>
+          </a:graphicData>
+        </a:graphic>
+      </p:graphicFrame>
+      <p:sp>
+        <p:nvSpPr>
+          <p:cNvPr id="18" name="TextBox 17"/>
+          <p:cNvSpPr txBox="1"/>
+          <p:nvPr/>
+        </p:nvSpPr>
+        <p:spPr>
+          <a:xfrm>
+            <a:off x="4846320" y="5715000"/>
+            <a:ext cx="6766560" cy="365760"/>
           </a:xfrm>
           <a:prstGeom prst="rect">
             <a:avLst/>
@@ -10909,100 +12565,13 @@
               </a:spcAft>
             </a:pPr>
             <a:r>
-              <a:rPr sz="1800" b="1">
-                <a:solidFill>
-                  <a:srgbClr val="9A9A96"/>
-                </a:solidFill>
-                <a:latin typeface="Calibri"/>
-              </a:rPr>
-              <a:t>Baseline (no AI)</a:t>
-            </a:r>
-          </a:p>
-        </p:txBody>
-      </p:sp>
-      <p:sp>
-        <p:nvSpPr>
-          <p:cNvPr id="15" name="TextBox 14"/>
-          <p:cNvSpPr txBox="1"/>
-          <p:nvPr/>
-        </p:nvSpPr>
-        <p:spPr>
-          <a:xfrm>
-            <a:off x="8046719" y="2148840"/>
-            <a:ext cx="3566160" cy="3840480"/>
-          </a:xfrm>
-          <a:prstGeom prst="rect">
-            <a:avLst/>
-          </a:prstGeom>
-          <a:noFill/>
-        </p:spPr>
-        <p:txBody>
-          <a:bodyPr wrap="square" anchor="t" lIns="45720" rIns="45720" tIns="27432" bIns="27432">
-            <a:spAutoFit/>
-          </a:bodyPr>
-          <a:lstStyle/>
-          <a:p>
-            <a:pPr algn="l">
-              <a:spcAft>
-                <a:spcPts val="1000"/>
-              </a:spcAft>
-            </a:pPr>
-            <a:r>
-              <a:rPr sz="1400" b="0">
-                <a:solidFill>
-                  <a:srgbClr val="0B0B0B"/>
-                </a:solidFill>
-                <a:latin typeface="Calibri"/>
-              </a:rPr>
-              <a:t>•  same search and MODELLER</a:t>
-            </a:r>
-          </a:p>
-          <a:p>
-            <a:pPr algn="l">
-              <a:spcAft>
-                <a:spcPts val="1000"/>
-              </a:spcAft>
-            </a:pPr>
-            <a:r>
-              <a:rPr sz="1400" b="0">
-                <a:solidFill>
-                  <a:srgbClr val="0B0B0B"/>
-                </a:solidFill>
-                <a:latin typeface="Calibri"/>
-              </a:rPr>
-              <a:t>•  top-ranked template by a fixed score (identity, coverage, E-value, resolution, completeness)</a:t>
-            </a:r>
-          </a:p>
-          <a:p>
-            <a:pPr algn="l">
-              <a:spcAft>
-                <a:spcPts val="1000"/>
-              </a:spcAft>
-            </a:pPr>
-            <a:r>
-              <a:rPr sz="1400" b="0">
-                <a:solidFill>
-                  <a:srgbClr val="0B0B0B"/>
-                </a:solidFill>
-                <a:latin typeface="Calibri"/>
-              </a:rPr>
-              <a:t>•  lowest-DOPE model</a:t>
-            </a:r>
-          </a:p>
-          <a:p>
-            <a:pPr algn="l">
-              <a:spcAft>
-                <a:spcPts val="1000"/>
-              </a:spcAft>
-            </a:pPr>
-            <a:r>
-              <a:rPr sz="1400" b="0">
-                <a:solidFill>
-                  <a:srgbClr val="0B0B0B"/>
-                </a:solidFill>
-                <a:latin typeface="Calibri"/>
-              </a:rPr>
-              <a:t>•  stops if the default RCSB search finds no eligible template</a:t>
+              <a:rPr sz="1100" b="0">
+                <a:solidFill>
+                  <a:srgbClr val="52514E"/>
+                </a:solidFill>
+                <a:latin typeface="Calibri"/>
+              </a:rPr>
+              <a:t>Identity over the profile alignment to the target.</a:t>
             </a:r>
           </a:p>
         </p:txBody>
@@ -11059,7 +12628,7 @@
                 </a:solidFill>
                 <a:latin typeface="Calibri"/>
               </a:rPr>
-              <a:t>RESULTS</a:t>
+              <a:t>METHOD</a:t>
             </a:r>
           </a:p>
         </p:txBody>
@@ -11098,7 +12667,7 @@
                 </a:solidFill>
                 <a:latin typeface="Calibri"/>
               </a:rPr>
-              <a:t>Agent 1: template decisions</a:t>
+              <a:t>What Claude decides, and what the code enforces</a:t>
             </a:r>
           </a:p>
         </p:txBody>
@@ -11216,6 +12785,741 @@
           </a:p>
         </p:txBody>
       </p:sp>
+      <p:sp>
+        <p:nvSpPr>
+          <p:cNvPr id="7" name="Rectangle 6"/>
+          <p:cNvSpPr/>
+          <p:nvPr/>
+        </p:nvSpPr>
+        <p:spPr>
+          <a:xfrm>
+            <a:off x="548640" y="1463040"/>
+            <a:ext cx="3566160" cy="73152"/>
+          </a:xfrm>
+          <a:prstGeom prst="rect">
+            <a:avLst/>
+          </a:prstGeom>
+          <a:solidFill>
+            <a:srgbClr val="2A78D6"/>
+          </a:solidFill>
+          <a:ln>
+            <a:noFill/>
+          </a:ln>
+          <a:effectLst/>
+        </p:spPr>
+        <p:style>
+          <a:lnRef idx="1">
+            <a:schemeClr val="accent1"/>
+          </a:lnRef>
+          <a:fillRef idx="3">
+            <a:schemeClr val="accent1"/>
+          </a:fillRef>
+          <a:effectRef idx="2">
+            <a:schemeClr val="accent1"/>
+          </a:effectRef>
+          <a:fontRef idx="minor">
+            <a:schemeClr val="lt1"/>
+          </a:fontRef>
+        </p:style>
+        <p:txBody>
+          <a:bodyPr rtlCol="0" anchor="ctr"/>
+          <a:lstStyle/>
+          <a:p>
+            <a:pPr algn="ctr"/>
+          </a:p>
+        </p:txBody>
+      </p:sp>
+      <p:sp>
+        <p:nvSpPr>
+          <p:cNvPr id="8" name="TextBox 7"/>
+          <p:cNvSpPr txBox="1"/>
+          <p:nvPr/>
+        </p:nvSpPr>
+        <p:spPr>
+          <a:xfrm>
+            <a:off x="548640" y="1645920"/>
+            <a:ext cx="3566160" cy="457200"/>
+          </a:xfrm>
+          <a:prstGeom prst="rect">
+            <a:avLst/>
+          </a:prstGeom>
+          <a:noFill/>
+        </p:spPr>
+        <p:txBody>
+          <a:bodyPr wrap="square" anchor="t" lIns="45720" rIns="45720" tIns="27432" bIns="27432">
+            <a:spAutoFit/>
+          </a:bodyPr>
+          <a:lstStyle/>
+          <a:p>
+            <a:pPr algn="l">
+              <a:spcAft>
+                <a:spcPts val="600"/>
+              </a:spcAft>
+            </a:pPr>
+            <a:r>
+              <a:rPr sz="1800" b="1">
+                <a:solidFill>
+                  <a:srgbClr val="2A78D6"/>
+                </a:solidFill>
+                <a:latin typeface="Calibri"/>
+              </a:rPr>
+              <a:t>Claude decides</a:t>
+            </a:r>
+          </a:p>
+        </p:txBody>
+      </p:sp>
+      <p:sp>
+        <p:nvSpPr>
+          <p:cNvPr id="9" name="TextBox 8"/>
+          <p:cNvSpPr txBox="1"/>
+          <p:nvPr/>
+        </p:nvSpPr>
+        <p:spPr>
+          <a:xfrm>
+            <a:off x="548640" y="2148840"/>
+            <a:ext cx="3566160" cy="3840480"/>
+          </a:xfrm>
+          <a:prstGeom prst="rect">
+            <a:avLst/>
+          </a:prstGeom>
+          <a:noFill/>
+        </p:spPr>
+        <p:txBody>
+          <a:bodyPr wrap="square" anchor="t" lIns="45720" rIns="45720" tIns="27432" bIns="27432">
+            <a:spAutoFit/>
+          </a:bodyPr>
+          <a:lstStyle/>
+          <a:p>
+            <a:pPr algn="l">
+              <a:spcAft>
+                <a:spcPts val="1000"/>
+              </a:spcAft>
+            </a:pPr>
+            <a:r>
+              <a:rPr sz="1400" b="0">
+                <a:solidFill>
+                  <a:srgbClr val="0B0B0B"/>
+                </a:solidFill>
+                <a:latin typeface="Calibri"/>
+              </a:rPr>
+              <a:t>•  search settings: profile rounds and inclusion E-value</a:t>
+            </a:r>
+          </a:p>
+          <a:p>
+            <a:pPr algn="l">
+              <a:spcAft>
+                <a:spcPts val="1000"/>
+              </a:spcAft>
+            </a:pPr>
+            <a:r>
+              <a:rPr sz="1400" b="0">
+                <a:solidFill>
+                  <a:srgbClr val="0B0B0B"/>
+                </a:solidFill>
+                <a:latin typeface="Calibri"/>
+              </a:rPr>
+              <a:t>•  which candidate templates to build (up to 4)</a:t>
+            </a:r>
+          </a:p>
+          <a:p>
+            <a:pPr algn="l">
+              <a:spcAft>
+                <a:spcPts val="1000"/>
+              </a:spcAft>
+            </a:pPr>
+            <a:r>
+              <a:rPr sz="1400" b="0">
+                <a:solidFill>
+                  <a:srgbClr val="0B0B0B"/>
+                </a:solidFill>
+                <a:latin typeface="Calibri"/>
+              </a:rPr>
+              <a:t>•  which build and model to keep, or no template at all</a:t>
+            </a:r>
+          </a:p>
+          <a:p>
+            <a:pPr algn="l">
+              <a:spcAft>
+                <a:spcPts val="1000"/>
+              </a:spcAft>
+            </a:pPr>
+            <a:r>
+              <a:rPr sz="1400" b="0">
+                <a:solidFill>
+                  <a:srgbClr val="0B0B0B"/>
+                </a:solidFill>
+                <a:latin typeface="Calibri"/>
+              </a:rPr>
+              <a:t>•  Agent 2: which errors to inspect and how to explain them</a:t>
+            </a:r>
+          </a:p>
+          <a:p>
+            <a:pPr algn="l">
+              <a:spcAft>
+                <a:spcPts val="1000"/>
+              </a:spcAft>
+            </a:pPr>
+            <a:r>
+              <a:rPr sz="1400" b="0">
+                <a:solidFill>
+                  <a:srgbClr val="0B0B0B"/>
+                </a:solidFill>
+                <a:latin typeface="Calibri"/>
+              </a:rPr>
+              <a:t>•  the draft interpretation of the whole comparison</a:t>
+            </a:r>
+          </a:p>
+        </p:txBody>
+      </p:sp>
+      <p:sp>
+        <p:nvSpPr>
+          <p:cNvPr id="10" name="Rectangle 9"/>
+          <p:cNvSpPr/>
+          <p:nvPr/>
+        </p:nvSpPr>
+        <p:spPr>
+          <a:xfrm>
+            <a:off x="4297679" y="1463040"/>
+            <a:ext cx="3566160" cy="73152"/>
+          </a:xfrm>
+          <a:prstGeom prst="rect">
+            <a:avLst/>
+          </a:prstGeom>
+          <a:solidFill>
+            <a:srgbClr val="0B0B0B"/>
+          </a:solidFill>
+          <a:ln>
+            <a:noFill/>
+          </a:ln>
+          <a:effectLst/>
+        </p:spPr>
+        <p:style>
+          <a:lnRef idx="1">
+            <a:schemeClr val="accent1"/>
+          </a:lnRef>
+          <a:fillRef idx="3">
+            <a:schemeClr val="accent1"/>
+          </a:fillRef>
+          <a:effectRef idx="2">
+            <a:schemeClr val="accent1"/>
+          </a:effectRef>
+          <a:fontRef idx="minor">
+            <a:schemeClr val="lt1"/>
+          </a:fontRef>
+        </p:style>
+        <p:txBody>
+          <a:bodyPr rtlCol="0" anchor="ctr"/>
+          <a:lstStyle/>
+          <a:p>
+            <a:pPr algn="ctr"/>
+          </a:p>
+        </p:txBody>
+      </p:sp>
+      <p:sp>
+        <p:nvSpPr>
+          <p:cNvPr id="11" name="TextBox 10"/>
+          <p:cNvSpPr txBox="1"/>
+          <p:nvPr/>
+        </p:nvSpPr>
+        <p:spPr>
+          <a:xfrm>
+            <a:off x="4297679" y="1645920"/>
+            <a:ext cx="3566160" cy="457200"/>
+          </a:xfrm>
+          <a:prstGeom prst="rect">
+            <a:avLst/>
+          </a:prstGeom>
+          <a:noFill/>
+        </p:spPr>
+        <p:txBody>
+          <a:bodyPr wrap="square" anchor="t" lIns="45720" rIns="45720" tIns="27432" bIns="27432">
+            <a:spAutoFit/>
+          </a:bodyPr>
+          <a:lstStyle/>
+          <a:p>
+            <a:pPr algn="l">
+              <a:spcAft>
+                <a:spcPts val="600"/>
+              </a:spcAft>
+            </a:pPr>
+            <a:r>
+              <a:rPr sz="1800" b="1">
+                <a:solidFill>
+                  <a:srgbClr val="0B0B0B"/>
+                </a:solidFill>
+                <a:latin typeface="Calibri"/>
+              </a:rPr>
+              <a:t>Code enforces</a:t>
+            </a:r>
+          </a:p>
+        </p:txBody>
+      </p:sp>
+      <p:sp>
+        <p:nvSpPr>
+          <p:cNvPr id="12" name="TextBox 11"/>
+          <p:cNvSpPr txBox="1"/>
+          <p:nvPr/>
+        </p:nvSpPr>
+        <p:spPr>
+          <a:xfrm>
+            <a:off x="4297679" y="2148840"/>
+            <a:ext cx="3566160" cy="3840480"/>
+          </a:xfrm>
+          <a:prstGeom prst="rect">
+            <a:avLst/>
+          </a:prstGeom>
+          <a:noFill/>
+        </p:spPr>
+        <p:txBody>
+          <a:bodyPr wrap="square" anchor="t" lIns="45720" rIns="45720" tIns="27432" bIns="27432">
+            <a:spAutoFit/>
+          </a:bodyPr>
+          <a:lstStyle/>
+          <a:p>
+            <a:pPr algn="l">
+              <a:spcAft>
+                <a:spcPts val="1000"/>
+              </a:spcAft>
+            </a:pPr>
+            <a:r>
+              <a:rPr sz="1400" b="0">
+                <a:solidFill>
+                  <a:srgbClr val="0B0B0B"/>
+                </a:solidFill>
+                <a:latin typeface="Calibri"/>
+              </a:rPr>
+              <a:t>•  leakage control: target's own PDB entry and templates released after 2022-05-01 are excluded</a:t>
+            </a:r>
+          </a:p>
+          <a:p>
+            <a:pPr algn="l">
+              <a:spcAft>
+                <a:spcPts val="1000"/>
+              </a:spcAft>
+            </a:pPr>
+            <a:r>
+              <a:rPr sz="1400" b="0">
+                <a:solidFill>
+                  <a:srgbClr val="0B0B0B"/>
+                </a:solidFill>
+                <a:latin typeface="Calibri"/>
+              </a:rPr>
+              <a:t>•  Agent 1 never reads the experimental structure</a:t>
+            </a:r>
+          </a:p>
+          <a:p>
+            <a:pPr algn="l">
+              <a:spcAft>
+                <a:spcPts val="1000"/>
+              </a:spcAft>
+            </a:pPr>
+            <a:r>
+              <a:rPr sz="1400" b="0">
+                <a:solidFill>
+                  <a:srgbClr val="0B0B0B"/>
+                </a:solidFill>
+                <a:latin typeface="Calibri"/>
+              </a:rPr>
+              <a:t>•  metrics are computed by code and cross-checked with TMscore</a:t>
+            </a:r>
+          </a:p>
+          <a:p>
+            <a:pPr algn="l">
+              <a:spcAft>
+                <a:spcPts val="1000"/>
+              </a:spcAft>
+            </a:pPr>
+            <a:r>
+              <a:rPr sz="1400" b="0">
+                <a:solidFill>
+                  <a:srgbClr val="0B0B0B"/>
+                </a:solidFill>
+                <a:latin typeface="Calibri"/>
+              </a:rPr>
+              <a:t>•  Claude may only use the numbers the tools return</a:t>
+            </a:r>
+          </a:p>
+        </p:txBody>
+      </p:sp>
+      <p:sp>
+        <p:nvSpPr>
+          <p:cNvPr id="13" name="Rectangle 12"/>
+          <p:cNvSpPr/>
+          <p:nvPr/>
+        </p:nvSpPr>
+        <p:spPr>
+          <a:xfrm>
+            <a:off x="8046719" y="1463040"/>
+            <a:ext cx="3566160" cy="73152"/>
+          </a:xfrm>
+          <a:prstGeom prst="rect">
+            <a:avLst/>
+          </a:prstGeom>
+          <a:solidFill>
+            <a:srgbClr val="9A9A96"/>
+          </a:solidFill>
+          <a:ln>
+            <a:noFill/>
+          </a:ln>
+          <a:effectLst/>
+        </p:spPr>
+        <p:style>
+          <a:lnRef idx="1">
+            <a:schemeClr val="accent1"/>
+          </a:lnRef>
+          <a:fillRef idx="3">
+            <a:schemeClr val="accent1"/>
+          </a:fillRef>
+          <a:effectRef idx="2">
+            <a:schemeClr val="accent1"/>
+          </a:effectRef>
+          <a:fontRef idx="minor">
+            <a:schemeClr val="lt1"/>
+          </a:fontRef>
+        </p:style>
+        <p:txBody>
+          <a:bodyPr rtlCol="0" anchor="ctr"/>
+          <a:lstStyle/>
+          <a:p>
+            <a:pPr algn="ctr"/>
+          </a:p>
+        </p:txBody>
+      </p:sp>
+      <p:sp>
+        <p:nvSpPr>
+          <p:cNvPr id="14" name="TextBox 13"/>
+          <p:cNvSpPr txBox="1"/>
+          <p:nvPr/>
+        </p:nvSpPr>
+        <p:spPr>
+          <a:xfrm>
+            <a:off x="8046719" y="1645920"/>
+            <a:ext cx="3566160" cy="457200"/>
+          </a:xfrm>
+          <a:prstGeom prst="rect">
+            <a:avLst/>
+          </a:prstGeom>
+          <a:noFill/>
+        </p:spPr>
+        <p:txBody>
+          <a:bodyPr wrap="square" anchor="t" lIns="45720" rIns="45720" tIns="27432" bIns="27432">
+            <a:spAutoFit/>
+          </a:bodyPr>
+          <a:lstStyle/>
+          <a:p>
+            <a:pPr algn="l">
+              <a:spcAft>
+                <a:spcPts val="600"/>
+              </a:spcAft>
+            </a:pPr>
+            <a:r>
+              <a:rPr sz="1800" b="1">
+                <a:solidFill>
+                  <a:srgbClr val="9A9A96"/>
+                </a:solidFill>
+                <a:latin typeface="Calibri"/>
+              </a:rPr>
+              <a:t>Baseline (no AI)</a:t>
+            </a:r>
+          </a:p>
+        </p:txBody>
+      </p:sp>
+      <p:sp>
+        <p:nvSpPr>
+          <p:cNvPr id="15" name="TextBox 14"/>
+          <p:cNvSpPr txBox="1"/>
+          <p:nvPr/>
+        </p:nvSpPr>
+        <p:spPr>
+          <a:xfrm>
+            <a:off x="8046719" y="2148840"/>
+            <a:ext cx="3566160" cy="3840480"/>
+          </a:xfrm>
+          <a:prstGeom prst="rect">
+            <a:avLst/>
+          </a:prstGeom>
+          <a:noFill/>
+        </p:spPr>
+        <p:txBody>
+          <a:bodyPr wrap="square" anchor="t" lIns="45720" rIns="45720" tIns="27432" bIns="27432">
+            <a:spAutoFit/>
+          </a:bodyPr>
+          <a:lstStyle/>
+          <a:p>
+            <a:pPr algn="l">
+              <a:spcAft>
+                <a:spcPts val="1000"/>
+              </a:spcAft>
+            </a:pPr>
+            <a:r>
+              <a:rPr sz="1400" b="0">
+                <a:solidFill>
+                  <a:srgbClr val="0B0B0B"/>
+                </a:solidFill>
+                <a:latin typeface="Calibri"/>
+              </a:rPr>
+              <a:t>•  same search and MODELLER</a:t>
+            </a:r>
+          </a:p>
+          <a:p>
+            <a:pPr algn="l">
+              <a:spcAft>
+                <a:spcPts val="1000"/>
+              </a:spcAft>
+            </a:pPr>
+            <a:r>
+              <a:rPr sz="1400" b="0">
+                <a:solidFill>
+                  <a:srgbClr val="0B0B0B"/>
+                </a:solidFill>
+                <a:latin typeface="Calibri"/>
+              </a:rPr>
+              <a:t>•  top-ranked template by a fixed score (identity, coverage, E-value, resolution, completeness)</a:t>
+            </a:r>
+          </a:p>
+          <a:p>
+            <a:pPr algn="l">
+              <a:spcAft>
+                <a:spcPts val="1000"/>
+              </a:spcAft>
+            </a:pPr>
+            <a:r>
+              <a:rPr sz="1400" b="0">
+                <a:solidFill>
+                  <a:srgbClr val="0B0B0B"/>
+                </a:solidFill>
+                <a:latin typeface="Calibri"/>
+              </a:rPr>
+              <a:t>•  lowest-DOPE model</a:t>
+            </a:r>
+          </a:p>
+          <a:p>
+            <a:pPr algn="l">
+              <a:spcAft>
+                <a:spcPts val="1000"/>
+              </a:spcAft>
+            </a:pPr>
+            <a:r>
+              <a:rPr sz="1400" b="0">
+                <a:solidFill>
+                  <a:srgbClr val="0B0B0B"/>
+                </a:solidFill>
+                <a:latin typeface="Calibri"/>
+              </a:rPr>
+              <a:t>•  no second look: one search, no alternative builds</a:t>
+            </a:r>
+          </a:p>
+        </p:txBody>
+      </p:sp>
+    </p:spTree>
+  </p:cSld>
+  <p:clrMapOvr>
+    <a:masterClrMapping/>
+  </p:clrMapOvr>
+</p:sld>
+</file>
+
+<file path=ppt/slides/slide6.xml><?xml version="1.0" encoding="utf-8"?>
+<p:sld xmlns:a="http://schemas.openxmlformats.org/drawingml/2006/main" xmlns:p="http://schemas.openxmlformats.org/presentationml/2006/main" xmlns:r="http://schemas.openxmlformats.org/officeDocument/2006/relationships">
+  <p:cSld>
+    <p:spTree>
+      <p:nvGrpSpPr>
+        <p:cNvPr id="1" name=""/>
+        <p:cNvGrpSpPr/>
+        <p:nvPr/>
+      </p:nvGrpSpPr>
+      <p:grpSpPr/>
+      <p:sp>
+        <p:nvSpPr>
+          <p:cNvPr id="2" name="TextBox 1"/>
+          <p:cNvSpPr txBox="1"/>
+          <p:nvPr/>
+        </p:nvSpPr>
+        <p:spPr>
+          <a:xfrm>
+            <a:off x="548640" y="292608"/>
+            <a:ext cx="10972800" cy="274320"/>
+          </a:xfrm>
+          <a:prstGeom prst="rect">
+            <a:avLst/>
+          </a:prstGeom>
+          <a:noFill/>
+        </p:spPr>
+        <p:txBody>
+          <a:bodyPr wrap="square" anchor="t" lIns="45720" rIns="45720" tIns="27432" bIns="27432">
+            <a:spAutoFit/>
+          </a:bodyPr>
+          <a:lstStyle/>
+          <a:p>
+            <a:pPr algn="l">
+              <a:spcAft>
+                <a:spcPts val="600"/>
+              </a:spcAft>
+            </a:pPr>
+            <a:r>
+              <a:rPr sz="1100" b="1">
+                <a:solidFill>
+                  <a:srgbClr val="2A78D6"/>
+                </a:solidFill>
+                <a:latin typeface="Calibri"/>
+              </a:rPr>
+              <a:t>RESULTS</a:t>
+            </a:r>
+          </a:p>
+        </p:txBody>
+      </p:sp>
+      <p:sp>
+        <p:nvSpPr>
+          <p:cNvPr id="3" name="TextBox 2"/>
+          <p:cNvSpPr txBox="1"/>
+          <p:nvPr/>
+        </p:nvSpPr>
+        <p:spPr>
+          <a:xfrm>
+            <a:off x="548640" y="502920"/>
+            <a:ext cx="11064240" cy="640080"/>
+          </a:xfrm>
+          <a:prstGeom prst="rect">
+            <a:avLst/>
+          </a:prstGeom>
+          <a:noFill/>
+        </p:spPr>
+        <p:txBody>
+          <a:bodyPr wrap="square" anchor="t" lIns="45720" rIns="45720" tIns="27432" bIns="27432">
+            <a:spAutoFit/>
+          </a:bodyPr>
+          <a:lstStyle/>
+          <a:p>
+            <a:pPr algn="l">
+              <a:spcAft>
+                <a:spcPts val="600"/>
+              </a:spcAft>
+            </a:pPr>
+            <a:r>
+              <a:rPr sz="2800" b="1">
+                <a:solidFill>
+                  <a:srgbClr val="0B0B0B"/>
+                </a:solidFill>
+                <a:latin typeface="Calibri"/>
+              </a:rPr>
+              <a:t>Agent 1: template decisions</a:t>
+            </a:r>
+          </a:p>
+        </p:txBody>
+      </p:sp>
+      <p:cxnSp>
+        <p:nvCxnSpPr>
+          <p:cNvPr id="4" name="Connector 3"/>
+          <p:cNvCxnSpPr/>
+          <p:nvPr/>
+        </p:nvCxnSpPr>
+        <p:spPr>
+          <a:xfrm>
+            <a:off x="548640" y="1170432"/>
+            <a:ext cx="11094415" cy="0"/>
+          </a:xfrm>
+          <a:prstGeom prst="line">
+            <a:avLst/>
+          </a:prstGeom>
+          <a:ln w="12700">
+            <a:solidFill>
+              <a:srgbClr val="E4E3DF"/>
+            </a:solidFill>
+          </a:ln>
+        </p:spPr>
+        <p:style>
+          <a:lnRef idx="2">
+            <a:schemeClr val="accent1"/>
+          </a:lnRef>
+          <a:fillRef idx="0">
+            <a:schemeClr val="accent1"/>
+          </a:fillRef>
+          <a:effectRef idx="1">
+            <a:schemeClr val="accent1"/>
+          </a:effectRef>
+          <a:fontRef idx="minor">
+            <a:schemeClr val="tx1"/>
+          </a:fontRef>
+        </p:style>
+      </p:cxnSp>
+      <p:sp>
+        <p:nvSpPr>
+          <p:cNvPr id="5" name="TextBox 4"/>
+          <p:cNvSpPr txBox="1"/>
+          <p:nvPr/>
+        </p:nvSpPr>
+        <p:spPr>
+          <a:xfrm>
+            <a:off x="11185855" y="6473952"/>
+            <a:ext cx="548640" cy="274320"/>
+          </a:xfrm>
+          <a:prstGeom prst="rect">
+            <a:avLst/>
+          </a:prstGeom>
+          <a:noFill/>
+        </p:spPr>
+        <p:txBody>
+          <a:bodyPr wrap="square" anchor="t" lIns="45720" rIns="45720" tIns="27432" bIns="27432">
+            <a:spAutoFit/>
+          </a:bodyPr>
+          <a:lstStyle/>
+          <a:p>
+            <a:pPr algn="r">
+              <a:spcAft>
+                <a:spcPts val="600"/>
+              </a:spcAft>
+            </a:pPr>
+            <a:r>
+              <a:rPr sz="1000" b="0">
+                <a:solidFill>
+                  <a:srgbClr val="52514E"/>
+                </a:solidFill>
+                <a:latin typeface="Calibri"/>
+              </a:rPr>
+              <a:t>6</a:t>
+            </a:r>
+          </a:p>
+        </p:txBody>
+      </p:sp>
+      <p:sp>
+        <p:nvSpPr>
+          <p:cNvPr id="6" name="TextBox 5"/>
+          <p:cNvSpPr txBox="1"/>
+          <p:nvPr/>
+        </p:nvSpPr>
+        <p:spPr>
+          <a:xfrm>
+            <a:off x="548640" y="6473952"/>
+            <a:ext cx="7315200" cy="274320"/>
+          </a:xfrm>
+          <a:prstGeom prst="rect">
+            <a:avLst/>
+          </a:prstGeom>
+          <a:noFill/>
+        </p:spPr>
+        <p:txBody>
+          <a:bodyPr wrap="square" anchor="t" lIns="45720" rIns="45720" tIns="27432" bIns="27432">
+            <a:spAutoFit/>
+          </a:bodyPr>
+          <a:lstStyle/>
+          <a:p>
+            <a:pPr algn="l">
+              <a:spcAft>
+                <a:spcPts val="600"/>
+              </a:spcAft>
+            </a:pPr>
+            <a:r>
+              <a:rPr sz="1000" b="0">
+                <a:solidFill>
+                  <a:srgbClr val="52514E"/>
+                </a:solidFill>
+                <a:latin typeface="Calibri"/>
+              </a:rPr>
+              <a:t>CMP_SC 8170 · Project 2 · Template-based modeling vs AlphaFold3</a:t>
+            </a:r>
+          </a:p>
+        </p:txBody>
+      </p:sp>
       <p:graphicFrame>
         <p:nvGraphicFramePr>
           <p:cNvPr id="7" name="Table 6"/>
@@ -11236,13 +13540,13 @@
               </a:tblPr>
               <a:tblGrid>
                 <a:gridCol w="1188720"/>
-                <a:gridCol w="2103120"/>
+                <a:gridCol w="2377440"/>
                 <a:gridCol w="2103120"/>
                 <a:gridCol w="1051560"/>
-                <a:gridCol w="1234440"/>
-                <a:gridCol w="1234440"/>
-                <a:gridCol w="1005840"/>
-                <a:gridCol w="1143000"/>
+                <a:gridCol w="1188720"/>
+                <a:gridCol w="1188720"/>
+                <a:gridCol w="868680"/>
+                <a:gridCol w="1097280"/>
               </a:tblGrid>
               <a:tr h="566928">
                 <a:tc>
@@ -11350,7 +13654,7 @@
                           </a:solidFill>
                           <a:latin typeface="Calibri"/>
                         </a:rPr>
-                        <a:t>align2d identity</a:t>
+                        <a:t>Alignment identity</a:t>
                       </a:r>
                     </a:p>
                   </a:txBody>
@@ -11373,7 +13677,7 @@
                           </a:solidFill>
                           <a:latin typeface="Calibri"/>
                         </a:rPr>
-                        <a:t>align2d coverage</a:t>
+                        <a:t>Alignment coverage</a:t>
                       </a:r>
                     </a:p>
                   </a:txBody>
@@ -11468,7 +13772,7 @@
                           </a:solidFill>
                           <a:latin typeface="Calibri"/>
                         </a:rPr>
-                        <a:t>rcsb (E≤10) + local (E≤10)</a:t>
+                        <a:t>3 rounds, incl. E ≤ 0.001</a:t>
                       </a:r>
                     </a:p>
                   </a:txBody>
@@ -11491,7 +13795,7 @@
                           </a:solidFill>
                           <a:latin typeface="Calibri"/>
                         </a:rPr>
-                        <a:t>2R3S:A, 5I2H:A, 4A6D:A</a:t>
+                        <a:t>5I2H:A, 1QZZ:A, 3GWZ:A</a:t>
                       </a:r>
                     </a:p>
                   </a:txBody>
@@ -11537,7 +13841,7 @@
                           </a:solidFill>
                           <a:latin typeface="Calibri"/>
                         </a:rPr>
-                        <a:t>29.1%</a:t>
+                        <a:t>26.6%</a:t>
                       </a:r>
                     </a:p>
                   </a:txBody>
@@ -11560,7 +13864,7 @@
                           </a:solidFill>
                           <a:latin typeface="Calibri"/>
                         </a:rPr>
-                        <a:t>86.7%</a:t>
+                        <a:t>81.2%</a:t>
                       </a:r>
                     </a:p>
                   </a:txBody>
@@ -11606,7 +13910,7 @@
                           </a:solidFill>
                           <a:latin typeface="Calibri"/>
                         </a:rPr>
-                        <a:t>-0.05</a:t>
+                        <a:t>+0.29</a:t>
                       </a:r>
                     </a:p>
                   </a:txBody>
@@ -11655,7 +13959,7 @@
                           </a:solidFill>
                           <a:latin typeface="Calibri"/>
                         </a:rPr>
-                        <a:t>rcsb (E≤10) + local (E≤10)</a:t>
+                        <a:t>3 rounds, incl. E ≤ 0.001</a:t>
                       </a:r>
                     </a:p>
                   </a:txBody>
@@ -11678,7 +13982,7 @@
                           </a:solidFill>
                           <a:latin typeface="Calibri"/>
                         </a:rPr>
-                        <a:t>2FE7:B, 2BEI:B</a:t>
+                        <a:t>4HNY:B, 2FE7:B, 2BEI:B</a:t>
                       </a:r>
                     </a:p>
                   </a:txBody>
@@ -11724,7 +14028,7 @@
                           </a:solidFill>
                           <a:latin typeface="Calibri"/>
                         </a:rPr>
-                        <a:t>40.1%</a:t>
+                        <a:t>35.8%</a:t>
                       </a:r>
                     </a:p>
                   </a:txBody>
@@ -11747,7 +14051,7 @@
                           </a:solidFill>
                           <a:latin typeface="Calibri"/>
                         </a:rPr>
-                        <a:t>76.8%</a:t>
+                        <a:t>75.4%</a:t>
                       </a:r>
                     </a:p>
                   </a:txBody>
@@ -11770,7 +14074,7 @@
                           </a:solidFill>
                           <a:latin typeface="Calibri"/>
                         </a:rPr>
-                        <a:t>0.91</a:t>
+                        <a:t>0.93</a:t>
                       </a:r>
                     </a:p>
                   </a:txBody>
@@ -11793,7 +14097,7 @@
                           </a:solidFill>
                           <a:latin typeface="Calibri"/>
                         </a:rPr>
-                        <a:t>+0.88</a:t>
+                        <a:t>+1.24</a:t>
                       </a:r>
                     </a:p>
                   </a:txBody>
@@ -11842,7 +14146,8 @@
                           </a:solidFill>
                           <a:latin typeface="Calibri"/>
                         </a:rPr>
-                        <a:t>rcsb (E≤10) + local (E≤1000)</a:t>
+                        <a:t>3 rounds, incl. E ≤ 0.001
+5 rounds, incl. E ≤ 0.01</a:t>
                       </a:r>
                     </a:p>
                   </a:txBody>
@@ -11865,7 +14170,7 @@
                           </a:solidFill>
                           <a:latin typeface="Calibri"/>
                         </a:rPr>
-                        <a:t>7F7N:A</a:t>
+                        <a:t>7KUG:A, 6ONO:C, 7F7N:A</a:t>
                       </a:r>
                     </a:p>
                   </a:txBody>
@@ -11888,7 +14193,7 @@
                           </a:solidFill>
                           <a:latin typeface="Calibri"/>
                         </a:rPr>
-                        <a:t>7F7N:A</a:t>
+                        <a:t>7KUG:A</a:t>
                       </a:r>
                     </a:p>
                   </a:txBody>
@@ -11911,7 +14216,7 @@
                           </a:solidFill>
                           <a:latin typeface="Calibri"/>
                         </a:rPr>
-                        <a:t>28.8%</a:t>
+                        <a:t>38.2%</a:t>
                       </a:r>
                     </a:p>
                   </a:txBody>
@@ -11934,7 +14239,7 @@
                           </a:solidFill>
                           <a:latin typeface="Calibri"/>
                         </a:rPr>
-                        <a:t>95.7%</a:t>
+                        <a:t>47.4%</a:t>
                       </a:r>
                     </a:p>
                   </a:txBody>
@@ -11953,11 +14258,11 @@
                       <a:r>
                         <a:rPr sz="1300" b="0">
                           <a:solidFill>
-                            <a:srgbClr val="EB6834"/>
+                            <a:srgbClr val="0B0B0B"/>
                           </a:solidFill>
                           <a:latin typeface="Calibri"/>
                         </a:rPr>
-                        <a:t>0.01</a:t>
+                        <a:t>0.60</a:t>
                       </a:r>
                     </a:p>
                   </a:txBody>
@@ -11976,11 +14281,11 @@
                       <a:r>
                         <a:rPr sz="1300" b="0">
                           <a:solidFill>
-                            <a:srgbClr val="EB6834"/>
+                            <a:srgbClr val="0B0B0B"/>
                           </a:solidFill>
                           <a:latin typeface="Calibri"/>
                         </a:rPr>
-                        <a:t>+1.91</a:t>
+                        <a:t>+2.04</a:t>
                       </a:r>
                     </a:p>
                   </a:txBody>
@@ -12004,7 +14309,7 @@
         <p:spPr>
           <a:xfrm>
             <a:off x="548640" y="4023360"/>
-            <a:ext cx="11064240" cy="2011680"/>
+            <a:ext cx="11064240" cy="2194560"/>
           </a:xfrm>
           <a:prstGeom prst="rect">
             <a:avLst/>
@@ -12019,7 +14324,7 @@
           <a:p>
             <a:pPr algn="l">
               <a:spcAft>
-                <a:spcPts val="1000"/>
+                <a:spcPts val="800"/>
               </a:spcAft>
             </a:pPr>
             <a:r>
@@ -12029,13 +14334,13 @@
                 </a:solidFill>
                 <a:latin typeface="Calibri"/>
               </a:rPr>
-              <a:t>•  T1124 and T1127: clear homologues (E ≈ 1e-16 to 1e-18); Claude built 2–3 alternatives and kept the best z-DOPE / highest identity.</a:t>
+              <a:t>•  T1124 and T1127: hundreds of family members (O-methyltransferases, GNAT acetyltransferases); Claude kept the build with the best z-DOPE / identity balance.</a:t>
             </a:r>
           </a:p>
           <a:p>
             <a:pPr algn="l">
               <a:spcAft>
-                <a:spcPts val="1000"/>
+                <a:spcPts val="800"/>
               </a:spcAft>
             </a:pPr>
             <a:r>
@@ -12045,7 +14350,23 @@
                 </a:solidFill>
                 <a:latin typeface="Calibri"/>
               </a:rPr>
-              <a:t>•  T1151s2: the default search returns only 8D5V itself. Claude widened to local MMseqs2 (E ≤ 1000) and chose 7F7N:A (WhiB4, E = 3.9), citing WhiB-like cysteine spacing. MODELLER's own scores already warn: GA341 ≈ 0.01, z-DOPE +1.9.</a:t>
+              <a:t>•  T1151s2: only 8 hits, all WhiB-family regulators; Claude ran a looser second search (same 8 hits), built WhiB7, WhiB1 and WhiB4 templates and kept WhiB7 (7KUG:A, 38% identity). The WhiB4 NMR structure was clearly worst (GA341 ≤ 0.02).</a:t>
+            </a:r>
+          </a:p>
+          <a:p>
+            <a:pPr algn="l">
+              <a:spcAft>
+                <a:spcPts val="800"/>
+              </a:spcAft>
+            </a:pPr>
+            <a:r>
+              <a:rPr sz="1400" b="0">
+                <a:solidFill>
+                  <a:srgbClr val="0B0B0B"/>
+                </a:solidFill>
+                <a:latin typeface="Calibri"/>
+              </a:rPr>
+              <a:t>•  Predicted risks: T1124 domain orientation, T1127 insertion ~60–104, T1151s2 tail 85–111 without template — all confirmed by Agent 2.</a:t>
             </a:r>
           </a:p>
         </p:txBody>
@@ -12058,7 +14379,7 @@
 </p:sld>
 </file>
 
-<file path=ppt/slides/slide6.xml><?xml version="1.0" encoding="utf-8"?>
+<file path=ppt/slides/slide7.xml><?xml version="1.0" encoding="utf-8"?>
 <p:sld xmlns:a="http://schemas.openxmlformats.org/drawingml/2006/main" xmlns:p="http://schemas.openxmlformats.org/presentationml/2006/main" xmlns:r="http://schemas.openxmlformats.org/officeDocument/2006/relationships">
   <p:cSld>
     <p:spTree>
@@ -12215,7 +14536,7 @@
                 </a:solidFill>
                 <a:latin typeface="Calibri"/>
               </a:rPr>
-              <a:t>6</a:t>
+              <a:t>7</a:t>
             </a:r>
           </a:p>
         </p:txBody>
@@ -12485,7 +14806,7 @@
                           </a:solidFill>
                           <a:latin typeface="Calibri"/>
                         </a:rPr>
-                        <a:t>0.519</a:t>
+                        <a:t>0.537</a:t>
                       </a:r>
                     </a:p>
                   </a:txBody>
@@ -12508,7 +14829,7 @@
                           </a:solidFill>
                           <a:latin typeface="Calibri"/>
                         </a:rPr>
-                        <a:t>38.6</a:t>
+                        <a:t>41.3</a:t>
                       </a:r>
                     </a:p>
                   </a:txBody>
@@ -12531,7 +14852,7 @@
                           </a:solidFill>
                           <a:latin typeface="Calibri"/>
                         </a:rPr>
-                        <a:t>0.532</a:t>
+                        <a:t>0.542</a:t>
                       </a:r>
                     </a:p>
                   </a:txBody>
@@ -12554,7 +14875,7 @@
                           </a:solidFill>
                           <a:latin typeface="Calibri"/>
                         </a:rPr>
-                        <a:t>21.21</a:t>
+                        <a:t>21.29</a:t>
                       </a:r>
                     </a:p>
                   </a:txBody>
@@ -12765,7 +15086,7 @@
                           </a:solidFill>
                           <a:latin typeface="Calibri"/>
                         </a:rPr>
-                        <a:t>0.658</a:t>
+                        <a:t>0.722</a:t>
                       </a:r>
                     </a:p>
                   </a:txBody>
@@ -12788,7 +15109,7 @@
                           </a:solidFill>
                           <a:latin typeface="Calibri"/>
                         </a:rPr>
-                        <a:t>59.3</a:t>
+                        <a:t>65.5</a:t>
                       </a:r>
                     </a:p>
                   </a:txBody>
@@ -12811,7 +15132,7 @@
                           </a:solidFill>
                           <a:latin typeface="Calibri"/>
                         </a:rPr>
-                        <a:t>0.488</a:t>
+                        <a:t>0.529</a:t>
                       </a:r>
                     </a:p>
                   </a:txBody>
@@ -12834,7 +15155,7 @@
                           </a:solidFill>
                           <a:latin typeface="Calibri"/>
                         </a:rPr>
-                        <a:t>13.45</a:t>
+                        <a:t>11.47</a:t>
                       </a:r>
                     </a:p>
                   </a:txBody>
@@ -13045,7 +15366,7 @@
                           </a:solidFill>
                           <a:latin typeface="Calibri"/>
                         </a:rPr>
-                        <a:t>0.162</a:t>
+                        <a:t>0.524</a:t>
                       </a:r>
                     </a:p>
                   </a:txBody>
@@ -13068,7 +15389,7 @@
                           </a:solidFill>
                           <a:latin typeface="Calibri"/>
                         </a:rPr>
-                        <a:t>19.0</a:t>
+                        <a:t>52.7</a:t>
                       </a:r>
                     </a:p>
                   </a:txBody>
@@ -13091,7 +15412,7 @@
                           </a:solidFill>
                           <a:latin typeface="Calibri"/>
                         </a:rPr>
-                        <a:t>0.244</a:t>
+                        <a:t>0.407</a:t>
                       </a:r>
                     </a:p>
                   </a:txBody>
@@ -13114,7 +15435,7 @@
                           </a:solidFill>
                           <a:latin typeface="Calibri"/>
                         </a:rPr>
-                        <a:t>16.44</a:t>
+                        <a:t>17.33</a:t>
                       </a:r>
                     </a:p>
                   </a:txBody>
@@ -13319,7 +15640,7 @@
                 </a:solidFill>
                 <a:latin typeface="Calibri"/>
               </a:rPr>
-              <a:t>T1124: +0.42</a:t>
+              <a:t>T1124: +0.40</a:t>
             </a:r>
           </a:p>
           <a:p>
@@ -13335,7 +15656,7 @@
                 </a:solidFill>
                 <a:latin typeface="Calibri"/>
               </a:rPr>
-              <a:t>T1127: +0.31</a:t>
+              <a:t>T1127: +0.25</a:t>
             </a:r>
           </a:p>
           <a:p>
@@ -13351,7 +15672,7 @@
                 </a:solidFill>
                 <a:latin typeface="Calibri"/>
               </a:rPr>
-              <a:t>T1151s2: +0.75</a:t>
+              <a:t>T1151s2: +0.39</a:t>
             </a:r>
           </a:p>
           <a:p>
@@ -13383,7 +15704,7 @@
                 </a:solidFill>
                 <a:latin typeface="Calibri"/>
               </a:rPr>
-              <a:t>MODELLER is best on the TBM-hard target (TM 0.66), not the TBM-easy one: CASP difficulty labels did not predict MODELLER's accuracy here.</a:t>
+              <a:t>MODELLER is best on the TBM-hard target (TM 0.72), not the TBM-easy one: CASP difficulty labels did not predict MODELLER's accuracy here.</a:t>
             </a:r>
           </a:p>
           <a:p>
@@ -13399,7 +15720,7 @@
                 </a:solidFill>
                 <a:latin typeface="Calibri"/>
               </a:rPr>
-              <a:t>On T1151s2 the MODELLER model is essentially random (TM &lt; 0.17).</a:t>
+              <a:t>Where MODELLER had a template, its core is close (T1127 1.9 Å, T1151s2 1.7 Å mean Cα error); the gap comes from what the template does not cover.</a:t>
             </a:r>
           </a:p>
         </p:txBody>
@@ -13412,7 +15733,7 @@
 </p:sld>
 </file>
 
-<file path=ppt/slides/slide7.xml><?xml version="1.0" encoding="utf-8"?>
+<file path=ppt/slides/slide8.xml><?xml version="1.0" encoding="utf-8"?>
 <p:sld xmlns:a="http://schemas.openxmlformats.org/drawingml/2006/main" xmlns:p="http://schemas.openxmlformats.org/presentationml/2006/main" xmlns:r="http://schemas.openxmlformats.org/officeDocument/2006/relationships">
   <p:cSld>
     <p:spTree>
@@ -13569,7 +15890,7 @@
                 </a:solidFill>
                 <a:latin typeface="Calibri"/>
               </a:rPr>
-              <a:t>7</a:t>
+              <a:t>8</a:t>
             </a:r>
           </a:p>
         </p:txBody>
@@ -13675,7 +15996,7 @@
 </p:sld>
 </file>
 
-<file path=ppt/slides/slide8.xml><?xml version="1.0" encoding="utf-8"?>
+<file path=ppt/slides/slide9.xml><?xml version="1.0" encoding="utf-8"?>
 <p:sld xmlns:a="http://schemas.openxmlformats.org/drawingml/2006/main" xmlns:p="http://schemas.openxmlformats.org/presentationml/2006/main" xmlns:r="http://schemas.openxmlformats.org/officeDocument/2006/relationships">
   <p:cSld>
     <p:spTree>
@@ -13832,7 +16153,7 @@
                 </a:solidFill>
                 <a:latin typeface="Calibri"/>
               </a:rPr>
-              <a:t>8</a:t>
+              <a:t>9</a:t>
             </a:r>
           </a:p>
         </p:txBody>
@@ -13892,8 +16213,8 @@
         </p:blipFill>
         <p:spPr>
           <a:xfrm>
-            <a:off x="548640" y="1809530"/>
-            <a:ext cx="2743200" cy="2278818"/>
+            <a:off x="548640" y="1915637"/>
+            <a:ext cx="2743200" cy="2066605"/>
           </a:xfrm>
           <a:prstGeom prst="rect">
             <a:avLst/>
@@ -13973,7 +16294,7 @@
                 </a:solidFill>
                 <a:latin typeface="Calibri"/>
               </a:rPr>
-              <a:t>TM 0.519 · GDT-TS 38.6 · RMSD 21.2 Å</a:t>
+              <a:t>TM 0.537 · GDT-TS 41.3 · RMSD 21.3 Å</a:t>
             </a:r>
           </a:p>
         </p:txBody>
@@ -14363,7 +16684,7 @@
                 </a:solidFill>
                 <a:latin typeface="Calibri"/>
               </a:rPr>
-              <a:t>•  Template 5I2H:A (O-methyltransferase), 29% identity, 87.6% of the EU aligned.</a:t>
+              <a:t>•  Template 5I2H:A (O-methyltransferase), 27% identity, 81% of the target aligned.</a:t>
             </a:r>
           </a:p>
           <a:p>
@@ -14379,7 +16700,7 @@
                 </a:solidFill>
                 <a:latin typeface="Calibri"/>
               </a:rPr>
-              <a:t>•  Residues 7–135 are placed as a block in the wrong position: mean Cα error 37.7 Å, while local lDDT stays moderate → a domain-placement error, not a local-fold error.</a:t>
+              <a:t>•  Residues 7–135 are placed as a block in the wrong position: mean Cα error 38 Å, while local lDDT stays 0.64–0.71 → a domain-placement error, not a local-fold error.</a:t>
             </a:r>
           </a:p>
         </p:txBody>
@@ -14481,7 +16802,7 @@
                 </a:solidFill>
                 <a:latin typeface="Calibri"/>
               </a:rPr>
-              <a:t>•  z-DOPE (−0.05) and GA341 (1.0) looked good: they cannot detect a misplaced domain.</a:t>
+              <a:t>•  The catalytic domain (~136–364) is mostly within 4 Å; z-DOPE and GA341 (1.0) cannot see a misplaced domain.</a:t>
             </a:r>
           </a:p>
           <a:p>
@@ -14497,842 +16818,7 @@
                 </a:solidFill>
                 <a:latin typeface="Calibri"/>
               </a:rPr>
-              <a:t>•  AlphaFold3 places the N-terminal region correctly; its 6.6 Å RMSD comes from the disordered C-terminal tail (369–384).</a:t>
-            </a:r>
-          </a:p>
-        </p:txBody>
-      </p:sp>
-    </p:spTree>
-  </p:cSld>
-  <p:clrMapOvr>
-    <a:masterClrMapping/>
-  </p:clrMapOvr>
-</p:sld>
-</file>
-
-<file path=ppt/slides/slide9.xml><?xml version="1.0" encoding="utf-8"?>
-<p:sld xmlns:a="http://schemas.openxmlformats.org/drawingml/2006/main" xmlns:p="http://schemas.openxmlformats.org/presentationml/2006/main" xmlns:r="http://schemas.openxmlformats.org/officeDocument/2006/relationships">
-  <p:cSld>
-    <p:spTree>
-      <p:nvGrpSpPr>
-        <p:cNvPr id="1" name=""/>
-        <p:cNvGrpSpPr/>
-        <p:nvPr/>
-      </p:nvGrpSpPr>
-      <p:grpSpPr/>
-      <p:sp>
-        <p:nvSpPr>
-          <p:cNvPr id="2" name="TextBox 1"/>
-          <p:cNvSpPr txBox="1"/>
-          <p:nvPr/>
-        </p:nvSpPr>
-        <p:spPr>
-          <a:xfrm>
-            <a:off x="548640" y="292608"/>
-            <a:ext cx="10972800" cy="274320"/>
-          </a:xfrm>
-          <a:prstGeom prst="rect">
-            <a:avLst/>
-          </a:prstGeom>
-          <a:noFill/>
-        </p:spPr>
-        <p:txBody>
-          <a:bodyPr wrap="square" anchor="t" lIns="45720" rIns="45720" tIns="27432" bIns="27432">
-            <a:spAutoFit/>
-          </a:bodyPr>
-          <a:lstStyle/>
-          <a:p>
-            <a:pPr algn="l">
-              <a:spcAft>
-                <a:spcPts val="600"/>
-              </a:spcAft>
-            </a:pPr>
-            <a:r>
-              <a:rPr sz="1100" b="1">
-                <a:solidFill>
-                  <a:srgbClr val="2A78D6"/>
-                </a:solidFill>
-                <a:latin typeface="Calibri"/>
-              </a:rPr>
-              <a:t>RESULTS · T1127</a:t>
-            </a:r>
-          </a:p>
-        </p:txBody>
-      </p:sp>
-      <p:sp>
-        <p:nvSpPr>
-          <p:cNvPr id="3" name="TextBox 2"/>
-          <p:cNvSpPr txBox="1"/>
-          <p:nvPr/>
-        </p:nvSpPr>
-        <p:spPr>
-          <a:xfrm>
-            <a:off x="548640" y="502920"/>
-            <a:ext cx="11064240" cy="640080"/>
-          </a:xfrm>
-          <a:prstGeom prst="rect">
-            <a:avLst/>
-          </a:prstGeom>
-          <a:noFill/>
-        </p:spPr>
-        <p:txBody>
-          <a:bodyPr wrap="square" anchor="t" lIns="45720" rIns="45720" tIns="27432" bIns="27432">
-            <a:spAutoFit/>
-          </a:bodyPr>
-          <a:lstStyle/>
-          <a:p>
-            <a:pPr algn="l">
-              <a:spcAft>
-                <a:spcPts val="600"/>
-              </a:spcAft>
-            </a:pPr>
-            <a:r>
-              <a:rPr sz="2800" b="1">
-                <a:solidFill>
-                  <a:srgbClr val="0B0B0B"/>
-                </a:solidFill>
-                <a:latin typeface="Calibri"/>
-              </a:rPr>
-              <a:t>T1127 (TBM-hard): core right, insertion missing</a:t>
-            </a:r>
-          </a:p>
-        </p:txBody>
-      </p:sp>
-      <p:cxnSp>
-        <p:nvCxnSpPr>
-          <p:cNvPr id="4" name="Connector 3"/>
-          <p:cNvCxnSpPr/>
-          <p:nvPr/>
-        </p:nvCxnSpPr>
-        <p:spPr>
-          <a:xfrm>
-            <a:off x="548640" y="1170432"/>
-            <a:ext cx="11094415" cy="0"/>
-          </a:xfrm>
-          <a:prstGeom prst="line">
-            <a:avLst/>
-          </a:prstGeom>
-          <a:ln w="12700">
-            <a:solidFill>
-              <a:srgbClr val="E4E3DF"/>
-            </a:solidFill>
-          </a:ln>
-        </p:spPr>
-        <p:style>
-          <a:lnRef idx="2">
-            <a:schemeClr val="accent1"/>
-          </a:lnRef>
-          <a:fillRef idx="0">
-            <a:schemeClr val="accent1"/>
-          </a:fillRef>
-          <a:effectRef idx="1">
-            <a:schemeClr val="accent1"/>
-          </a:effectRef>
-          <a:fontRef idx="minor">
-            <a:schemeClr val="tx1"/>
-          </a:fontRef>
-        </p:style>
-      </p:cxnSp>
-      <p:sp>
-        <p:nvSpPr>
-          <p:cNvPr id="5" name="TextBox 4"/>
-          <p:cNvSpPr txBox="1"/>
-          <p:nvPr/>
-        </p:nvSpPr>
-        <p:spPr>
-          <a:xfrm>
-            <a:off x="11185855" y="6473952"/>
-            <a:ext cx="548640" cy="274320"/>
-          </a:xfrm>
-          <a:prstGeom prst="rect">
-            <a:avLst/>
-          </a:prstGeom>
-          <a:noFill/>
-        </p:spPr>
-        <p:txBody>
-          <a:bodyPr wrap="square" anchor="t" lIns="45720" rIns="45720" tIns="27432" bIns="27432">
-            <a:spAutoFit/>
-          </a:bodyPr>
-          <a:lstStyle/>
-          <a:p>
-            <a:pPr algn="r">
-              <a:spcAft>
-                <a:spcPts val="600"/>
-              </a:spcAft>
-            </a:pPr>
-            <a:r>
-              <a:rPr sz="1000" b="0">
-                <a:solidFill>
-                  <a:srgbClr val="52514E"/>
-                </a:solidFill>
-                <a:latin typeface="Calibri"/>
-              </a:rPr>
-              <a:t>9</a:t>
-            </a:r>
-          </a:p>
-        </p:txBody>
-      </p:sp>
-      <p:sp>
-        <p:nvSpPr>
-          <p:cNvPr id="6" name="TextBox 5"/>
-          <p:cNvSpPr txBox="1"/>
-          <p:nvPr/>
-        </p:nvSpPr>
-        <p:spPr>
-          <a:xfrm>
-            <a:off x="548640" y="6473952"/>
-            <a:ext cx="7315200" cy="274320"/>
-          </a:xfrm>
-          <a:prstGeom prst="rect">
-            <a:avLst/>
-          </a:prstGeom>
-          <a:noFill/>
-        </p:spPr>
-        <p:txBody>
-          <a:bodyPr wrap="square" anchor="t" lIns="45720" rIns="45720" tIns="27432" bIns="27432">
-            <a:spAutoFit/>
-          </a:bodyPr>
-          <a:lstStyle/>
-          <a:p>
-            <a:pPr algn="l">
-              <a:spcAft>
-                <a:spcPts val="600"/>
-              </a:spcAft>
-            </a:pPr>
-            <a:r>
-              <a:rPr sz="1000" b="0">
-                <a:solidFill>
-                  <a:srgbClr val="52514E"/>
-                </a:solidFill>
-                <a:latin typeface="Calibri"/>
-              </a:rPr>
-              <a:t>CMP_SC 8170 · Project 2 · Template-based modeling vs AlphaFold3</a:t>
-            </a:r>
-          </a:p>
-        </p:txBody>
-      </p:sp>
-      <p:pic>
-        <p:nvPicPr>
-          <p:cNvPr id="7" name="Picture 6" descr="T1127_3d_MODELLER.png"/>
-          <p:cNvPicPr>
-            <a:picLocks noChangeAspect="1"/>
-          </p:cNvPicPr>
-          <p:nvPr/>
-        </p:nvPicPr>
-        <p:blipFill>
-          <a:blip r:embed="rId3"/>
-          <a:stretch>
-            <a:fillRect/>
-          </a:stretch>
-        </p:blipFill>
-        <p:spPr>
-          <a:xfrm>
-            <a:off x="548640" y="2089490"/>
-            <a:ext cx="2743200" cy="1718899"/>
-          </a:xfrm>
-          <a:prstGeom prst="rect">
-            <a:avLst/>
-          </a:prstGeom>
-        </p:spPr>
-      </p:pic>
-      <p:sp>
-        <p:nvSpPr>
-          <p:cNvPr id="8" name="TextBox 7"/>
-          <p:cNvSpPr txBox="1"/>
-          <p:nvPr/>
-        </p:nvSpPr>
-        <p:spPr>
-          <a:xfrm>
-            <a:off x="548640" y="1325880"/>
-            <a:ext cx="2743200" cy="320040"/>
-          </a:xfrm>
-          <a:prstGeom prst="rect">
-            <a:avLst/>
-          </a:prstGeom>
-          <a:noFill/>
-        </p:spPr>
-        <p:txBody>
-          <a:bodyPr wrap="square" anchor="t" lIns="45720" rIns="45720" tIns="27432" bIns="27432">
-            <a:spAutoFit/>
-          </a:bodyPr>
-          <a:lstStyle/>
-          <a:p>
-            <a:pPr algn="ctr">
-              <a:spcAft>
-                <a:spcPts val="600"/>
-              </a:spcAft>
-            </a:pPr>
-            <a:r>
-              <a:rPr sz="1500" b="1">
-                <a:solidFill>
-                  <a:srgbClr val="2A78D6"/>
-                </a:solidFill>
-                <a:latin typeface="Calibri"/>
-              </a:rPr>
-              <a:t>MODELLER</a:t>
-            </a:r>
-          </a:p>
-        </p:txBody>
-      </p:sp>
-      <p:sp>
-        <p:nvSpPr>
-          <p:cNvPr id="9" name="TextBox 8"/>
-          <p:cNvSpPr txBox="1"/>
-          <p:nvPr/>
-        </p:nvSpPr>
-        <p:spPr>
-          <a:xfrm>
-            <a:off x="502919" y="4224528"/>
-            <a:ext cx="2834640" cy="292608"/>
-          </a:xfrm>
-          <a:prstGeom prst="rect">
-            <a:avLst/>
-          </a:prstGeom>
-          <a:noFill/>
-        </p:spPr>
-        <p:txBody>
-          <a:bodyPr wrap="square" anchor="t" lIns="45720" rIns="45720" tIns="27432" bIns="27432">
-            <a:spAutoFit/>
-          </a:bodyPr>
-          <a:lstStyle/>
-          <a:p>
-            <a:pPr algn="ctr">
-              <a:spcAft>
-                <a:spcPts val="600"/>
-              </a:spcAft>
-            </a:pPr>
-            <a:r>
-              <a:rPr sz="1050" b="0">
-                <a:solidFill>
-                  <a:srgbClr val="52514E"/>
-                </a:solidFill>
-                <a:latin typeface="Calibri"/>
-              </a:rPr>
-              <a:t>TM 0.658 · GDT-TS 59.3 · RMSD 13.5 Å</a:t>
-            </a:r>
-          </a:p>
-        </p:txBody>
-      </p:sp>
-      <p:pic>
-        <p:nvPicPr>
-          <p:cNvPr id="10" name="Picture 9" descr="T1127_3d_AlphaFold3.png"/>
-          <p:cNvPicPr>
-            <a:picLocks noChangeAspect="1"/>
-          </p:cNvPicPr>
-          <p:nvPr/>
-        </p:nvPicPr>
-        <p:blipFill>
-          <a:blip r:embed="rId4"/>
-          <a:stretch>
-            <a:fillRect/>
-          </a:stretch>
-        </p:blipFill>
-        <p:spPr>
-          <a:xfrm>
-            <a:off x="3429000" y="2124061"/>
-            <a:ext cx="2743200" cy="1649756"/>
-          </a:xfrm>
-          <a:prstGeom prst="rect">
-            <a:avLst/>
-          </a:prstGeom>
-        </p:spPr>
-      </p:pic>
-      <p:sp>
-        <p:nvSpPr>
-          <p:cNvPr id="11" name="TextBox 10"/>
-          <p:cNvSpPr txBox="1"/>
-          <p:nvPr/>
-        </p:nvSpPr>
-        <p:spPr>
-          <a:xfrm>
-            <a:off x="3429000" y="1325880"/>
-            <a:ext cx="2743200" cy="320040"/>
-          </a:xfrm>
-          <a:prstGeom prst="rect">
-            <a:avLst/>
-          </a:prstGeom>
-          <a:noFill/>
-        </p:spPr>
-        <p:txBody>
-          <a:bodyPr wrap="square" anchor="t" lIns="45720" rIns="45720" tIns="27432" bIns="27432">
-            <a:spAutoFit/>
-          </a:bodyPr>
-          <a:lstStyle/>
-          <a:p>
-            <a:pPr algn="ctr">
-              <a:spcAft>
-                <a:spcPts val="600"/>
-              </a:spcAft>
-            </a:pPr>
-            <a:r>
-              <a:rPr sz="1500" b="1">
-                <a:solidFill>
-                  <a:srgbClr val="EB6834"/>
-                </a:solidFill>
-                <a:latin typeface="Calibri"/>
-              </a:rPr>
-              <a:t>AlphaFold3</a:t>
-            </a:r>
-          </a:p>
-        </p:txBody>
-      </p:sp>
-      <p:sp>
-        <p:nvSpPr>
-          <p:cNvPr id="12" name="TextBox 11"/>
-          <p:cNvSpPr txBox="1"/>
-          <p:nvPr/>
-        </p:nvSpPr>
-        <p:spPr>
-          <a:xfrm>
-            <a:off x="3383280" y="4224528"/>
-            <a:ext cx="2834640" cy="292608"/>
-          </a:xfrm>
-          <a:prstGeom prst="rect">
-            <a:avLst/>
-          </a:prstGeom>
-          <a:noFill/>
-        </p:spPr>
-        <p:txBody>
-          <a:bodyPr wrap="square" anchor="t" lIns="45720" rIns="45720" tIns="27432" bIns="27432">
-            <a:spAutoFit/>
-          </a:bodyPr>
-          <a:lstStyle/>
-          <a:p>
-            <a:pPr algn="ctr">
-              <a:spcAft>
-                <a:spcPts val="600"/>
-              </a:spcAft>
-            </a:pPr>
-            <a:r>
-              <a:rPr sz="1050" b="0">
-                <a:solidFill>
-                  <a:srgbClr val="52514E"/>
-                </a:solidFill>
-                <a:latin typeface="Calibri"/>
-              </a:rPr>
-              <a:t>TM 0.973 · GDT-TS 95.5 · RMSD 0.9 Å</a:t>
-            </a:r>
-          </a:p>
-        </p:txBody>
-      </p:sp>
-      <p:sp>
-        <p:nvSpPr>
-          <p:cNvPr id="13" name="Rectangle 12"/>
-          <p:cNvSpPr/>
-          <p:nvPr/>
-        </p:nvSpPr>
-        <p:spPr>
-          <a:xfrm>
-            <a:off x="914400" y="4654296"/>
-            <a:ext cx="201168" cy="146304"/>
-          </a:xfrm>
-          <a:prstGeom prst="rect">
-            <a:avLst/>
-          </a:prstGeom>
-          <a:solidFill>
-            <a:srgbClr val="9A9A96"/>
-          </a:solidFill>
-          <a:ln>
-            <a:noFill/>
-          </a:ln>
-          <a:effectLst/>
-        </p:spPr>
-        <p:style>
-          <a:lnRef idx="1">
-            <a:schemeClr val="accent1"/>
-          </a:lnRef>
-          <a:fillRef idx="3">
-            <a:schemeClr val="accent1"/>
-          </a:fillRef>
-          <a:effectRef idx="2">
-            <a:schemeClr val="accent1"/>
-          </a:effectRef>
-          <a:fontRef idx="minor">
-            <a:schemeClr val="lt1"/>
-          </a:fontRef>
-        </p:style>
-        <p:txBody>
-          <a:bodyPr rtlCol="0" anchor="ctr"/>
-          <a:lstStyle/>
-          <a:p>
-            <a:pPr algn="ctr"/>
-          </a:p>
-        </p:txBody>
-      </p:sp>
-      <p:sp>
-        <p:nvSpPr>
-          <p:cNvPr id="14" name="TextBox 13"/>
-          <p:cNvSpPr txBox="1"/>
-          <p:nvPr/>
-        </p:nvSpPr>
-        <p:spPr>
-          <a:xfrm>
-            <a:off x="1170432" y="4572000"/>
-            <a:ext cx="1115568" cy="274320"/>
-          </a:xfrm>
-          <a:prstGeom prst="rect">
-            <a:avLst/>
-          </a:prstGeom>
-          <a:noFill/>
-        </p:spPr>
-        <p:txBody>
-          <a:bodyPr wrap="square" anchor="t" lIns="45720" rIns="45720" tIns="27432" bIns="27432">
-            <a:spAutoFit/>
-          </a:bodyPr>
-          <a:lstStyle/>
-          <a:p>
-            <a:pPr algn="l">
-              <a:spcAft>
-                <a:spcPts val="600"/>
-              </a:spcAft>
-            </a:pPr>
-            <a:r>
-              <a:rPr sz="1200" b="0">
-                <a:solidFill>
-                  <a:srgbClr val="52514E"/>
-                </a:solidFill>
-                <a:latin typeface="Calibri"/>
-              </a:rPr>
-              <a:t>experimental</a:t>
-            </a:r>
-          </a:p>
-        </p:txBody>
-      </p:sp>
-      <p:sp>
-        <p:nvSpPr>
-          <p:cNvPr id="15" name="Rectangle 14"/>
-          <p:cNvSpPr/>
-          <p:nvPr/>
-        </p:nvSpPr>
-        <p:spPr>
-          <a:xfrm>
-            <a:off x="2468880" y="4654296"/>
-            <a:ext cx="201168" cy="146304"/>
-          </a:xfrm>
-          <a:prstGeom prst="rect">
-            <a:avLst/>
-          </a:prstGeom>
-          <a:solidFill>
-            <a:srgbClr val="2A78D6"/>
-          </a:solidFill>
-          <a:ln>
-            <a:noFill/>
-          </a:ln>
-          <a:effectLst/>
-        </p:spPr>
-        <p:style>
-          <a:lnRef idx="1">
-            <a:schemeClr val="accent1"/>
-          </a:lnRef>
-          <a:fillRef idx="3">
-            <a:schemeClr val="accent1"/>
-          </a:fillRef>
-          <a:effectRef idx="2">
-            <a:schemeClr val="accent1"/>
-          </a:effectRef>
-          <a:fontRef idx="minor">
-            <a:schemeClr val="lt1"/>
-          </a:fontRef>
-        </p:style>
-        <p:txBody>
-          <a:bodyPr rtlCol="0" anchor="ctr"/>
-          <a:lstStyle/>
-          <a:p>
-            <a:pPr algn="ctr"/>
-          </a:p>
-        </p:txBody>
-      </p:sp>
-      <p:sp>
-        <p:nvSpPr>
-          <p:cNvPr id="16" name="TextBox 15"/>
-          <p:cNvSpPr txBox="1"/>
-          <p:nvPr/>
-        </p:nvSpPr>
-        <p:spPr>
-          <a:xfrm>
-            <a:off x="2724912" y="4572000"/>
-            <a:ext cx="780288" cy="274320"/>
-          </a:xfrm>
-          <a:prstGeom prst="rect">
-            <a:avLst/>
-          </a:prstGeom>
-          <a:noFill/>
-        </p:spPr>
-        <p:txBody>
-          <a:bodyPr wrap="square" anchor="t" lIns="45720" rIns="45720" tIns="27432" bIns="27432">
-            <a:spAutoFit/>
-          </a:bodyPr>
-          <a:lstStyle/>
-          <a:p>
-            <a:pPr algn="l">
-              <a:spcAft>
-                <a:spcPts val="600"/>
-              </a:spcAft>
-            </a:pPr>
-            <a:r>
-              <a:rPr sz="1200" b="0">
-                <a:solidFill>
-                  <a:srgbClr val="52514E"/>
-                </a:solidFill>
-                <a:latin typeface="Calibri"/>
-              </a:rPr>
-              <a:t>MODELLER</a:t>
-            </a:r>
-          </a:p>
-        </p:txBody>
-      </p:sp>
-      <p:sp>
-        <p:nvSpPr>
-          <p:cNvPr id="17" name="Rectangle 16"/>
-          <p:cNvSpPr/>
-          <p:nvPr/>
-        </p:nvSpPr>
-        <p:spPr>
-          <a:xfrm>
-            <a:off x="3688080" y="4654296"/>
-            <a:ext cx="201168" cy="146304"/>
-          </a:xfrm>
-          <a:prstGeom prst="rect">
-            <a:avLst/>
-          </a:prstGeom>
-          <a:solidFill>
-            <a:srgbClr val="EB6834"/>
-          </a:solidFill>
-          <a:ln>
-            <a:noFill/>
-          </a:ln>
-          <a:effectLst/>
-        </p:spPr>
-        <p:style>
-          <a:lnRef idx="1">
-            <a:schemeClr val="accent1"/>
-          </a:lnRef>
-          <a:fillRef idx="3">
-            <a:schemeClr val="accent1"/>
-          </a:fillRef>
-          <a:effectRef idx="2">
-            <a:schemeClr val="accent1"/>
-          </a:effectRef>
-          <a:fontRef idx="minor">
-            <a:schemeClr val="lt1"/>
-          </a:fontRef>
-        </p:style>
-        <p:txBody>
-          <a:bodyPr rtlCol="0" anchor="ctr"/>
-          <a:lstStyle/>
-          <a:p>
-            <a:pPr algn="ctr"/>
-          </a:p>
-        </p:txBody>
-      </p:sp>
-      <p:sp>
-        <p:nvSpPr>
-          <p:cNvPr id="18" name="TextBox 17"/>
-          <p:cNvSpPr txBox="1"/>
-          <p:nvPr/>
-        </p:nvSpPr>
-        <p:spPr>
-          <a:xfrm>
-            <a:off x="3944112" y="4572000"/>
-            <a:ext cx="947928" cy="274320"/>
-          </a:xfrm>
-          <a:prstGeom prst="rect">
-            <a:avLst/>
-          </a:prstGeom>
-          <a:noFill/>
-        </p:spPr>
-        <p:txBody>
-          <a:bodyPr wrap="square" anchor="t" lIns="45720" rIns="45720" tIns="27432" bIns="27432">
-            <a:spAutoFit/>
-          </a:bodyPr>
-          <a:lstStyle/>
-          <a:p>
-            <a:pPr algn="l">
-              <a:spcAft>
-                <a:spcPts val="600"/>
-              </a:spcAft>
-            </a:pPr>
-            <a:r>
-              <a:rPr sz="1200" b="0">
-                <a:solidFill>
-                  <a:srgbClr val="52514E"/>
-                </a:solidFill>
-                <a:latin typeface="Calibri"/>
-              </a:rPr>
-              <a:t>AlphaFold3</a:t>
-            </a:r>
-          </a:p>
-        </p:txBody>
-      </p:sp>
-      <p:sp>
-        <p:nvSpPr>
-          <p:cNvPr id="19" name="TextBox 18"/>
-          <p:cNvSpPr txBox="1"/>
-          <p:nvPr/>
-        </p:nvSpPr>
-        <p:spPr>
-          <a:xfrm>
-            <a:off x="548640" y="4983480"/>
-            <a:ext cx="5577840" cy="1371600"/>
-          </a:xfrm>
-          <a:prstGeom prst="rect">
-            <a:avLst/>
-          </a:prstGeom>
-          <a:noFill/>
-        </p:spPr>
-        <p:txBody>
-          <a:bodyPr wrap="square" anchor="t" lIns="45720" rIns="45720" tIns="27432" bIns="27432">
-            <a:spAutoFit/>
-          </a:bodyPr>
-          <a:lstStyle/>
-          <a:p>
-            <a:pPr algn="l">
-              <a:spcAft>
-                <a:spcPts val="600"/>
-              </a:spcAft>
-            </a:pPr>
-            <a:r>
-              <a:rPr sz="1300" b="0">
-                <a:solidFill>
-                  <a:srgbClr val="0B0B0B"/>
-                </a:solidFill>
-                <a:latin typeface="Calibri"/>
-              </a:rPr>
-              <a:t>•  Template 2FE7:B (GNAT acetyltransferase), 40% identity, 77% coverage.</a:t>
-            </a:r>
-          </a:p>
-          <a:p>
-            <a:pPr algn="l">
-              <a:spcAft>
-                <a:spcPts val="600"/>
-              </a:spcAft>
-            </a:pPr>
-            <a:r>
-              <a:rPr sz="1300" b="0">
-                <a:solidFill>
-                  <a:srgbClr val="0B0B0B"/>
-                </a:solidFill>
-                <a:latin typeface="Calibri"/>
-              </a:rPr>
-              <a:t>•  Template-covered residues: mean Cα error 3.3 Å; the 43 uncovered residues (insertion ~51–113): 24.8 Å.</a:t>
-            </a:r>
-          </a:p>
-        </p:txBody>
-      </p:sp>
-      <p:pic>
-        <p:nvPicPr>
-          <p:cNvPr id="20" name="Picture 19" descr="T1127_per_residue.png"/>
-          <p:cNvPicPr>
-            <a:picLocks noChangeAspect="1"/>
-          </p:cNvPicPr>
-          <p:nvPr/>
-        </p:nvPicPr>
-        <p:blipFill>
-          <a:blip r:embed="rId5"/>
-          <a:stretch>
-            <a:fillRect/>
-          </a:stretch>
-        </p:blipFill>
-        <p:spPr>
-          <a:xfrm>
-            <a:off x="6355080" y="1338580"/>
-            <a:ext cx="5303520" cy="2946400"/>
-          </a:xfrm>
-          <a:prstGeom prst="rect">
-            <a:avLst/>
-          </a:prstGeom>
-        </p:spPr>
-      </p:pic>
-      <p:sp>
-        <p:nvSpPr>
-          <p:cNvPr id="21" name="TextBox 20"/>
-          <p:cNvSpPr txBox="1"/>
-          <p:nvPr/>
-        </p:nvSpPr>
-        <p:spPr>
-          <a:xfrm>
-            <a:off x="6355080" y="4343400"/>
-            <a:ext cx="5303520" cy="320040"/>
-          </a:xfrm>
-          <a:prstGeom prst="rect">
-            <a:avLst/>
-          </a:prstGeom>
-          <a:noFill/>
-        </p:spPr>
-        <p:txBody>
-          <a:bodyPr wrap="square" anchor="t" lIns="45720" rIns="45720" tIns="27432" bIns="27432">
-            <a:spAutoFit/>
-          </a:bodyPr>
-          <a:lstStyle/>
-          <a:p>
-            <a:pPr algn="ctr">
-              <a:spcAft>
-                <a:spcPts val="600"/>
-              </a:spcAft>
-            </a:pPr>
-            <a:r>
-              <a:rPr sz="1100" b="0">
-                <a:solidFill>
-                  <a:srgbClr val="52514E"/>
-                </a:solidFill>
-                <a:latin typeface="Calibri"/>
-              </a:rPr>
-              <a:t>Per-residue error · shaded = aligned to the template</a:t>
-            </a:r>
-          </a:p>
-        </p:txBody>
-      </p:sp>
-      <p:sp>
-        <p:nvSpPr>
-          <p:cNvPr id="22" name="TextBox 21"/>
-          <p:cNvSpPr txBox="1"/>
-          <p:nvPr/>
-        </p:nvSpPr>
-        <p:spPr>
-          <a:xfrm>
-            <a:off x="6355080" y="4754880"/>
-            <a:ext cx="5303520" cy="1645920"/>
-          </a:xfrm>
-          <a:prstGeom prst="rect">
-            <a:avLst/>
-          </a:prstGeom>
-          <a:noFill/>
-        </p:spPr>
-        <p:txBody>
-          <a:bodyPr wrap="square" anchor="t" lIns="45720" rIns="45720" tIns="27432" bIns="27432">
-            <a:spAutoFit/>
-          </a:bodyPr>
-          <a:lstStyle/>
-          <a:p>
-            <a:pPr algn="l">
-              <a:spcAft>
-                <a:spcPts val="600"/>
-              </a:spcAft>
-            </a:pPr>
-            <a:r>
-              <a:rPr sz="1300" b="0">
-                <a:solidFill>
-                  <a:srgbClr val="0B0B0B"/>
-                </a:solidFill>
-                <a:latin typeface="Calibri"/>
-              </a:rPr>
-              <a:t>•  Missing template coverage explains most of MODELLER's error (RMSD 13.5 Å).</a:t>
-            </a:r>
-          </a:p>
-          <a:p>
-            <a:pPr algn="l">
-              <a:spcAft>
-                <a:spcPts val="600"/>
-              </a:spcAft>
-            </a:pPr>
-            <a:r>
-              <a:rPr sz="1300" b="0">
-                <a:solidFill>
-                  <a:srgbClr val="0B0B0B"/>
-                </a:solidFill>
-                <a:latin typeface="Calibri"/>
-              </a:rPr>
-              <a:t>•  AlphaFold3 models the insertion correctly too (0.8 Å on uncovered residues).</a:t>
+              <a:t>•  AlphaFold3 places the N-terminal region correctly; its 6.6 Å RMSD comes from the C-terminal tail (369–384, linker and tag).</a:t>
             </a:r>
           </a:p>
         </p:txBody>

--- a/results/slides.pptx
+++ b/results/slides.pptx
@@ -20,6 +20,7 @@
     <p:sldId id="268" r:id="rId20"/>
     <p:sldId id="269" r:id="rId21"/>
     <p:sldId id="270" r:id="rId22"/>
+    <p:sldId id="271" r:id="rId23"/>
   </p:sldIdLst>
   <p:sldSz cx="12191695" cy="6858000" type="screen4x3"/>
   <p:notesSz cx="6858000" cy="9144000"/>
@@ -1579,7 +1580,7 @@
           <a:lstStyle/>
           <a:p>
             <a:r>
-              <a:t>Three targets is a small sample: these are case studies, not trends.</a:t>
+              <a:t>The TM-score gap is split by template coverage: each model's TM-score is recomputed over template-covered residues only (normalised by the full EU); the rest of the gap is in uncovered residues. The two parts use separate superpositions, so the split is approximate. Homologues at 30–40% identity typically differ by 1.5–2.5 Å, which caps how close a copied template can be.</a:t>
             </a:r>
           </a:p>
         </p:txBody>
@@ -1605,6 +1606,76 @@
 </file>
 
 <file path=ppt/notesSlides/notesSlide14.xml><?xml version="1.0" encoding="utf-8"?>
+<p:notes xmlns:a="http://schemas.openxmlformats.org/drawingml/2006/main" xmlns:p="http://schemas.openxmlformats.org/presentationml/2006/main" xmlns:r="http://schemas.openxmlformats.org/officeDocument/2006/relationships">
+  <p:cSld>
+    <p:spTree>
+      <p:nvGrpSpPr>
+        <p:cNvPr id="1" name=""/>
+        <p:cNvGrpSpPr/>
+        <p:nvPr/>
+      </p:nvGrpSpPr>
+      <p:grpSpPr>
+        <a:xfrm>
+          <a:off x="0" y="0"/>
+          <a:ext cx="0" cy="0"/>
+          <a:chOff x="0" y="0"/>
+          <a:chExt cx="0" cy="0"/>
+        </a:xfrm>
+      </p:grpSpPr>
+      <p:sp>
+        <p:nvSpPr>
+          <p:cNvPr id="2" name="Slide Image Placeholder 1"/>
+          <p:cNvSpPr>
+            <a:spLocks noGrp="1"/>
+          </p:cNvSpPr>
+          <p:nvPr>
+            <p:ph type="sldImg" idx="2"/>
+          </p:nvPr>
+        </p:nvSpPr>
+        <p:spPr/>
+      </p:sp>
+      <p:sp>
+        <p:nvSpPr>
+          <p:cNvPr id="3" name="Notes Placeholder 2"/>
+          <p:cNvSpPr>
+            <a:spLocks noGrp="1"/>
+          </p:cNvSpPr>
+          <p:nvPr>
+            <p:ph type="body" idx="3" sz="quarter"/>
+          </p:nvPr>
+        </p:nvSpPr>
+        <p:spPr/>
+        <p:txBody>
+          <a:bodyPr/>
+          <a:lstStyle/>
+          <a:p>
+            <a:r>
+              <a:t>Three targets is a small sample: these are case studies, not trends.</a:t>
+            </a:r>
+          </a:p>
+        </p:txBody>
+      </p:sp>
+      <p:sp>
+        <p:nvSpPr>
+          <p:cNvPr id="4" name="Slide Number Placeholder 3"/>
+          <p:cNvSpPr>
+            <a:spLocks noGrp="1"/>
+          </p:cNvSpPr>
+          <p:nvPr>
+            <p:ph type="sldNum" idx="5" sz="quarter"/>
+          </p:nvPr>
+        </p:nvSpPr>
+        <p:spPr/>
+      </p:sp>
+    </p:spTree>
+  </p:cSld>
+  <p:clrMapOvr>
+    <a:masterClrMapping/>
+  </p:clrMapOvr>
+</p:notes>
+</file>
+
+<file path=ppt/notesSlides/notesSlide15.xml><?xml version="1.0" encoding="utf-8"?>
 <p:notes xmlns:a="http://schemas.openxmlformats.org/drawingml/2006/main" xmlns:p="http://schemas.openxmlformats.org/presentationml/2006/main" xmlns:r="http://schemas.openxmlformats.org/officeDocument/2006/relationships">
   <p:cSld>
     <p:spTree>
@@ -7899,7 +7970,7 @@
                 </a:solidFill>
                 <a:latin typeface="Calibri"/>
               </a:rPr>
-              <a:t>Key findings</a:t>
+              <a:t>Why is AlphaFold3 so much better?</a:t>
             </a:r>
           </a:p>
         </p:txBody>
@@ -8017,16 +8088,600 @@
           </a:p>
         </p:txBody>
       </p:sp>
-      <p:sp>
-        <p:nvSpPr>
-          <p:cNvPr id="7" name="Rectangle 6"/>
+      <p:graphicFrame>
+        <p:nvGraphicFramePr>
+          <p:cNvPr id="7" name="Table 6"/>
+          <p:cNvGraphicFramePr>
+            <a:graphicFrameLocks noGrp="1"/>
+          </p:cNvGraphicFramePr>
+          <p:nvPr/>
+        </p:nvGraphicFramePr>
+        <p:xfrm>
+          <a:off x="548640" y="1463040"/>
+          <a:ext cx="6035040" cy="1828800"/>
+        </p:xfrm>
+        <a:graphic>
+          <a:graphicData uri="http://schemas.openxmlformats.org/drawingml/2006/table">
+            <a:tbl>
+              <a:tblPr firstRow="1" bandRow="1">
+                <a:tableStyleId>{5C22544A-7EE6-4342-B048-85BDC9FD1C3A}</a:tableStyleId>
+              </a:tblPr>
+              <a:tblGrid>
+                <a:gridCol w="1097280"/>
+                <a:gridCol w="1097280"/>
+                <a:gridCol w="1005840"/>
+                <a:gridCol w="1417320"/>
+                <a:gridCol w="1417320"/>
+              </a:tblGrid>
+              <a:tr h="457200">
+                <a:tc>
+                  <a:txBody>
+                    <a:bodyPr wrap="square"/>
+                    <a:lstStyle/>
+                    <a:p>
+                      <a:pPr algn="l"/>
+                      <a:r>
+                        <a:rPr sz="1300" b="1">
+                          <a:solidFill>
+                            <a:srgbClr val="FFFFFF"/>
+                          </a:solidFill>
+                          <a:latin typeface="Calibri"/>
+                        </a:rPr>
+                        <a:t>Target</a:t>
+                      </a:r>
+                    </a:p>
+                  </a:txBody>
+                  <a:tcPr marL="73152" marR="73152" marT="27432" marB="27432" anchor="ctr">
+                    <a:solidFill>
+                      <a:srgbClr val="0B0B0B"/>
+                    </a:solidFill>
+                  </a:tcPr>
+                </a:tc>
+                <a:tc>
+                  <a:txBody>
+                    <a:bodyPr wrap="square"/>
+                    <a:lstStyle/>
+                    <a:p>
+                      <a:pPr algn="ctr"/>
+                      <a:r>
+                        <a:rPr sz="1300" b="1">
+                          <a:solidFill>
+                            <a:srgbClr val="FFFFFF"/>
+                          </a:solidFill>
+                          <a:latin typeface="Calibri"/>
+                        </a:rPr>
+                        <a:t>EU covered</a:t>
+                      </a:r>
+                    </a:p>
+                  </a:txBody>
+                  <a:tcPr marL="73152" marR="73152" marT="27432" marB="27432" anchor="ctr">
+                    <a:solidFill>
+                      <a:srgbClr val="0B0B0B"/>
+                    </a:solidFill>
+                  </a:tcPr>
+                </a:tc>
+                <a:tc>
+                  <a:txBody>
+                    <a:bodyPr wrap="square"/>
+                    <a:lstStyle/>
+                    <a:p>
+                      <a:pPr algn="ctr"/>
+                      <a:r>
+                        <a:rPr sz="1300" b="1">
+                          <a:solidFill>
+                            <a:srgbClr val="FFFFFF"/>
+                          </a:solidFill>
+                          <a:latin typeface="Calibri"/>
+                        </a:rPr>
+                        <a:t>TM gap</a:t>
+                      </a:r>
+                    </a:p>
+                  </a:txBody>
+                  <a:tcPr marL="73152" marR="73152" marT="27432" marB="27432" anchor="ctr">
+                    <a:solidFill>
+                      <a:srgbClr val="0B0B0B"/>
+                    </a:solidFill>
+                  </a:tcPr>
+                </a:tc>
+                <a:tc>
+                  <a:txBody>
+                    <a:bodyPr wrap="square"/>
+                    <a:lstStyle/>
+                    <a:p>
+                      <a:pPr algn="ctr"/>
+                      <a:r>
+                        <a:rPr sz="1300" b="1">
+                          <a:solidFill>
+                            <a:srgbClr val="FFFFFF"/>
+                          </a:solidFill>
+                          <a:latin typeface="Calibri"/>
+                        </a:rPr>
+                        <a:t>in covered residues</a:t>
+                      </a:r>
+                    </a:p>
+                  </a:txBody>
+                  <a:tcPr marL="73152" marR="73152" marT="27432" marB="27432" anchor="ctr">
+                    <a:solidFill>
+                      <a:srgbClr val="0B0B0B"/>
+                    </a:solidFill>
+                  </a:tcPr>
+                </a:tc>
+                <a:tc>
+                  <a:txBody>
+                    <a:bodyPr wrap="square"/>
+                    <a:lstStyle/>
+                    <a:p>
+                      <a:pPr algn="ctr"/>
+                      <a:r>
+                        <a:rPr sz="1300" b="1">
+                          <a:solidFill>
+                            <a:srgbClr val="FFFFFF"/>
+                          </a:solidFill>
+                          <a:latin typeface="Calibri"/>
+                        </a:rPr>
+                        <a:t>in uncovered residues</a:t>
+                      </a:r>
+                    </a:p>
+                  </a:txBody>
+                  <a:tcPr marL="73152" marR="73152" marT="27432" marB="27432" anchor="ctr">
+                    <a:solidFill>
+                      <a:srgbClr val="0B0B0B"/>
+                    </a:solidFill>
+                  </a:tcPr>
+                </a:tc>
+              </a:tr>
+              <a:tr h="457200">
+                <a:tc>
+                  <a:txBody>
+                    <a:bodyPr wrap="square"/>
+                    <a:lstStyle/>
+                    <a:p>
+                      <a:pPr algn="l"/>
+                      <a:r>
+                        <a:rPr sz="1300" b="0">
+                          <a:solidFill>
+                            <a:srgbClr val="0B0B0B"/>
+                          </a:solidFill>
+                          <a:latin typeface="Calibri"/>
+                        </a:rPr>
+                        <a:t>T1124</a:t>
+                      </a:r>
+                    </a:p>
+                  </a:txBody>
+                  <a:tcPr marL="73152" marR="73152" marT="27432" marB="27432" anchor="ctr">
+                    <a:solidFill>
+                      <a:srgbClr val="FFFFFF"/>
+                    </a:solidFill>
+                  </a:tcPr>
+                </a:tc>
+                <a:tc>
+                  <a:txBody>
+                    <a:bodyPr wrap="square"/>
+                    <a:lstStyle/>
+                    <a:p>
+                      <a:pPr algn="ctr"/>
+                      <a:r>
+                        <a:rPr sz="1300" b="0">
+                          <a:solidFill>
+                            <a:srgbClr val="0B0B0B"/>
+                          </a:solidFill>
+                          <a:latin typeface="Calibri"/>
+                        </a:rPr>
+                        <a:t>83%</a:t>
+                      </a:r>
+                    </a:p>
+                  </a:txBody>
+                  <a:tcPr marL="73152" marR="73152" marT="27432" marB="27432" anchor="ctr">
+                    <a:solidFill>
+                      <a:srgbClr val="FFFFFF"/>
+                    </a:solidFill>
+                  </a:tcPr>
+                </a:tc>
+                <a:tc>
+                  <a:txBody>
+                    <a:bodyPr wrap="square"/>
+                    <a:lstStyle/>
+                    <a:p>
+                      <a:pPr algn="ctr"/>
+                      <a:r>
+                        <a:rPr sz="1300" b="0">
+                          <a:solidFill>
+                            <a:srgbClr val="0B0B0B"/>
+                          </a:solidFill>
+                          <a:latin typeface="Calibri"/>
+                        </a:rPr>
+                        <a:t>+0.40</a:t>
+                      </a:r>
+                    </a:p>
+                  </a:txBody>
+                  <a:tcPr marL="73152" marR="73152" marT="27432" marB="27432" anchor="ctr">
+                    <a:solidFill>
+                      <a:srgbClr val="FFFFFF"/>
+                    </a:solidFill>
+                  </a:tcPr>
+                </a:tc>
+                <a:tc>
+                  <a:txBody>
+                    <a:bodyPr wrap="square"/>
+                    <a:lstStyle/>
+                    <a:p>
+                      <a:pPr algn="ctr"/>
+                      <a:r>
+                        <a:rPr sz="1300" b="0">
+                          <a:solidFill>
+                            <a:srgbClr val="EB6834"/>
+                          </a:solidFill>
+                          <a:latin typeface="Calibri"/>
+                        </a:rPr>
+                        <a:t>+0.29</a:t>
+                      </a:r>
+                    </a:p>
+                  </a:txBody>
+                  <a:tcPr marL="73152" marR="73152" marT="27432" marB="27432" anchor="ctr">
+                    <a:solidFill>
+                      <a:srgbClr val="FFFFFF"/>
+                    </a:solidFill>
+                  </a:tcPr>
+                </a:tc>
+                <a:tc>
+                  <a:txBody>
+                    <a:bodyPr wrap="square"/>
+                    <a:lstStyle/>
+                    <a:p>
+                      <a:pPr algn="ctr"/>
+                      <a:r>
+                        <a:rPr sz="1300" b="0">
+                          <a:solidFill>
+                            <a:srgbClr val="0B0B0B"/>
+                          </a:solidFill>
+                          <a:latin typeface="Calibri"/>
+                        </a:rPr>
+                        <a:t>+0.11</a:t>
+                      </a:r>
+                    </a:p>
+                  </a:txBody>
+                  <a:tcPr marL="73152" marR="73152" marT="27432" marB="27432" anchor="ctr">
+                    <a:solidFill>
+                      <a:srgbClr val="FFFFFF"/>
+                    </a:solidFill>
+                  </a:tcPr>
+                </a:tc>
+              </a:tr>
+              <a:tr h="457200">
+                <a:tc>
+                  <a:txBody>
+                    <a:bodyPr wrap="square"/>
+                    <a:lstStyle/>
+                    <a:p>
+                      <a:pPr algn="l"/>
+                      <a:r>
+                        <a:rPr sz="1300" b="0">
+                          <a:solidFill>
+                            <a:srgbClr val="0B0B0B"/>
+                          </a:solidFill>
+                          <a:latin typeface="Calibri"/>
+                        </a:rPr>
+                        <a:t>T1127</a:t>
+                      </a:r>
+                    </a:p>
+                  </a:txBody>
+                  <a:tcPr marL="73152" marR="73152" marT="27432" marB="27432" anchor="ctr">
+                    <a:solidFill>
+                      <a:srgbClr val="F5F4F1"/>
+                    </a:solidFill>
+                  </a:tcPr>
+                </a:tc>
+                <a:tc>
+                  <a:txBody>
+                    <a:bodyPr wrap="square"/>
+                    <a:lstStyle/>
+                    <a:p>
+                      <a:pPr algn="ctr"/>
+                      <a:r>
+                        <a:rPr sz="1300" b="0">
+                          <a:solidFill>
+                            <a:srgbClr val="0B0B0B"/>
+                          </a:solidFill>
+                          <a:latin typeface="Calibri"/>
+                        </a:rPr>
+                        <a:t>79%</a:t>
+                      </a:r>
+                    </a:p>
+                  </a:txBody>
+                  <a:tcPr marL="73152" marR="73152" marT="27432" marB="27432" anchor="ctr">
+                    <a:solidFill>
+                      <a:srgbClr val="F5F4F1"/>
+                    </a:solidFill>
+                  </a:tcPr>
+                </a:tc>
+                <a:tc>
+                  <a:txBody>
+                    <a:bodyPr wrap="square"/>
+                    <a:lstStyle/>
+                    <a:p>
+                      <a:pPr algn="ctr"/>
+                      <a:r>
+                        <a:rPr sz="1300" b="0">
+                          <a:solidFill>
+                            <a:srgbClr val="0B0B0B"/>
+                          </a:solidFill>
+                          <a:latin typeface="Calibri"/>
+                        </a:rPr>
+                        <a:t>+0.25</a:t>
+                      </a:r>
+                    </a:p>
+                  </a:txBody>
+                  <a:tcPr marL="73152" marR="73152" marT="27432" marB="27432" anchor="ctr">
+                    <a:solidFill>
+                      <a:srgbClr val="F5F4F1"/>
+                    </a:solidFill>
+                  </a:tcPr>
+                </a:tc>
+                <a:tc>
+                  <a:txBody>
+                    <a:bodyPr wrap="square"/>
+                    <a:lstStyle/>
+                    <a:p>
+                      <a:pPr algn="ctr"/>
+                      <a:r>
+                        <a:rPr sz="1300" b="0">
+                          <a:solidFill>
+                            <a:srgbClr val="0B0B0B"/>
+                          </a:solidFill>
+                          <a:latin typeface="Calibri"/>
+                        </a:rPr>
+                        <a:t>+0.08</a:t>
+                      </a:r>
+                    </a:p>
+                  </a:txBody>
+                  <a:tcPr marL="73152" marR="73152" marT="27432" marB="27432" anchor="ctr">
+                    <a:solidFill>
+                      <a:srgbClr val="F5F4F1"/>
+                    </a:solidFill>
+                  </a:tcPr>
+                </a:tc>
+                <a:tc>
+                  <a:txBody>
+                    <a:bodyPr wrap="square"/>
+                    <a:lstStyle/>
+                    <a:p>
+                      <a:pPr algn="ctr"/>
+                      <a:r>
+                        <a:rPr sz="1300" b="0">
+                          <a:solidFill>
+                            <a:srgbClr val="EB6834"/>
+                          </a:solidFill>
+                          <a:latin typeface="Calibri"/>
+                        </a:rPr>
+                        <a:t>+0.17</a:t>
+                      </a:r>
+                    </a:p>
+                  </a:txBody>
+                  <a:tcPr marL="73152" marR="73152" marT="27432" marB="27432" anchor="ctr">
+                    <a:solidFill>
+                      <a:srgbClr val="F5F4F1"/>
+                    </a:solidFill>
+                  </a:tcPr>
+                </a:tc>
+              </a:tr>
+              <a:tr h="457200">
+                <a:tc>
+                  <a:txBody>
+                    <a:bodyPr wrap="square"/>
+                    <a:lstStyle/>
+                    <a:p>
+                      <a:pPr algn="l"/>
+                      <a:r>
+                        <a:rPr sz="1300" b="0">
+                          <a:solidFill>
+                            <a:srgbClr val="0B0B0B"/>
+                          </a:solidFill>
+                          <a:latin typeface="Calibri"/>
+                        </a:rPr>
+                        <a:t>T1151s2</a:t>
+                      </a:r>
+                    </a:p>
+                  </a:txBody>
+                  <a:tcPr marL="73152" marR="73152" marT="27432" marB="27432" anchor="ctr">
+                    <a:solidFill>
+                      <a:srgbClr val="FFFFFF"/>
+                    </a:solidFill>
+                  </a:tcPr>
+                </a:tc>
+                <a:tc>
+                  <a:txBody>
+                    <a:bodyPr wrap="square"/>
+                    <a:lstStyle/>
+                    <a:p>
+                      <a:pPr algn="ctr"/>
+                      <a:r>
+                        <a:rPr sz="1300" b="0">
+                          <a:solidFill>
+                            <a:srgbClr val="0B0B0B"/>
+                          </a:solidFill>
+                          <a:latin typeface="Calibri"/>
+                        </a:rPr>
+                        <a:t>65%</a:t>
+                      </a:r>
+                    </a:p>
+                  </a:txBody>
+                  <a:tcPr marL="73152" marR="73152" marT="27432" marB="27432" anchor="ctr">
+                    <a:solidFill>
+                      <a:srgbClr val="FFFFFF"/>
+                    </a:solidFill>
+                  </a:tcPr>
+                </a:tc>
+                <a:tc>
+                  <a:txBody>
+                    <a:bodyPr wrap="square"/>
+                    <a:lstStyle/>
+                    <a:p>
+                      <a:pPr algn="ctr"/>
+                      <a:r>
+                        <a:rPr sz="1300" b="0">
+                          <a:solidFill>
+                            <a:srgbClr val="0B0B0B"/>
+                          </a:solidFill>
+                          <a:latin typeface="Calibri"/>
+                        </a:rPr>
+                        <a:t>+0.39</a:t>
+                      </a:r>
+                    </a:p>
+                  </a:txBody>
+                  <a:tcPr marL="73152" marR="73152" marT="27432" marB="27432" anchor="ctr">
+                    <a:solidFill>
+                      <a:srgbClr val="FFFFFF"/>
+                    </a:solidFill>
+                  </a:tcPr>
+                </a:tc>
+                <a:tc>
+                  <a:txBody>
+                    <a:bodyPr wrap="square"/>
+                    <a:lstStyle/>
+                    <a:p>
+                      <a:pPr algn="ctr"/>
+                      <a:r>
+                        <a:rPr sz="1300" b="0">
+                          <a:solidFill>
+                            <a:srgbClr val="0B0B0B"/>
+                          </a:solidFill>
+                          <a:latin typeface="Calibri"/>
+                        </a:rPr>
+                        <a:t>+0.11</a:t>
+                      </a:r>
+                    </a:p>
+                  </a:txBody>
+                  <a:tcPr marL="73152" marR="73152" marT="27432" marB="27432" anchor="ctr">
+                    <a:solidFill>
+                      <a:srgbClr val="FFFFFF"/>
+                    </a:solidFill>
+                  </a:tcPr>
+                </a:tc>
+                <a:tc>
+                  <a:txBody>
+                    <a:bodyPr wrap="square"/>
+                    <a:lstStyle/>
+                    <a:p>
+                      <a:pPr algn="ctr"/>
+                      <a:r>
+                        <a:rPr sz="1300" b="0">
+                          <a:solidFill>
+                            <a:srgbClr val="EB6834"/>
+                          </a:solidFill>
+                          <a:latin typeface="Calibri"/>
+                        </a:rPr>
+                        <a:t>+0.28</a:t>
+                      </a:r>
+                    </a:p>
+                  </a:txBody>
+                  <a:tcPr marL="73152" marR="73152" marT="27432" marB="27432" anchor="ctr">
+                    <a:solidFill>
+                      <a:srgbClr val="FFFFFF"/>
+                    </a:solidFill>
+                  </a:tcPr>
+                </a:tc>
+              </a:tr>
+            </a:tbl>
+          </a:graphicData>
+        </a:graphic>
+      </p:graphicFrame>
+      <p:sp>
+        <p:nvSpPr>
+          <p:cNvPr id="8" name="TextBox 7"/>
+          <p:cNvSpPr txBox="1"/>
+          <p:nvPr/>
+        </p:nvSpPr>
+        <p:spPr>
+          <a:xfrm>
+            <a:off x="548640" y="3429000"/>
+            <a:ext cx="6035040" cy="2926080"/>
+          </a:xfrm>
+          <a:prstGeom prst="rect">
+            <a:avLst/>
+          </a:prstGeom>
+          <a:noFill/>
+        </p:spPr>
+        <p:txBody>
+          <a:bodyPr wrap="square" anchor="t" lIns="45720" rIns="45720" tIns="27432" bIns="27432">
+            <a:spAutoFit/>
+          </a:bodyPr>
+          <a:lstStyle/>
+          <a:p>
+            <a:pPr algn="l">
+              <a:spcAft>
+                <a:spcPts val="600"/>
+              </a:spcAft>
+            </a:pPr>
+            <a:r>
+              <a:rPr sz="1400" b="1">
+                <a:solidFill>
+                  <a:srgbClr val="0B0B0B"/>
+                </a:solidFill>
+                <a:latin typeface="Calibri"/>
+              </a:rPr>
+              <a:t>Where MODELLER loses (larger share in orange):</a:t>
+            </a:r>
+          </a:p>
+          <a:p>
+            <a:pPr algn="l">
+              <a:spcAft>
+                <a:spcPts val="600"/>
+              </a:spcAft>
+            </a:pPr>
+            <a:r>
+              <a:rPr sz="1300" b="0">
+                <a:solidFill>
+                  <a:srgbClr val="0B0B0B"/>
+                </a:solidFill>
+                <a:latin typeface="Calibri"/>
+              </a:rPr>
+              <a:t>No template, no structure: the T1127 insertion and the T1151s2 tail exist in no template, so MODELLER guesses them (22–35 Å off).</a:t>
+            </a:r>
+          </a:p>
+          <a:p>
+            <a:pPr algn="l">
+              <a:spcAft>
+                <a:spcPts val="600"/>
+              </a:spcAft>
+            </a:pPr>
+            <a:r>
+              <a:rPr sz="1300" b="0">
+                <a:solidFill>
+                  <a:srgbClr val="0B0B0B"/>
+                </a:solidFill>
+                <a:latin typeface="Calibri"/>
+              </a:rPr>
+              <a:t>Covered but misplaced: T1124's N-terminal domain is template-covered (27% identity) yet lands 38 Å from the native; the domain arrangement is wrong.</a:t>
+            </a:r>
+          </a:p>
+          <a:p>
+            <a:pPr algn="l">
+              <a:spcAft>
+                <a:spcPts val="600"/>
+              </a:spcAft>
+            </a:pPr>
+            <a:r>
+              <a:rPr sz="1300" b="0">
+                <a:solidFill>
+                  <a:srgbClr val="0B0B0B"/>
+                </a:solidFill>
+                <a:latin typeface="Calibri"/>
+              </a:rPr>
+              <a:t>Copying a relative caps accuracy: covered core 3.2 Å (T1127) and 2.2 Å (T1151s2) Cα RMSD vs 0.8 / 0.7 Å for AlphaFold3 on the same residues.</a:t>
+            </a:r>
+          </a:p>
+        </p:txBody>
+      </p:sp>
+      <p:sp>
+        <p:nvSpPr>
+          <p:cNvPr id="9" name="Rectangle 8"/>
           <p:cNvSpPr/>
           <p:nvPr/>
         </p:nvSpPr>
         <p:spPr>
           <a:xfrm>
-            <a:off x="548640" y="1463040"/>
-            <a:ext cx="5440680" cy="2103120"/>
+            <a:off x="6949440" y="1463040"/>
+            <a:ext cx="4663440" cy="4663440"/>
           </a:xfrm>
           <a:prstGeom prst="rect">
             <a:avLst/>
@@ -8063,20 +8718,20 @@
       </p:sp>
       <p:sp>
         <p:nvSpPr>
-          <p:cNvPr id="8" name="Rectangle 7"/>
+          <p:cNvPr id="10" name="Rectangle 9"/>
           <p:cNvSpPr/>
           <p:nvPr/>
         </p:nvSpPr>
         <p:spPr>
           <a:xfrm>
-            <a:off x="548640" y="1463040"/>
-            <a:ext cx="82296" cy="2103120"/>
+            <a:off x="6949440" y="1463040"/>
+            <a:ext cx="82296" cy="4663440"/>
           </a:xfrm>
           <a:prstGeom prst="rect">
             <a:avLst/>
           </a:prstGeom>
           <a:solidFill>
-            <a:srgbClr val="2A78D6"/>
+            <a:srgbClr val="EB6834"/>
           </a:solidFill>
           <a:ln>
             <a:noFill/>
@@ -8107,14 +8762,14 @@
       </p:sp>
       <p:sp>
         <p:nvSpPr>
-          <p:cNvPr id="9" name="TextBox 8"/>
+          <p:cNvPr id="11" name="TextBox 10"/>
           <p:cNvSpPr txBox="1"/>
           <p:nvPr/>
         </p:nvSpPr>
         <p:spPr>
           <a:xfrm>
-            <a:off x="822959" y="1645920"/>
-            <a:ext cx="5029200" cy="457200"/>
+            <a:off x="7223760" y="1645920"/>
+            <a:ext cx="4206240" cy="4389120"/>
           </a:xfrm>
           <a:prstGeom prst="rect">
             <a:avLst/>
@@ -8129,554 +8784,81 @@
           <a:p>
             <a:pPr algn="l">
               <a:spcAft>
-                <a:spcPts val="600"/>
+                <a:spcPts val="1000"/>
               </a:spcAft>
             </a:pPr>
             <a:r>
-              <a:rPr sz="1900" b="1">
+              <a:rPr sz="1700" b="1">
                 <a:solidFill>
                   <a:srgbClr val="0B0B0B"/>
                 </a:solidFill>
                 <a:latin typeface="Calibri"/>
               </a:rPr>
-              <a:t>Template coverage sets the ceiling</a:t>
-            </a:r>
-          </a:p>
-        </p:txBody>
-      </p:sp>
-      <p:sp>
-        <p:nvSpPr>
-          <p:cNvPr id="10" name="TextBox 9"/>
-          <p:cNvSpPr txBox="1"/>
-          <p:nvPr/>
-        </p:nvSpPr>
-        <p:spPr>
-          <a:xfrm>
-            <a:off x="822959" y="2194560"/>
-            <a:ext cx="5029200" cy="1280160"/>
-          </a:xfrm>
-          <a:prstGeom prst="rect">
-            <a:avLst/>
-          </a:prstGeom>
-          <a:noFill/>
-        </p:spPr>
-        <p:txBody>
-          <a:bodyPr wrap="square" anchor="t" lIns="45720" rIns="45720" tIns="27432" bIns="27432">
-            <a:spAutoFit/>
-          </a:bodyPr>
-          <a:lstStyle/>
+              <a:t>Why AlphaFold3 avoids this</a:t>
+            </a:r>
+          </a:p>
           <a:p>
             <a:pPr algn="l">
               <a:spcAft>
-                <a:spcPts val="600"/>
+                <a:spcPts val="1000"/>
               </a:spcAft>
             </a:pPr>
             <a:r>
               <a:rPr sz="1400" b="0">
                 <a:solidFill>
-                  <a:srgbClr val="52514E"/>
-                </a:solidFill>
-                <a:latin typeface="Calibri"/>
-              </a:rPr>
-              <a:t>Covered residues: 1.9 Å (T1127), 1.7 Å (T1151s2) mean Cα error. Uncovered: 22–35 Å. Residues without a template are essentially guessed.</a:t>
-            </a:r>
-          </a:p>
-        </p:txBody>
-      </p:sp>
-      <p:sp>
-        <p:nvSpPr>
-          <p:cNvPr id="11" name="Rectangle 10"/>
-          <p:cNvSpPr/>
-          <p:nvPr/>
-        </p:nvSpPr>
-        <p:spPr>
-          <a:xfrm>
-            <a:off x="6172200" y="1463040"/>
-            <a:ext cx="5440680" cy="2103120"/>
-          </a:xfrm>
-          <a:prstGeom prst="rect">
-            <a:avLst/>
-          </a:prstGeom>
-          <a:solidFill>
-            <a:srgbClr val="F5F4F1"/>
-          </a:solidFill>
-          <a:ln>
-            <a:noFill/>
-          </a:ln>
-          <a:effectLst/>
-        </p:spPr>
-        <p:style>
-          <a:lnRef idx="1">
-            <a:schemeClr val="accent1"/>
-          </a:lnRef>
-          <a:fillRef idx="3">
-            <a:schemeClr val="accent1"/>
-          </a:fillRef>
-          <a:effectRef idx="2">
-            <a:schemeClr val="accent1"/>
-          </a:effectRef>
-          <a:fontRef idx="minor">
-            <a:schemeClr val="lt1"/>
-          </a:fontRef>
-        </p:style>
-        <p:txBody>
-          <a:bodyPr rtlCol="0" anchor="ctr"/>
-          <a:lstStyle/>
-          <a:p>
-            <a:pPr algn="ctr"/>
-          </a:p>
-        </p:txBody>
-      </p:sp>
-      <p:sp>
-        <p:nvSpPr>
-          <p:cNvPr id="12" name="Rectangle 11"/>
-          <p:cNvSpPr/>
-          <p:nvPr/>
-        </p:nvSpPr>
-        <p:spPr>
-          <a:xfrm>
-            <a:off x="6172200" y="1463040"/>
-            <a:ext cx="82296" cy="2103120"/>
-          </a:xfrm>
-          <a:prstGeom prst="rect">
-            <a:avLst/>
-          </a:prstGeom>
-          <a:solidFill>
-            <a:srgbClr val="2A78D6"/>
-          </a:solidFill>
-          <a:ln>
-            <a:noFill/>
-          </a:ln>
-          <a:effectLst/>
-        </p:spPr>
-        <p:style>
-          <a:lnRef idx="1">
-            <a:schemeClr val="accent1"/>
-          </a:lnRef>
-          <a:fillRef idx="3">
-            <a:schemeClr val="accent1"/>
-          </a:fillRef>
-          <a:effectRef idx="2">
-            <a:schemeClr val="accent1"/>
-          </a:effectRef>
-          <a:fontRef idx="minor">
-            <a:schemeClr val="lt1"/>
-          </a:fontRef>
-        </p:style>
-        <p:txBody>
-          <a:bodyPr rtlCol="0" anchor="ctr"/>
-          <a:lstStyle/>
-          <a:p>
-            <a:pPr algn="ctr"/>
-          </a:p>
-        </p:txBody>
-      </p:sp>
-      <p:sp>
-        <p:nvSpPr>
-          <p:cNvPr id="13" name="TextBox 12"/>
-          <p:cNvSpPr txBox="1"/>
-          <p:nvPr/>
-        </p:nvSpPr>
-        <p:spPr>
-          <a:xfrm>
-            <a:off x="6446520" y="1645920"/>
-            <a:ext cx="5029200" cy="457200"/>
-          </a:xfrm>
-          <a:prstGeom prst="rect">
-            <a:avLst/>
-          </a:prstGeom>
-          <a:noFill/>
-        </p:spPr>
-        <p:txBody>
-          <a:bodyPr wrap="square" anchor="t" lIns="45720" rIns="45720" tIns="27432" bIns="27432">
-            <a:spAutoFit/>
-          </a:bodyPr>
-          <a:lstStyle/>
+                  <a:srgbClr val="0B0B0B"/>
+                </a:solidFill>
+                <a:latin typeface="Calibri"/>
+              </a:rPr>
+              <a:t>Learned from the whole PDB: it predicts this sequence's own structure instead of copying one relative's coordinates.</a:t>
+            </a:r>
+          </a:p>
           <a:p>
             <a:pPr algn="l">
               <a:spcAft>
-                <a:spcPts val="600"/>
+                <a:spcPts val="1000"/>
               </a:spcAft>
             </a:pPr>
             <a:r>
-              <a:rPr sz="1900" b="1">
+              <a:rPr sz="1400" b="0">
                 <a:solidFill>
                   <a:srgbClr val="0B0B0B"/>
                 </a:solidFill>
                 <a:latin typeface="Calibri"/>
               </a:rPr>
-              <a:t>Coverage is not enough</a:t>
-            </a:r>
-          </a:p>
-        </p:txBody>
-      </p:sp>
-      <p:sp>
-        <p:nvSpPr>
-          <p:cNvPr id="14" name="TextBox 13"/>
-          <p:cNvSpPr txBox="1"/>
-          <p:nvPr/>
-        </p:nvSpPr>
-        <p:spPr>
-          <a:xfrm>
-            <a:off x="6446520" y="2194560"/>
-            <a:ext cx="5029200" cy="1280160"/>
-          </a:xfrm>
-          <a:prstGeom prst="rect">
-            <a:avLst/>
-          </a:prstGeom>
-          <a:noFill/>
-        </p:spPr>
-        <p:txBody>
-          <a:bodyPr wrap="square" anchor="t" lIns="45720" rIns="45720" tIns="27432" bIns="27432">
-            <a:spAutoFit/>
-          </a:bodyPr>
-          <a:lstStyle/>
+              <a:t>Co-evolution from deep sequence alignments: positions that mutate together are in contact, which constrains regions no template covers.</a:t>
+            </a:r>
+          </a:p>
           <a:p>
             <a:pPr algn="l">
               <a:spcAft>
-                <a:spcPts val="600"/>
+                <a:spcPts val="1000"/>
               </a:spcAft>
             </a:pPr>
             <a:r>
               <a:rPr sz="1400" b="0">
                 <a:solidFill>
-                  <a:srgbClr val="52514E"/>
-                </a:solidFill>
-                <a:latin typeface="Calibri"/>
-              </a:rPr>
-              <a:t>T1124: 81% aligned, but a whole domain is misplaced. At ~27% identity a single template can carry the wrong domain arrangement.</a:t>
-            </a:r>
-          </a:p>
-        </p:txBody>
-      </p:sp>
-      <p:sp>
-        <p:nvSpPr>
-          <p:cNvPr id="15" name="Rectangle 14"/>
-          <p:cNvSpPr/>
-          <p:nvPr/>
-        </p:nvSpPr>
-        <p:spPr>
-          <a:xfrm>
-            <a:off x="548640" y="3794760"/>
-            <a:ext cx="5440680" cy="2103120"/>
-          </a:xfrm>
-          <a:prstGeom prst="rect">
-            <a:avLst/>
-          </a:prstGeom>
-          <a:solidFill>
-            <a:srgbClr val="F5F4F1"/>
-          </a:solidFill>
-          <a:ln>
-            <a:noFill/>
-          </a:ln>
-          <a:effectLst/>
-        </p:spPr>
-        <p:style>
-          <a:lnRef idx="1">
-            <a:schemeClr val="accent1"/>
-          </a:lnRef>
-          <a:fillRef idx="3">
-            <a:schemeClr val="accent1"/>
-          </a:fillRef>
-          <a:effectRef idx="2">
-            <a:schemeClr val="accent1"/>
-          </a:effectRef>
-          <a:fontRef idx="minor">
-            <a:schemeClr val="lt1"/>
-          </a:fontRef>
-        </p:style>
-        <p:txBody>
-          <a:bodyPr rtlCol="0" anchor="ctr"/>
-          <a:lstStyle/>
-          <a:p>
-            <a:pPr algn="ctr"/>
-          </a:p>
-        </p:txBody>
-      </p:sp>
-      <p:sp>
-        <p:nvSpPr>
-          <p:cNvPr id="16" name="Rectangle 15"/>
-          <p:cNvSpPr/>
-          <p:nvPr/>
-        </p:nvSpPr>
-        <p:spPr>
-          <a:xfrm>
-            <a:off x="548640" y="3794760"/>
-            <a:ext cx="82296" cy="2103120"/>
-          </a:xfrm>
-          <a:prstGeom prst="rect">
-            <a:avLst/>
-          </a:prstGeom>
-          <a:solidFill>
-            <a:srgbClr val="EB6834"/>
-          </a:solidFill>
-          <a:ln>
-            <a:noFill/>
-          </a:ln>
-          <a:effectLst/>
-        </p:spPr>
-        <p:style>
-          <a:lnRef idx="1">
-            <a:schemeClr val="accent1"/>
-          </a:lnRef>
-          <a:fillRef idx="3">
-            <a:schemeClr val="accent1"/>
-          </a:fillRef>
-          <a:effectRef idx="2">
-            <a:schemeClr val="accent1"/>
-          </a:effectRef>
-          <a:fontRef idx="minor">
-            <a:schemeClr val="lt1"/>
-          </a:fontRef>
-        </p:style>
-        <p:txBody>
-          <a:bodyPr rtlCol="0" anchor="ctr"/>
-          <a:lstStyle/>
-          <a:p>
-            <a:pPr algn="ctr"/>
-          </a:p>
-        </p:txBody>
-      </p:sp>
-      <p:sp>
-        <p:nvSpPr>
-          <p:cNvPr id="17" name="TextBox 16"/>
-          <p:cNvSpPr txBox="1"/>
-          <p:nvPr/>
-        </p:nvSpPr>
-        <p:spPr>
-          <a:xfrm>
-            <a:off x="822959" y="3977640"/>
-            <a:ext cx="5029200" cy="457200"/>
-          </a:xfrm>
-          <a:prstGeom prst="rect">
-            <a:avLst/>
-          </a:prstGeom>
-          <a:noFill/>
-        </p:spPr>
-        <p:txBody>
-          <a:bodyPr wrap="square" anchor="t" lIns="45720" rIns="45720" tIns="27432" bIns="27432">
-            <a:spAutoFit/>
-          </a:bodyPr>
-          <a:lstStyle/>
+                  <a:srgbClr val="0B0B0B"/>
+                </a:solidFill>
+                <a:latin typeface="Calibri"/>
+              </a:rPr>
+              <a:t>Templates are hints, not scaffolds: several are combined and adjusted to the target, so domain arrangement is not inherited from one homologue.</a:t>
+            </a:r>
+          </a:p>
           <a:p>
             <a:pPr algn="l">
               <a:spcAft>
-                <a:spcPts val="600"/>
+                <a:spcPts val="1000"/>
               </a:spcAft>
             </a:pPr>
             <a:r>
-              <a:rPr sz="1900" b="1">
-                <a:solidFill>
-                  <a:srgbClr val="0B0B0B"/>
-                </a:solidFill>
-                <a:latin typeface="Calibri"/>
-              </a:rPr>
-              <a:t>Profile search finds remote templates</a:t>
-            </a:r>
-          </a:p>
-        </p:txBody>
-      </p:sp>
-      <p:sp>
-        <p:nvSpPr>
-          <p:cNvPr id="18" name="TextBox 17"/>
-          <p:cNvSpPr txBox="1"/>
-          <p:nvPr/>
-        </p:nvSpPr>
-        <p:spPr>
-          <a:xfrm>
-            <a:off x="822959" y="4526280"/>
-            <a:ext cx="5029200" cy="1280160"/>
-          </a:xfrm>
-          <a:prstGeom prst="rect">
-            <a:avLst/>
-          </a:prstGeom>
-          <a:noFill/>
-        </p:spPr>
-        <p:txBody>
-          <a:bodyPr wrap="square" anchor="t" lIns="45720" rIns="45720" tIns="27432" bIns="27432">
-            <a:spAutoFit/>
-          </a:bodyPr>
-          <a:lstStyle/>
-          <a:p>
-            <a:pPr algn="l">
-              <a:spcAft>
-                <a:spcPts val="600"/>
-              </a:spcAft>
-            </a:pPr>
-            <a:r>
               <a:rPr sz="1400" b="0">
                 <a:solidFill>
                   <a:srgbClr val="52514E"/>
                 </a:solidFill>
                 <a:latin typeface="Calibri"/>
               </a:rPr>
-              <a:t>T1151s2 (FM/TBM): WhiB-family templates at 38% identity over 55 residues (E ≈ 1e-22) give an accurate core, TM 0.52.</a:t>
-            </a:r>
-          </a:p>
-        </p:txBody>
-      </p:sp>
-      <p:sp>
-        <p:nvSpPr>
-          <p:cNvPr id="19" name="Rectangle 18"/>
-          <p:cNvSpPr/>
-          <p:nvPr/>
-        </p:nvSpPr>
-        <p:spPr>
-          <a:xfrm>
-            <a:off x="6172200" y="3794760"/>
-            <a:ext cx="5440680" cy="2103120"/>
-          </a:xfrm>
-          <a:prstGeom prst="rect">
-            <a:avLst/>
-          </a:prstGeom>
-          <a:solidFill>
-            <a:srgbClr val="F5F4F1"/>
-          </a:solidFill>
-          <a:ln>
-            <a:noFill/>
-          </a:ln>
-          <a:effectLst/>
-        </p:spPr>
-        <p:style>
-          <a:lnRef idx="1">
-            <a:schemeClr val="accent1"/>
-          </a:lnRef>
-          <a:fillRef idx="3">
-            <a:schemeClr val="accent1"/>
-          </a:fillRef>
-          <a:effectRef idx="2">
-            <a:schemeClr val="accent1"/>
-          </a:effectRef>
-          <a:fontRef idx="minor">
-            <a:schemeClr val="lt1"/>
-          </a:fontRef>
-        </p:style>
-        <p:txBody>
-          <a:bodyPr rtlCol="0" anchor="ctr"/>
-          <a:lstStyle/>
-          <a:p>
-            <a:pPr algn="ctr"/>
-          </a:p>
-        </p:txBody>
-      </p:sp>
-      <p:sp>
-        <p:nvSpPr>
-          <p:cNvPr id="20" name="Rectangle 19"/>
-          <p:cNvSpPr/>
-          <p:nvPr/>
-        </p:nvSpPr>
-        <p:spPr>
-          <a:xfrm>
-            <a:off x="6172200" y="3794760"/>
-            <a:ext cx="82296" cy="2103120"/>
-          </a:xfrm>
-          <a:prstGeom prst="rect">
-            <a:avLst/>
-          </a:prstGeom>
-          <a:solidFill>
-            <a:srgbClr val="EB6834"/>
-          </a:solidFill>
-          <a:ln>
-            <a:noFill/>
-          </a:ln>
-          <a:effectLst/>
-        </p:spPr>
-        <p:style>
-          <a:lnRef idx="1">
-            <a:schemeClr val="accent1"/>
-          </a:lnRef>
-          <a:fillRef idx="3">
-            <a:schemeClr val="accent1"/>
-          </a:fillRef>
-          <a:effectRef idx="2">
-            <a:schemeClr val="accent1"/>
-          </a:effectRef>
-          <a:fontRef idx="minor">
-            <a:schemeClr val="lt1"/>
-          </a:fontRef>
-        </p:style>
-        <p:txBody>
-          <a:bodyPr rtlCol="0" anchor="ctr"/>
-          <a:lstStyle/>
-          <a:p>
-            <a:pPr algn="ctr"/>
-          </a:p>
-        </p:txBody>
-      </p:sp>
-      <p:sp>
-        <p:nvSpPr>
-          <p:cNvPr id="21" name="TextBox 20"/>
-          <p:cNvSpPr txBox="1"/>
-          <p:nvPr/>
-        </p:nvSpPr>
-        <p:spPr>
-          <a:xfrm>
-            <a:off x="6446520" y="3977640"/>
-            <a:ext cx="5029200" cy="457200"/>
-          </a:xfrm>
-          <a:prstGeom prst="rect">
-            <a:avLst/>
-          </a:prstGeom>
-          <a:noFill/>
-        </p:spPr>
-        <p:txBody>
-          <a:bodyPr wrap="square" anchor="t" lIns="45720" rIns="45720" tIns="27432" bIns="27432">
-            <a:spAutoFit/>
-          </a:bodyPr>
-          <a:lstStyle/>
-          <a:p>
-            <a:pPr algn="l">
-              <a:spcAft>
-                <a:spcPts val="600"/>
-              </a:spcAft>
-            </a:pPr>
-            <a:r>
-              <a:rPr sz="1900" b="1">
-                <a:solidFill>
-                  <a:srgbClr val="0B0B0B"/>
-                </a:solidFill>
-                <a:latin typeface="Calibri"/>
-              </a:rPr>
-              <a:t>AlphaFold3 fills the gaps</a:t>
-            </a:r>
-          </a:p>
-        </p:txBody>
-      </p:sp>
-      <p:sp>
-        <p:nvSpPr>
-          <p:cNvPr id="22" name="TextBox 21"/>
-          <p:cNvSpPr txBox="1"/>
-          <p:nvPr/>
-        </p:nvSpPr>
-        <p:spPr>
-          <a:xfrm>
-            <a:off x="6446520" y="4526280"/>
-            <a:ext cx="5029200" cy="1280160"/>
-          </a:xfrm>
-          <a:prstGeom prst="rect">
-            <a:avLst/>
-          </a:prstGeom>
-          <a:noFill/>
-        </p:spPr>
-        <p:txBody>
-          <a:bodyPr wrap="square" anchor="t" lIns="45720" rIns="45720" tIns="27432" bIns="27432">
-            <a:spAutoFit/>
-          </a:bodyPr>
-          <a:lstStyle/>
-          <a:p>
-            <a:pPr algn="l">
-              <a:spcAft>
-                <a:spcPts val="600"/>
-              </a:spcAft>
-            </a:pPr>
-            <a:r>
-              <a:rPr sz="1400" b="0">
-                <a:solidFill>
-                  <a:srgbClr val="52514E"/>
-                </a:solidFill>
-                <a:latin typeface="Calibri"/>
-              </a:rPr>
-              <a:t>TM 0.92–0.97 on all three, including the T1127 insertion and the T1151s2 tail. Remaining errors are at disordered termini.</a:t>
+              <a:t>Result: accurate even where MODELLER had nothing (T1127 insertion 0.9 Å, T1151s2 tail 1.5 Å).</a:t>
             </a:r>
           </a:p>
         </p:txBody>
@@ -8772,7 +8954,7 @@
                 </a:solidFill>
                 <a:latin typeface="Calibri"/>
               </a:rPr>
-              <a:t>Limitations</a:t>
+              <a:t>Key findings</a:t>
             </a:r>
           </a:p>
         </p:txBody>
@@ -8892,14 +9074,102 @@
       </p:sp>
       <p:sp>
         <p:nvSpPr>
-          <p:cNvPr id="7" name="TextBox 6"/>
+          <p:cNvPr id="7" name="Rectangle 6"/>
+          <p:cNvSpPr/>
+          <p:nvPr/>
+        </p:nvSpPr>
+        <p:spPr>
+          <a:xfrm>
+            <a:off x="548640" y="1463040"/>
+            <a:ext cx="5440680" cy="2103120"/>
+          </a:xfrm>
+          <a:prstGeom prst="rect">
+            <a:avLst/>
+          </a:prstGeom>
+          <a:solidFill>
+            <a:srgbClr val="F5F4F1"/>
+          </a:solidFill>
+          <a:ln>
+            <a:noFill/>
+          </a:ln>
+          <a:effectLst/>
+        </p:spPr>
+        <p:style>
+          <a:lnRef idx="1">
+            <a:schemeClr val="accent1"/>
+          </a:lnRef>
+          <a:fillRef idx="3">
+            <a:schemeClr val="accent1"/>
+          </a:fillRef>
+          <a:effectRef idx="2">
+            <a:schemeClr val="accent1"/>
+          </a:effectRef>
+          <a:fontRef idx="minor">
+            <a:schemeClr val="lt1"/>
+          </a:fontRef>
+        </p:style>
+        <p:txBody>
+          <a:bodyPr rtlCol="0" anchor="ctr"/>
+          <a:lstStyle/>
+          <a:p>
+            <a:pPr algn="ctr"/>
+          </a:p>
+        </p:txBody>
+      </p:sp>
+      <p:sp>
+        <p:nvSpPr>
+          <p:cNvPr id="8" name="Rectangle 7"/>
+          <p:cNvSpPr/>
+          <p:nvPr/>
+        </p:nvSpPr>
+        <p:spPr>
+          <a:xfrm>
+            <a:off x="548640" y="1463040"/>
+            <a:ext cx="82296" cy="2103120"/>
+          </a:xfrm>
+          <a:prstGeom prst="rect">
+            <a:avLst/>
+          </a:prstGeom>
+          <a:solidFill>
+            <a:srgbClr val="2A78D6"/>
+          </a:solidFill>
+          <a:ln>
+            <a:noFill/>
+          </a:ln>
+          <a:effectLst/>
+        </p:spPr>
+        <p:style>
+          <a:lnRef idx="1">
+            <a:schemeClr val="accent1"/>
+          </a:lnRef>
+          <a:fillRef idx="3">
+            <a:schemeClr val="accent1"/>
+          </a:fillRef>
+          <a:effectRef idx="2">
+            <a:schemeClr val="accent1"/>
+          </a:effectRef>
+          <a:fontRef idx="minor">
+            <a:schemeClr val="lt1"/>
+          </a:fontRef>
+        </p:style>
+        <p:txBody>
+          <a:bodyPr rtlCol="0" anchor="ctr"/>
+          <a:lstStyle/>
+          <a:p>
+            <a:pPr algn="ctr"/>
+          </a:p>
+        </p:txBody>
+      </p:sp>
+      <p:sp>
+        <p:nvSpPr>
+          <p:cNvPr id="9" name="TextBox 8"/>
           <p:cNvSpPr txBox="1"/>
           <p:nvPr/>
         </p:nvSpPr>
         <p:spPr>
           <a:xfrm>
-            <a:off x="548640" y="1463040"/>
-            <a:ext cx="11064240" cy="4572000"/>
+            <a:off x="822959" y="1645920"/>
+            <a:ext cx="5029200" cy="457200"/>
           </a:xfrm>
           <a:prstGeom prst="rect">
             <a:avLst/>
@@ -8914,81 +9184,554 @@
           <a:p>
             <a:pPr algn="l">
               <a:spcAft>
-                <a:spcPts val="1200"/>
+                <a:spcPts val="600"/>
               </a:spcAft>
             </a:pPr>
             <a:r>
-              <a:rPr sz="1600" b="0">
+              <a:rPr sz="1900" b="1">
                 <a:solidFill>
                   <a:srgbClr val="0B0B0B"/>
                 </a:solidFill>
                 <a:latin typeface="Calibri"/>
               </a:rPr>
-              <a:t>•  Three targets, one MODELLER and one AlphaFold3 model each: case studies, not trends.</a:t>
-            </a:r>
-          </a:p>
+              <a:t>Template coverage sets the ceiling</a:t>
+            </a:r>
+          </a:p>
+        </p:txBody>
+      </p:sp>
+      <p:sp>
+        <p:nvSpPr>
+          <p:cNvPr id="10" name="TextBox 9"/>
+          <p:cNvSpPr txBox="1"/>
+          <p:nvPr/>
+        </p:nvSpPr>
+        <p:spPr>
+          <a:xfrm>
+            <a:off x="822959" y="2194560"/>
+            <a:ext cx="5029200" cy="1280160"/>
+          </a:xfrm>
+          <a:prstGeom prst="rect">
+            <a:avLst/>
+          </a:prstGeom>
+          <a:noFill/>
+        </p:spPr>
+        <p:txBody>
+          <a:bodyPr wrap="square" anchor="t" lIns="45720" rIns="45720" tIns="27432" bIns="27432">
+            <a:spAutoFit/>
+          </a:bodyPr>
+          <a:lstStyle/>
           <a:p>
             <a:pPr algn="l">
               <a:spcAft>
-                <a:spcPts val="1200"/>
+                <a:spcPts val="600"/>
               </a:spcAft>
             </a:pPr>
             <a:r>
-              <a:rPr sz="1600" b="0">
-                <a:solidFill>
-                  <a:srgbClr val="0B0B0B"/>
-                </a:solidFill>
-                <a:latin typeface="Calibri"/>
-              </a:rPr>
-              <a:t>•  Only single-template models; combining templates or modelling the T1124 dimer might fix part of the uncovered or misplaced regions.</a:t>
-            </a:r>
-          </a:p>
+              <a:rPr sz="1400" b="0">
+                <a:solidFill>
+                  <a:srgbClr val="52514E"/>
+                </a:solidFill>
+                <a:latin typeface="Calibri"/>
+              </a:rPr>
+              <a:t>Covered residues: 1.9 Å (T1127), 1.7 Å (T1151s2) mean Cα error. Uncovered: 22–35 Å. Residues without a template are essentially guessed.</a:t>
+            </a:r>
+          </a:p>
+        </p:txBody>
+      </p:sp>
+      <p:sp>
+        <p:nvSpPr>
+          <p:cNvPr id="11" name="Rectangle 10"/>
+          <p:cNvSpPr/>
+          <p:nvPr/>
+        </p:nvSpPr>
+        <p:spPr>
+          <a:xfrm>
+            <a:off x="6172200" y="1463040"/>
+            <a:ext cx="5440680" cy="2103120"/>
+          </a:xfrm>
+          <a:prstGeom prst="rect">
+            <a:avLst/>
+          </a:prstGeom>
+          <a:solidFill>
+            <a:srgbClr val="F5F4F1"/>
+          </a:solidFill>
+          <a:ln>
+            <a:noFill/>
+          </a:ln>
+          <a:effectLst/>
+        </p:spPr>
+        <p:style>
+          <a:lnRef idx="1">
+            <a:schemeClr val="accent1"/>
+          </a:lnRef>
+          <a:fillRef idx="3">
+            <a:schemeClr val="accent1"/>
+          </a:fillRef>
+          <a:effectRef idx="2">
+            <a:schemeClr val="accent1"/>
+          </a:effectRef>
+          <a:fontRef idx="minor">
+            <a:schemeClr val="lt1"/>
+          </a:fontRef>
+        </p:style>
+        <p:txBody>
+          <a:bodyPr rtlCol="0" anchor="ctr"/>
+          <a:lstStyle/>
+          <a:p>
+            <a:pPr algn="ctr"/>
+          </a:p>
+        </p:txBody>
+      </p:sp>
+      <p:sp>
+        <p:nvSpPr>
+          <p:cNvPr id="12" name="Rectangle 11"/>
+          <p:cNvSpPr/>
+          <p:nvPr/>
+        </p:nvSpPr>
+        <p:spPr>
+          <a:xfrm>
+            <a:off x="6172200" y="1463040"/>
+            <a:ext cx="82296" cy="2103120"/>
+          </a:xfrm>
+          <a:prstGeom prst="rect">
+            <a:avLst/>
+          </a:prstGeom>
+          <a:solidFill>
+            <a:srgbClr val="2A78D6"/>
+          </a:solidFill>
+          <a:ln>
+            <a:noFill/>
+          </a:ln>
+          <a:effectLst/>
+        </p:spPr>
+        <p:style>
+          <a:lnRef idx="1">
+            <a:schemeClr val="accent1"/>
+          </a:lnRef>
+          <a:fillRef idx="3">
+            <a:schemeClr val="accent1"/>
+          </a:fillRef>
+          <a:effectRef idx="2">
+            <a:schemeClr val="accent1"/>
+          </a:effectRef>
+          <a:fontRef idx="minor">
+            <a:schemeClr val="lt1"/>
+          </a:fontRef>
+        </p:style>
+        <p:txBody>
+          <a:bodyPr rtlCol="0" anchor="ctr"/>
+          <a:lstStyle/>
+          <a:p>
+            <a:pPr algn="ctr"/>
+          </a:p>
+        </p:txBody>
+      </p:sp>
+      <p:sp>
+        <p:nvSpPr>
+          <p:cNvPr id="13" name="TextBox 12"/>
+          <p:cNvSpPr txBox="1"/>
+          <p:nvPr/>
+        </p:nvSpPr>
+        <p:spPr>
+          <a:xfrm>
+            <a:off x="6446520" y="1645920"/>
+            <a:ext cx="5029200" cy="457200"/>
+          </a:xfrm>
+          <a:prstGeom prst="rect">
+            <a:avLst/>
+          </a:prstGeom>
+          <a:noFill/>
+        </p:spPr>
+        <p:txBody>
+          <a:bodyPr wrap="square" anchor="t" lIns="45720" rIns="45720" tIns="27432" bIns="27432">
+            <a:spAutoFit/>
+          </a:bodyPr>
+          <a:lstStyle/>
           <a:p>
             <a:pPr algn="l">
               <a:spcAft>
-                <a:spcPts val="1200"/>
+                <a:spcPts val="600"/>
               </a:spcAft>
             </a:pPr>
             <a:r>
-              <a:rPr sz="1600" b="0">
+              <a:rPr sz="1900" b="1">
                 <a:solidFill>
                   <a:srgbClr val="0B0B0B"/>
                 </a:solidFill>
                 <a:latin typeface="Calibri"/>
               </a:rPr>
-              <a:t>•  Alternative builds Claude rejected were not scored against the experimental structure, so we cannot say whether they would have been better.</a:t>
-            </a:r>
-          </a:p>
+              <a:t>Coverage is not enough</a:t>
+            </a:r>
+          </a:p>
+        </p:txBody>
+      </p:sp>
+      <p:sp>
+        <p:nvSpPr>
+          <p:cNvPr id="14" name="TextBox 13"/>
+          <p:cNvSpPr txBox="1"/>
+          <p:nvPr/>
+        </p:nvSpPr>
+        <p:spPr>
+          <a:xfrm>
+            <a:off x="6446520" y="2194560"/>
+            <a:ext cx="5029200" cy="1280160"/>
+          </a:xfrm>
+          <a:prstGeom prst="rect">
+            <a:avLst/>
+          </a:prstGeom>
+          <a:noFill/>
+        </p:spPr>
+        <p:txBody>
+          <a:bodyPr wrap="square" anchor="t" lIns="45720" rIns="45720" tIns="27432" bIns="27432">
+            <a:spAutoFit/>
+          </a:bodyPr>
+          <a:lstStyle/>
           <a:p>
             <a:pPr algn="l">
               <a:spcAft>
-                <a:spcPts val="1200"/>
+                <a:spcPts val="600"/>
               </a:spcAft>
             </a:pPr>
             <a:r>
-              <a:rPr sz="1600" b="0">
-                <a:solidFill>
-                  <a:srgbClr val="0B0B0B"/>
-                </a:solidFill>
-                <a:latin typeface="Calibri"/>
-              </a:rPr>
-              <a:t>•  Evaluation is limited to the CASP evaluation units; T1127 has 7 unobserved EU residues, and T1151s2 is one chain of a complex (scored as a monomer).</a:t>
-            </a:r>
-          </a:p>
+              <a:rPr sz="1400" b="0">
+                <a:solidFill>
+                  <a:srgbClr val="52514E"/>
+                </a:solidFill>
+                <a:latin typeface="Calibri"/>
+              </a:rPr>
+              <a:t>T1124: 81% aligned, but a whole domain is misplaced. At ~27% identity a single template can carry the wrong domain arrangement.</a:t>
+            </a:r>
+          </a:p>
+        </p:txBody>
+      </p:sp>
+      <p:sp>
+        <p:nvSpPr>
+          <p:cNvPr id="15" name="Rectangle 14"/>
+          <p:cNvSpPr/>
+          <p:nvPr/>
+        </p:nvSpPr>
+        <p:spPr>
+          <a:xfrm>
+            <a:off x="548640" y="3794760"/>
+            <a:ext cx="5440680" cy="2103120"/>
+          </a:xfrm>
+          <a:prstGeom prst="rect">
+            <a:avLst/>
+          </a:prstGeom>
+          <a:solidFill>
+            <a:srgbClr val="F5F4F1"/>
+          </a:solidFill>
+          <a:ln>
+            <a:noFill/>
+          </a:ln>
+          <a:effectLst/>
+        </p:spPr>
+        <p:style>
+          <a:lnRef idx="1">
+            <a:schemeClr val="accent1"/>
+          </a:lnRef>
+          <a:fillRef idx="3">
+            <a:schemeClr val="accent1"/>
+          </a:fillRef>
+          <a:effectRef idx="2">
+            <a:schemeClr val="accent1"/>
+          </a:effectRef>
+          <a:fontRef idx="minor">
+            <a:schemeClr val="lt1"/>
+          </a:fontRef>
+        </p:style>
+        <p:txBody>
+          <a:bodyPr rtlCol="0" anchor="ctr"/>
+          <a:lstStyle/>
+          <a:p>
+            <a:pPr algn="ctr"/>
+          </a:p>
+        </p:txBody>
+      </p:sp>
+      <p:sp>
+        <p:nvSpPr>
+          <p:cNvPr id="16" name="Rectangle 15"/>
+          <p:cNvSpPr/>
+          <p:nvPr/>
+        </p:nvSpPr>
+        <p:spPr>
+          <a:xfrm>
+            <a:off x="548640" y="3794760"/>
+            <a:ext cx="82296" cy="2103120"/>
+          </a:xfrm>
+          <a:prstGeom prst="rect">
+            <a:avLst/>
+          </a:prstGeom>
+          <a:solidFill>
+            <a:srgbClr val="EB6834"/>
+          </a:solidFill>
+          <a:ln>
+            <a:noFill/>
+          </a:ln>
+          <a:effectLst/>
+        </p:spPr>
+        <p:style>
+          <a:lnRef idx="1">
+            <a:schemeClr val="accent1"/>
+          </a:lnRef>
+          <a:fillRef idx="3">
+            <a:schemeClr val="accent1"/>
+          </a:fillRef>
+          <a:effectRef idx="2">
+            <a:schemeClr val="accent1"/>
+          </a:effectRef>
+          <a:fontRef idx="minor">
+            <a:schemeClr val="lt1"/>
+          </a:fontRef>
+        </p:style>
+        <p:txBody>
+          <a:bodyPr rtlCol="0" anchor="ctr"/>
+          <a:lstStyle/>
+          <a:p>
+            <a:pPr algn="ctr"/>
+          </a:p>
+        </p:txBody>
+      </p:sp>
+      <p:sp>
+        <p:nvSpPr>
+          <p:cNvPr id="17" name="TextBox 16"/>
+          <p:cNvSpPr txBox="1"/>
+          <p:nvPr/>
+        </p:nvSpPr>
+        <p:spPr>
+          <a:xfrm>
+            <a:off x="822959" y="3977640"/>
+            <a:ext cx="5029200" cy="457200"/>
+          </a:xfrm>
+          <a:prstGeom prst="rect">
+            <a:avLst/>
+          </a:prstGeom>
+          <a:noFill/>
+        </p:spPr>
+        <p:txBody>
+          <a:bodyPr wrap="square" anchor="t" lIns="45720" rIns="45720" tIns="27432" bIns="27432">
+            <a:spAutoFit/>
+          </a:bodyPr>
+          <a:lstStyle/>
           <a:p>
             <a:pPr algn="l">
               <a:spcAft>
-                <a:spcPts val="1200"/>
+                <a:spcPts val="600"/>
               </a:spcAft>
             </a:pPr>
             <a:r>
-              <a:rPr sz="1600" b="0">
+              <a:rPr sz="1900" b="1">
                 <a:solidFill>
                   <a:srgbClr val="0B0B0B"/>
                 </a:solidFill>
                 <a:latin typeface="Calibri"/>
               </a:rPr>
-              <a:t>•  AlphaFold Server also uses PDB templates (for T1151s2 the same WhiB family) plus large sequence alignments: the comparison is method vs method, not template vs no template.</a:t>
+              <a:t>Profile search finds remote templates</a:t>
+            </a:r>
+          </a:p>
+        </p:txBody>
+      </p:sp>
+      <p:sp>
+        <p:nvSpPr>
+          <p:cNvPr id="18" name="TextBox 17"/>
+          <p:cNvSpPr txBox="1"/>
+          <p:nvPr/>
+        </p:nvSpPr>
+        <p:spPr>
+          <a:xfrm>
+            <a:off x="822959" y="4526280"/>
+            <a:ext cx="5029200" cy="1280160"/>
+          </a:xfrm>
+          <a:prstGeom prst="rect">
+            <a:avLst/>
+          </a:prstGeom>
+          <a:noFill/>
+        </p:spPr>
+        <p:txBody>
+          <a:bodyPr wrap="square" anchor="t" lIns="45720" rIns="45720" tIns="27432" bIns="27432">
+            <a:spAutoFit/>
+          </a:bodyPr>
+          <a:lstStyle/>
+          <a:p>
+            <a:pPr algn="l">
+              <a:spcAft>
+                <a:spcPts val="600"/>
+              </a:spcAft>
+            </a:pPr>
+            <a:r>
+              <a:rPr sz="1400" b="0">
+                <a:solidFill>
+                  <a:srgbClr val="52514E"/>
+                </a:solidFill>
+                <a:latin typeface="Calibri"/>
+              </a:rPr>
+              <a:t>T1151s2 (FM/TBM): WhiB-family templates at 38% identity over 55 residues (E ≈ 1e-22) give an accurate core, TM 0.52.</a:t>
+            </a:r>
+          </a:p>
+        </p:txBody>
+      </p:sp>
+      <p:sp>
+        <p:nvSpPr>
+          <p:cNvPr id="19" name="Rectangle 18"/>
+          <p:cNvSpPr/>
+          <p:nvPr/>
+        </p:nvSpPr>
+        <p:spPr>
+          <a:xfrm>
+            <a:off x="6172200" y="3794760"/>
+            <a:ext cx="5440680" cy="2103120"/>
+          </a:xfrm>
+          <a:prstGeom prst="rect">
+            <a:avLst/>
+          </a:prstGeom>
+          <a:solidFill>
+            <a:srgbClr val="F5F4F1"/>
+          </a:solidFill>
+          <a:ln>
+            <a:noFill/>
+          </a:ln>
+          <a:effectLst/>
+        </p:spPr>
+        <p:style>
+          <a:lnRef idx="1">
+            <a:schemeClr val="accent1"/>
+          </a:lnRef>
+          <a:fillRef idx="3">
+            <a:schemeClr val="accent1"/>
+          </a:fillRef>
+          <a:effectRef idx="2">
+            <a:schemeClr val="accent1"/>
+          </a:effectRef>
+          <a:fontRef idx="minor">
+            <a:schemeClr val="lt1"/>
+          </a:fontRef>
+        </p:style>
+        <p:txBody>
+          <a:bodyPr rtlCol="0" anchor="ctr"/>
+          <a:lstStyle/>
+          <a:p>
+            <a:pPr algn="ctr"/>
+          </a:p>
+        </p:txBody>
+      </p:sp>
+      <p:sp>
+        <p:nvSpPr>
+          <p:cNvPr id="20" name="Rectangle 19"/>
+          <p:cNvSpPr/>
+          <p:nvPr/>
+        </p:nvSpPr>
+        <p:spPr>
+          <a:xfrm>
+            <a:off x="6172200" y="3794760"/>
+            <a:ext cx="82296" cy="2103120"/>
+          </a:xfrm>
+          <a:prstGeom prst="rect">
+            <a:avLst/>
+          </a:prstGeom>
+          <a:solidFill>
+            <a:srgbClr val="EB6834"/>
+          </a:solidFill>
+          <a:ln>
+            <a:noFill/>
+          </a:ln>
+          <a:effectLst/>
+        </p:spPr>
+        <p:style>
+          <a:lnRef idx="1">
+            <a:schemeClr val="accent1"/>
+          </a:lnRef>
+          <a:fillRef idx="3">
+            <a:schemeClr val="accent1"/>
+          </a:fillRef>
+          <a:effectRef idx="2">
+            <a:schemeClr val="accent1"/>
+          </a:effectRef>
+          <a:fontRef idx="minor">
+            <a:schemeClr val="lt1"/>
+          </a:fontRef>
+        </p:style>
+        <p:txBody>
+          <a:bodyPr rtlCol="0" anchor="ctr"/>
+          <a:lstStyle/>
+          <a:p>
+            <a:pPr algn="ctr"/>
+          </a:p>
+        </p:txBody>
+      </p:sp>
+      <p:sp>
+        <p:nvSpPr>
+          <p:cNvPr id="21" name="TextBox 20"/>
+          <p:cNvSpPr txBox="1"/>
+          <p:nvPr/>
+        </p:nvSpPr>
+        <p:spPr>
+          <a:xfrm>
+            <a:off x="6446520" y="3977640"/>
+            <a:ext cx="5029200" cy="457200"/>
+          </a:xfrm>
+          <a:prstGeom prst="rect">
+            <a:avLst/>
+          </a:prstGeom>
+          <a:noFill/>
+        </p:spPr>
+        <p:txBody>
+          <a:bodyPr wrap="square" anchor="t" lIns="45720" rIns="45720" tIns="27432" bIns="27432">
+            <a:spAutoFit/>
+          </a:bodyPr>
+          <a:lstStyle/>
+          <a:p>
+            <a:pPr algn="l">
+              <a:spcAft>
+                <a:spcPts val="600"/>
+              </a:spcAft>
+            </a:pPr>
+            <a:r>
+              <a:rPr sz="1900" b="1">
+                <a:solidFill>
+                  <a:srgbClr val="0B0B0B"/>
+                </a:solidFill>
+                <a:latin typeface="Calibri"/>
+              </a:rPr>
+              <a:t>AlphaFold3 fills the gaps</a:t>
+            </a:r>
+          </a:p>
+        </p:txBody>
+      </p:sp>
+      <p:sp>
+        <p:nvSpPr>
+          <p:cNvPr id="22" name="TextBox 21"/>
+          <p:cNvSpPr txBox="1"/>
+          <p:nvPr/>
+        </p:nvSpPr>
+        <p:spPr>
+          <a:xfrm>
+            <a:off x="6446520" y="4526280"/>
+            <a:ext cx="5029200" cy="1280160"/>
+          </a:xfrm>
+          <a:prstGeom prst="rect">
+            <a:avLst/>
+          </a:prstGeom>
+          <a:noFill/>
+        </p:spPr>
+        <p:txBody>
+          <a:bodyPr wrap="square" anchor="t" lIns="45720" rIns="45720" tIns="27432" bIns="27432">
+            <a:spAutoFit/>
+          </a:bodyPr>
+          <a:lstStyle/>
+          <a:p>
+            <a:pPr algn="l">
+              <a:spcAft>
+                <a:spcPts val="600"/>
+              </a:spcAft>
+            </a:pPr>
+            <a:r>
+              <a:rPr sz="1400" b="0">
+                <a:solidFill>
+                  <a:srgbClr val="52514E"/>
+                </a:solidFill>
+                <a:latin typeface="Calibri"/>
+              </a:rPr>
+              <a:t>TM 0.92–0.97 on all three, including the T1127 insertion and the T1151s2 tail. Remaining errors are at disordered termini.</a:t>
             </a:r>
           </a:p>
         </p:txBody>
@@ -9045,7 +9788,7 @@
                 </a:solidFill>
                 <a:latin typeface="Calibri"/>
               </a:rPr>
-              <a:t>SUMMARY</a:t>
+              <a:t>DISCUSSION</a:t>
             </a:r>
           </a:p>
         </p:txBody>
@@ -9084,7 +9827,7 @@
                 </a:solidFill>
                 <a:latin typeface="Calibri"/>
               </a:rPr>
-              <a:t>Conclusion</a:t>
+              <a:t>Limitations</a:t>
             </a:r>
           </a:p>
         </p:txBody>
@@ -9159,6 +9902,318 @@
                 <a:latin typeface="Calibri"/>
               </a:rPr>
               <a:t>15</a:t>
+            </a:r>
+          </a:p>
+        </p:txBody>
+      </p:sp>
+      <p:sp>
+        <p:nvSpPr>
+          <p:cNvPr id="6" name="TextBox 5"/>
+          <p:cNvSpPr txBox="1"/>
+          <p:nvPr/>
+        </p:nvSpPr>
+        <p:spPr>
+          <a:xfrm>
+            <a:off x="548640" y="6473952"/>
+            <a:ext cx="7315200" cy="274320"/>
+          </a:xfrm>
+          <a:prstGeom prst="rect">
+            <a:avLst/>
+          </a:prstGeom>
+          <a:noFill/>
+        </p:spPr>
+        <p:txBody>
+          <a:bodyPr wrap="square" anchor="t" lIns="45720" rIns="45720" tIns="27432" bIns="27432">
+            <a:spAutoFit/>
+          </a:bodyPr>
+          <a:lstStyle/>
+          <a:p>
+            <a:pPr algn="l">
+              <a:spcAft>
+                <a:spcPts val="600"/>
+              </a:spcAft>
+            </a:pPr>
+            <a:r>
+              <a:rPr sz="1000" b="0">
+                <a:solidFill>
+                  <a:srgbClr val="52514E"/>
+                </a:solidFill>
+                <a:latin typeface="Calibri"/>
+              </a:rPr>
+              <a:t>CMP_SC 8170 · Project 2 · Template-based modeling vs AlphaFold3</a:t>
+            </a:r>
+          </a:p>
+        </p:txBody>
+      </p:sp>
+      <p:sp>
+        <p:nvSpPr>
+          <p:cNvPr id="7" name="TextBox 6"/>
+          <p:cNvSpPr txBox="1"/>
+          <p:nvPr/>
+        </p:nvSpPr>
+        <p:spPr>
+          <a:xfrm>
+            <a:off x="548640" y="1463040"/>
+            <a:ext cx="11064240" cy="4572000"/>
+          </a:xfrm>
+          <a:prstGeom prst="rect">
+            <a:avLst/>
+          </a:prstGeom>
+          <a:noFill/>
+        </p:spPr>
+        <p:txBody>
+          <a:bodyPr wrap="square" anchor="t" lIns="45720" rIns="45720" tIns="27432" bIns="27432">
+            <a:spAutoFit/>
+          </a:bodyPr>
+          <a:lstStyle/>
+          <a:p>
+            <a:pPr algn="l">
+              <a:spcAft>
+                <a:spcPts val="1200"/>
+              </a:spcAft>
+            </a:pPr>
+            <a:r>
+              <a:rPr sz="1600" b="0">
+                <a:solidFill>
+                  <a:srgbClr val="0B0B0B"/>
+                </a:solidFill>
+                <a:latin typeface="Calibri"/>
+              </a:rPr>
+              <a:t>•  Three targets, one MODELLER and one AlphaFold3 model each: case studies, not trends.</a:t>
+            </a:r>
+          </a:p>
+          <a:p>
+            <a:pPr algn="l">
+              <a:spcAft>
+                <a:spcPts val="1200"/>
+              </a:spcAft>
+            </a:pPr>
+            <a:r>
+              <a:rPr sz="1600" b="0">
+                <a:solidFill>
+                  <a:srgbClr val="0B0B0B"/>
+                </a:solidFill>
+                <a:latin typeface="Calibri"/>
+              </a:rPr>
+              <a:t>•  Only single-template models; combining templates or modelling the T1124 dimer might fix part of the uncovered or misplaced regions.</a:t>
+            </a:r>
+          </a:p>
+          <a:p>
+            <a:pPr algn="l">
+              <a:spcAft>
+                <a:spcPts val="1200"/>
+              </a:spcAft>
+            </a:pPr>
+            <a:r>
+              <a:rPr sz="1600" b="0">
+                <a:solidFill>
+                  <a:srgbClr val="0B0B0B"/>
+                </a:solidFill>
+                <a:latin typeface="Calibri"/>
+              </a:rPr>
+              <a:t>•  Alternative builds Claude rejected were not scored against the experimental structure, so we cannot say whether they would have been better.</a:t>
+            </a:r>
+          </a:p>
+          <a:p>
+            <a:pPr algn="l">
+              <a:spcAft>
+                <a:spcPts val="1200"/>
+              </a:spcAft>
+            </a:pPr>
+            <a:r>
+              <a:rPr sz="1600" b="0">
+                <a:solidFill>
+                  <a:srgbClr val="0B0B0B"/>
+                </a:solidFill>
+                <a:latin typeface="Calibri"/>
+              </a:rPr>
+              <a:t>•  Evaluation is limited to the CASP evaluation units; T1127 has 7 unobserved EU residues, and T1151s2 is one chain of a complex (scored as a monomer).</a:t>
+            </a:r>
+          </a:p>
+          <a:p>
+            <a:pPr algn="l">
+              <a:spcAft>
+                <a:spcPts val="1200"/>
+              </a:spcAft>
+            </a:pPr>
+            <a:r>
+              <a:rPr sz="1600" b="0">
+                <a:solidFill>
+                  <a:srgbClr val="0B0B0B"/>
+                </a:solidFill>
+                <a:latin typeface="Calibri"/>
+              </a:rPr>
+              <a:t>•  AlphaFold Server also uses PDB templates (for T1151s2 the same WhiB family) plus large sequence alignments: the comparison is method vs method, not template vs no template.</a:t>
+            </a:r>
+          </a:p>
+        </p:txBody>
+      </p:sp>
+    </p:spTree>
+  </p:cSld>
+  <p:clrMapOvr>
+    <a:masterClrMapping/>
+  </p:clrMapOvr>
+</p:sld>
+</file>
+
+<file path=ppt/slides/slide16.xml><?xml version="1.0" encoding="utf-8"?>
+<p:sld xmlns:a="http://schemas.openxmlformats.org/drawingml/2006/main" xmlns:p="http://schemas.openxmlformats.org/presentationml/2006/main" xmlns:r="http://schemas.openxmlformats.org/officeDocument/2006/relationships">
+  <p:cSld>
+    <p:spTree>
+      <p:nvGrpSpPr>
+        <p:cNvPr id="1" name=""/>
+        <p:cNvGrpSpPr/>
+        <p:nvPr/>
+      </p:nvGrpSpPr>
+      <p:grpSpPr/>
+      <p:sp>
+        <p:nvSpPr>
+          <p:cNvPr id="2" name="TextBox 1"/>
+          <p:cNvSpPr txBox="1"/>
+          <p:nvPr/>
+        </p:nvSpPr>
+        <p:spPr>
+          <a:xfrm>
+            <a:off x="548640" y="292608"/>
+            <a:ext cx="10972800" cy="274320"/>
+          </a:xfrm>
+          <a:prstGeom prst="rect">
+            <a:avLst/>
+          </a:prstGeom>
+          <a:noFill/>
+        </p:spPr>
+        <p:txBody>
+          <a:bodyPr wrap="square" anchor="t" lIns="45720" rIns="45720" tIns="27432" bIns="27432">
+            <a:spAutoFit/>
+          </a:bodyPr>
+          <a:lstStyle/>
+          <a:p>
+            <a:pPr algn="l">
+              <a:spcAft>
+                <a:spcPts val="600"/>
+              </a:spcAft>
+            </a:pPr>
+            <a:r>
+              <a:rPr sz="1100" b="1">
+                <a:solidFill>
+                  <a:srgbClr val="2A78D6"/>
+                </a:solidFill>
+                <a:latin typeface="Calibri"/>
+              </a:rPr>
+              <a:t>SUMMARY</a:t>
+            </a:r>
+          </a:p>
+        </p:txBody>
+      </p:sp>
+      <p:sp>
+        <p:nvSpPr>
+          <p:cNvPr id="3" name="TextBox 2"/>
+          <p:cNvSpPr txBox="1"/>
+          <p:nvPr/>
+        </p:nvSpPr>
+        <p:spPr>
+          <a:xfrm>
+            <a:off x="548640" y="502920"/>
+            <a:ext cx="11064240" cy="640080"/>
+          </a:xfrm>
+          <a:prstGeom prst="rect">
+            <a:avLst/>
+          </a:prstGeom>
+          <a:noFill/>
+        </p:spPr>
+        <p:txBody>
+          <a:bodyPr wrap="square" anchor="t" lIns="45720" rIns="45720" tIns="27432" bIns="27432">
+            <a:spAutoFit/>
+          </a:bodyPr>
+          <a:lstStyle/>
+          <a:p>
+            <a:pPr algn="l">
+              <a:spcAft>
+                <a:spcPts val="600"/>
+              </a:spcAft>
+            </a:pPr>
+            <a:r>
+              <a:rPr sz="2800" b="1">
+                <a:solidFill>
+                  <a:srgbClr val="0B0B0B"/>
+                </a:solidFill>
+                <a:latin typeface="Calibri"/>
+              </a:rPr>
+              <a:t>Conclusion</a:t>
+            </a:r>
+          </a:p>
+        </p:txBody>
+      </p:sp>
+      <p:cxnSp>
+        <p:nvCxnSpPr>
+          <p:cNvPr id="4" name="Connector 3"/>
+          <p:cNvCxnSpPr/>
+          <p:nvPr/>
+        </p:nvCxnSpPr>
+        <p:spPr>
+          <a:xfrm>
+            <a:off x="548640" y="1170432"/>
+            <a:ext cx="11094415" cy="0"/>
+          </a:xfrm>
+          <a:prstGeom prst="line">
+            <a:avLst/>
+          </a:prstGeom>
+          <a:ln w="12700">
+            <a:solidFill>
+              <a:srgbClr val="E4E3DF"/>
+            </a:solidFill>
+          </a:ln>
+        </p:spPr>
+        <p:style>
+          <a:lnRef idx="2">
+            <a:schemeClr val="accent1"/>
+          </a:lnRef>
+          <a:fillRef idx="0">
+            <a:schemeClr val="accent1"/>
+          </a:fillRef>
+          <a:effectRef idx="1">
+            <a:schemeClr val="accent1"/>
+          </a:effectRef>
+          <a:fontRef idx="minor">
+            <a:schemeClr val="tx1"/>
+          </a:fontRef>
+        </p:style>
+      </p:cxnSp>
+      <p:sp>
+        <p:nvSpPr>
+          <p:cNvPr id="5" name="TextBox 4"/>
+          <p:cNvSpPr txBox="1"/>
+          <p:nvPr/>
+        </p:nvSpPr>
+        <p:spPr>
+          <a:xfrm>
+            <a:off x="11185855" y="6473952"/>
+            <a:ext cx="548640" cy="274320"/>
+          </a:xfrm>
+          <a:prstGeom prst="rect">
+            <a:avLst/>
+          </a:prstGeom>
+          <a:noFill/>
+        </p:spPr>
+        <p:txBody>
+          <a:bodyPr wrap="square" anchor="t" lIns="45720" rIns="45720" tIns="27432" bIns="27432">
+            <a:spAutoFit/>
+          </a:bodyPr>
+          <a:lstStyle/>
+          <a:p>
+            <a:pPr algn="r">
+              <a:spcAft>
+                <a:spcPts val="600"/>
+              </a:spcAft>
+            </a:pPr>
+            <a:r>
+              <a:rPr sz="1000" b="0">
+                <a:solidFill>
+                  <a:srgbClr val="52514E"/>
+                </a:solidFill>
+                <a:latin typeface="Calibri"/>
+              </a:rPr>
+              <a:t>16</a:t>
             </a:r>
           </a:p>
         </p:txBody>
